--- a/documentation/WarriorFit_Technisch_NL.pptx
+++ b/documentation/WarriorFit_Technisch_NL.pptx
@@ -4,29 +4,32 @@
   <p:sldMasterIdLst>
     <p:sldMasterId id="2147483648" r:id="rId1"/>
   </p:sldMasterIdLst>
+  <p:notesMasterIdLst>
+    <p:notesMasterId r:id="rId22"/>
+  </p:notesMasterIdLst>
   <p:sldIdLst>
-    <p:sldId id="256" r:id="rId7"/>
-    <p:sldId id="257" r:id="rId8"/>
-    <p:sldId id="258" r:id="rId9"/>
-    <p:sldId id="259" r:id="rId10"/>
-    <p:sldId id="260" r:id="rId11"/>
-    <p:sldId id="261" r:id="rId12"/>
-    <p:sldId id="262" r:id="rId13"/>
-    <p:sldId id="263" r:id="rId14"/>
-    <p:sldId id="264" r:id="rId15"/>
-    <p:sldId id="265" r:id="rId16"/>
-    <p:sldId id="266" r:id="rId17"/>
-    <p:sldId id="267" r:id="rId18"/>
-    <p:sldId id="268" r:id="rId19"/>
-    <p:sldId id="269" r:id="rId20"/>
-    <p:sldId id="270" r:id="rId21"/>
-    <p:sldId id="271" r:id="rId22"/>
-    <p:sldId id="272" r:id="rId23"/>
-    <p:sldId id="273" r:id="rId24"/>
-    <p:sldId id="274" r:id="rId25"/>
-    <p:sldId id="275" r:id="rId26"/>
+    <p:sldId id="256" r:id="rId2"/>
+    <p:sldId id="257" r:id="rId3"/>
+    <p:sldId id="258" r:id="rId4"/>
+    <p:sldId id="259" r:id="rId5"/>
+    <p:sldId id="260" r:id="rId6"/>
+    <p:sldId id="261" r:id="rId7"/>
+    <p:sldId id="262" r:id="rId8"/>
+    <p:sldId id="263" r:id="rId9"/>
+    <p:sldId id="264" r:id="rId10"/>
+    <p:sldId id="265" r:id="rId11"/>
+    <p:sldId id="266" r:id="rId12"/>
+    <p:sldId id="267" r:id="rId13"/>
+    <p:sldId id="268" r:id="rId14"/>
+    <p:sldId id="269" r:id="rId15"/>
+    <p:sldId id="270" r:id="rId16"/>
+    <p:sldId id="271" r:id="rId17"/>
+    <p:sldId id="272" r:id="rId18"/>
+    <p:sldId id="273" r:id="rId19"/>
+    <p:sldId id="274" r:id="rId20"/>
+    <p:sldId id="275" r:id="rId21"/>
   </p:sldIdLst>
-  <p:sldSz cx="12191695" cy="6858000" type="screen4x3"/>
+  <p:sldSz cx="12192000" cy="6858000"/>
   <p:notesSz cx="6858000" cy="9144000"/>
   <p:defaultTextStyle>
     <a:defPPr>
@@ -123,7 +126,2556 @@
       </a:defRPr>
     </a:lvl9pPr>
   </p:defaultTextStyle>
+  <p:extLst>
+    <p:ext uri="{EFAFB233-063F-42B5-8137-9DF3F51BA10A}">
+      <p15:sldGuideLst xmlns:p15="http://schemas.microsoft.com/office/powerpoint/2012/main">
+        <p15:guide id="1" orient="horz" pos="2160">
+          <p15:clr>
+            <a:srgbClr val="A4A3A4"/>
+          </p15:clr>
+        </p15:guide>
+        <p15:guide id="2" pos="2880">
+          <p15:clr>
+            <a:srgbClr val="A4A3A4"/>
+          </p15:clr>
+        </p15:guide>
+      </p15:sldGuideLst>
+    </p:ext>
+  </p:extLst>
 </p:presentation>
+</file>
+
+<file path=ppt/notesMasters/notesMaster1.xml><?xml version="1.0" encoding="utf-8"?>
+<p:notesMaster xmlns:a="http://schemas.openxmlformats.org/drawingml/2006/main" xmlns:r="http://schemas.openxmlformats.org/officeDocument/2006/relationships" xmlns:p="http://schemas.openxmlformats.org/presentationml/2006/main">
+  <p:cSld>
+    <p:bg>
+      <p:bgRef idx="1001">
+        <a:schemeClr val="bg1"/>
+      </p:bgRef>
+    </p:bg>
+    <p:spTree>
+      <p:nvGrpSpPr>
+        <p:cNvPr id="1" name=""/>
+        <p:cNvGrpSpPr/>
+        <p:nvPr/>
+      </p:nvGrpSpPr>
+      <p:grpSpPr>
+        <a:xfrm>
+          <a:off x="0" y="0"/>
+          <a:ext cx="0" cy="0"/>
+          <a:chOff x="0" y="0"/>
+          <a:chExt cx="0" cy="0"/>
+        </a:xfrm>
+      </p:grpSpPr>
+      <p:sp>
+        <p:nvSpPr>
+          <p:cNvPr id="2" name="Header Placeholder 1"/>
+          <p:cNvSpPr>
+            <a:spLocks noGrp="1"/>
+          </p:cNvSpPr>
+          <p:nvPr>
+            <p:ph type="hdr" sz="quarter"/>
+          </p:nvPr>
+        </p:nvSpPr>
+        <p:spPr>
+          <a:xfrm>
+            <a:off x="0" y="0"/>
+            <a:ext cx="2971800" cy="458788"/>
+          </a:xfrm>
+          <a:prstGeom prst="rect">
+            <a:avLst/>
+          </a:prstGeom>
+        </p:spPr>
+        <p:txBody>
+          <a:bodyPr vert="horz" lIns="91440" tIns="45720" rIns="91440" bIns="45720" rtlCol="0"/>
+          <a:lstStyle>
+            <a:lvl1pPr algn="l">
+              <a:defRPr sz="1200"/>
+            </a:lvl1pPr>
+          </a:lstStyle>
+          <a:p>
+            <a:endParaRPr lang="en-BE"/>
+          </a:p>
+        </p:txBody>
+      </p:sp>
+      <p:sp>
+        <p:nvSpPr>
+          <p:cNvPr id="3" name="Date Placeholder 2"/>
+          <p:cNvSpPr>
+            <a:spLocks noGrp="1"/>
+          </p:cNvSpPr>
+          <p:nvPr>
+            <p:ph type="dt" idx="1"/>
+          </p:nvPr>
+        </p:nvSpPr>
+        <p:spPr>
+          <a:xfrm>
+            <a:off x="3884613" y="0"/>
+            <a:ext cx="2971800" cy="458788"/>
+          </a:xfrm>
+          <a:prstGeom prst="rect">
+            <a:avLst/>
+          </a:prstGeom>
+        </p:spPr>
+        <p:txBody>
+          <a:bodyPr vert="horz" lIns="91440" tIns="45720" rIns="91440" bIns="45720" rtlCol="0"/>
+          <a:lstStyle>
+            <a:lvl1pPr algn="r">
+              <a:defRPr sz="1200"/>
+            </a:lvl1pPr>
+          </a:lstStyle>
+          <a:p>
+            <a:fld id="{47348DCF-422B-CE47-AD03-2404ECB4BCFB}" type="datetimeFigureOut">
+              <a:rPr lang="en-BE" smtClean="0"/>
+              <a:t>17/06/2026</a:t>
+            </a:fld>
+            <a:endParaRPr lang="en-BE"/>
+          </a:p>
+        </p:txBody>
+      </p:sp>
+      <p:sp>
+        <p:nvSpPr>
+          <p:cNvPr id="4" name="Slide Image Placeholder 3"/>
+          <p:cNvSpPr>
+            <a:spLocks noGrp="1" noRot="1" noChangeAspect="1"/>
+          </p:cNvSpPr>
+          <p:nvPr>
+            <p:ph type="sldImg" idx="2"/>
+          </p:nvPr>
+        </p:nvSpPr>
+        <p:spPr>
+          <a:xfrm>
+            <a:off x="685800" y="1143000"/>
+            <a:ext cx="5486400" cy="3086100"/>
+          </a:xfrm>
+          <a:prstGeom prst="rect">
+            <a:avLst/>
+          </a:prstGeom>
+          <a:noFill/>
+          <a:ln w="12700">
+            <a:solidFill>
+              <a:prstClr val="black"/>
+            </a:solidFill>
+          </a:ln>
+        </p:spPr>
+        <p:txBody>
+          <a:bodyPr vert="horz" lIns="91440" tIns="45720" rIns="91440" bIns="45720" rtlCol="0" anchor="ctr"/>
+          <a:lstStyle/>
+          <a:p>
+            <a:endParaRPr lang="en-BE"/>
+          </a:p>
+        </p:txBody>
+      </p:sp>
+      <p:sp>
+        <p:nvSpPr>
+          <p:cNvPr id="5" name="Notes Placeholder 4"/>
+          <p:cNvSpPr>
+            <a:spLocks noGrp="1"/>
+          </p:cNvSpPr>
+          <p:nvPr>
+            <p:ph type="body" sz="quarter" idx="3"/>
+          </p:nvPr>
+        </p:nvSpPr>
+        <p:spPr>
+          <a:xfrm>
+            <a:off x="685800" y="4400550"/>
+            <a:ext cx="5486400" cy="3600450"/>
+          </a:xfrm>
+          <a:prstGeom prst="rect">
+            <a:avLst/>
+          </a:prstGeom>
+        </p:spPr>
+        <p:txBody>
+          <a:bodyPr vert="horz" lIns="91440" tIns="45720" rIns="91440" bIns="45720" rtlCol="0"/>
+          <a:lstStyle/>
+          <a:p>
+            <a:pPr lvl="0"/>
+            <a:r>
+              <a:rPr lang="en-GB"/>
+              <a:t>Click to edit Master text styles</a:t>
+            </a:r>
+          </a:p>
+          <a:p>
+            <a:pPr lvl="1"/>
+            <a:r>
+              <a:rPr lang="en-GB"/>
+              <a:t>Second level</a:t>
+            </a:r>
+          </a:p>
+          <a:p>
+            <a:pPr lvl="2"/>
+            <a:r>
+              <a:rPr lang="en-GB"/>
+              <a:t>Third level</a:t>
+            </a:r>
+          </a:p>
+          <a:p>
+            <a:pPr lvl="3"/>
+            <a:r>
+              <a:rPr lang="en-GB"/>
+              <a:t>Fourth level</a:t>
+            </a:r>
+          </a:p>
+          <a:p>
+            <a:pPr lvl="4"/>
+            <a:r>
+              <a:rPr lang="en-GB"/>
+              <a:t>Fifth level</a:t>
+            </a:r>
+            <a:endParaRPr lang="en-BE"/>
+          </a:p>
+        </p:txBody>
+      </p:sp>
+      <p:sp>
+        <p:nvSpPr>
+          <p:cNvPr id="6" name="Footer Placeholder 5"/>
+          <p:cNvSpPr>
+            <a:spLocks noGrp="1"/>
+          </p:cNvSpPr>
+          <p:nvPr>
+            <p:ph type="ftr" sz="quarter" idx="4"/>
+          </p:nvPr>
+        </p:nvSpPr>
+        <p:spPr>
+          <a:xfrm>
+            <a:off x="0" y="8685213"/>
+            <a:ext cx="2971800" cy="458787"/>
+          </a:xfrm>
+          <a:prstGeom prst="rect">
+            <a:avLst/>
+          </a:prstGeom>
+        </p:spPr>
+        <p:txBody>
+          <a:bodyPr vert="horz" lIns="91440" tIns="45720" rIns="91440" bIns="45720" rtlCol="0" anchor="b"/>
+          <a:lstStyle>
+            <a:lvl1pPr algn="l">
+              <a:defRPr sz="1200"/>
+            </a:lvl1pPr>
+          </a:lstStyle>
+          <a:p>
+            <a:endParaRPr lang="en-BE"/>
+          </a:p>
+        </p:txBody>
+      </p:sp>
+      <p:sp>
+        <p:nvSpPr>
+          <p:cNvPr id="7" name="Slide Number Placeholder 6"/>
+          <p:cNvSpPr>
+            <a:spLocks noGrp="1"/>
+          </p:cNvSpPr>
+          <p:nvPr>
+            <p:ph type="sldNum" sz="quarter" idx="5"/>
+          </p:nvPr>
+        </p:nvSpPr>
+        <p:spPr>
+          <a:xfrm>
+            <a:off x="3884613" y="8685213"/>
+            <a:ext cx="2971800" cy="458787"/>
+          </a:xfrm>
+          <a:prstGeom prst="rect">
+            <a:avLst/>
+          </a:prstGeom>
+        </p:spPr>
+        <p:txBody>
+          <a:bodyPr vert="horz" lIns="91440" tIns="45720" rIns="91440" bIns="45720" rtlCol="0" anchor="b"/>
+          <a:lstStyle>
+            <a:lvl1pPr algn="r">
+              <a:defRPr sz="1200"/>
+            </a:lvl1pPr>
+          </a:lstStyle>
+          <a:p>
+            <a:fld id="{6C11C5A2-6844-DC44-92D7-B5E8680DCECE}" type="slidenum">
+              <a:rPr lang="en-BE" smtClean="0"/>
+              <a:t>‹#›</a:t>
+            </a:fld>
+            <a:endParaRPr lang="en-BE"/>
+          </a:p>
+        </p:txBody>
+      </p:sp>
+    </p:spTree>
+    <p:extLst>
+      <p:ext uri="{BB962C8B-B14F-4D97-AF65-F5344CB8AC3E}">
+        <p14:creationId xmlns:p14="http://schemas.microsoft.com/office/powerpoint/2010/main" val="3989316058"/>
+      </p:ext>
+    </p:extLst>
+  </p:cSld>
+  <p:clrMap bg1="lt1" tx1="dk1" bg2="lt2" tx2="dk2" accent1="accent1" accent2="accent2" accent3="accent3" accent4="accent4" accent5="accent5" accent6="accent6" hlink="hlink" folHlink="folHlink"/>
+  <p:notesStyle>
+    <a:lvl1pPr marL="0" algn="l" defTabSz="914400" rtl="0" eaLnBrk="1" latinLnBrk="0" hangingPunct="1">
+      <a:defRPr sz="1200" kern="1200">
+        <a:solidFill>
+          <a:schemeClr val="tx1"/>
+        </a:solidFill>
+        <a:latin typeface="+mn-lt"/>
+        <a:ea typeface="+mn-ea"/>
+        <a:cs typeface="+mn-cs"/>
+      </a:defRPr>
+    </a:lvl1pPr>
+    <a:lvl2pPr marL="457200" algn="l" defTabSz="914400" rtl="0" eaLnBrk="1" latinLnBrk="0" hangingPunct="1">
+      <a:defRPr sz="1200" kern="1200">
+        <a:solidFill>
+          <a:schemeClr val="tx1"/>
+        </a:solidFill>
+        <a:latin typeface="+mn-lt"/>
+        <a:ea typeface="+mn-ea"/>
+        <a:cs typeface="+mn-cs"/>
+      </a:defRPr>
+    </a:lvl2pPr>
+    <a:lvl3pPr marL="914400" algn="l" defTabSz="914400" rtl="0" eaLnBrk="1" latinLnBrk="0" hangingPunct="1">
+      <a:defRPr sz="1200" kern="1200">
+        <a:solidFill>
+          <a:schemeClr val="tx1"/>
+        </a:solidFill>
+        <a:latin typeface="+mn-lt"/>
+        <a:ea typeface="+mn-ea"/>
+        <a:cs typeface="+mn-cs"/>
+      </a:defRPr>
+    </a:lvl3pPr>
+    <a:lvl4pPr marL="1371600" algn="l" defTabSz="914400" rtl="0" eaLnBrk="1" latinLnBrk="0" hangingPunct="1">
+      <a:defRPr sz="1200" kern="1200">
+        <a:solidFill>
+          <a:schemeClr val="tx1"/>
+        </a:solidFill>
+        <a:latin typeface="+mn-lt"/>
+        <a:ea typeface="+mn-ea"/>
+        <a:cs typeface="+mn-cs"/>
+      </a:defRPr>
+    </a:lvl4pPr>
+    <a:lvl5pPr marL="1828800" algn="l" defTabSz="914400" rtl="0" eaLnBrk="1" latinLnBrk="0" hangingPunct="1">
+      <a:defRPr sz="1200" kern="1200">
+        <a:solidFill>
+          <a:schemeClr val="tx1"/>
+        </a:solidFill>
+        <a:latin typeface="+mn-lt"/>
+        <a:ea typeface="+mn-ea"/>
+        <a:cs typeface="+mn-cs"/>
+      </a:defRPr>
+    </a:lvl5pPr>
+    <a:lvl6pPr marL="2286000" algn="l" defTabSz="914400" rtl="0" eaLnBrk="1" latinLnBrk="0" hangingPunct="1">
+      <a:defRPr sz="1200" kern="1200">
+        <a:solidFill>
+          <a:schemeClr val="tx1"/>
+        </a:solidFill>
+        <a:latin typeface="+mn-lt"/>
+        <a:ea typeface="+mn-ea"/>
+        <a:cs typeface="+mn-cs"/>
+      </a:defRPr>
+    </a:lvl6pPr>
+    <a:lvl7pPr marL="2743200" algn="l" defTabSz="914400" rtl="0" eaLnBrk="1" latinLnBrk="0" hangingPunct="1">
+      <a:defRPr sz="1200" kern="1200">
+        <a:solidFill>
+          <a:schemeClr val="tx1"/>
+        </a:solidFill>
+        <a:latin typeface="+mn-lt"/>
+        <a:ea typeface="+mn-ea"/>
+        <a:cs typeface="+mn-cs"/>
+      </a:defRPr>
+    </a:lvl7pPr>
+    <a:lvl8pPr marL="3200400" algn="l" defTabSz="914400" rtl="0" eaLnBrk="1" latinLnBrk="0" hangingPunct="1">
+      <a:defRPr sz="1200" kern="1200">
+        <a:solidFill>
+          <a:schemeClr val="tx1"/>
+        </a:solidFill>
+        <a:latin typeface="+mn-lt"/>
+        <a:ea typeface="+mn-ea"/>
+        <a:cs typeface="+mn-cs"/>
+      </a:defRPr>
+    </a:lvl8pPr>
+    <a:lvl9pPr marL="3657600" algn="l" defTabSz="914400" rtl="0" eaLnBrk="1" latinLnBrk="0" hangingPunct="1">
+      <a:defRPr sz="1200" kern="1200">
+        <a:solidFill>
+          <a:schemeClr val="tx1"/>
+        </a:solidFill>
+        <a:latin typeface="+mn-lt"/>
+        <a:ea typeface="+mn-ea"/>
+        <a:cs typeface="+mn-cs"/>
+      </a:defRPr>
+    </a:lvl9pPr>
+  </p:notesStyle>
+</p:notesMaster>
+</file>
+
+<file path=ppt/notesSlides/notesSlide1.xml><?xml version="1.0" encoding="utf-8"?>
+<p:notes xmlns:a="http://schemas.openxmlformats.org/drawingml/2006/main" xmlns:r="http://schemas.openxmlformats.org/officeDocument/2006/relationships" xmlns:p="http://schemas.openxmlformats.org/presentationml/2006/main">
+  <p:cSld>
+    <p:spTree>
+      <p:nvGrpSpPr>
+        <p:cNvPr id="1" name=""/>
+        <p:cNvGrpSpPr/>
+        <p:nvPr/>
+      </p:nvGrpSpPr>
+      <p:grpSpPr>
+        <a:xfrm>
+          <a:off x="0" y="0"/>
+          <a:ext cx="0" cy="0"/>
+          <a:chOff x="0" y="0"/>
+          <a:chExt cx="0" cy="0"/>
+        </a:xfrm>
+      </p:grpSpPr>
+      <p:sp>
+        <p:nvSpPr>
+          <p:cNvPr id="2" name="Slide Image Placeholder 1"/>
+          <p:cNvSpPr>
+            <a:spLocks noGrp="1" noRot="1" noChangeAspect="1"/>
+          </p:cNvSpPr>
+          <p:nvPr>
+            <p:ph type="sldImg"/>
+          </p:nvPr>
+        </p:nvSpPr>
+        <p:spPr/>
+      </p:sp>
+      <p:sp>
+        <p:nvSpPr>
+          <p:cNvPr id="3" name="Notes Placeholder 2"/>
+          <p:cNvSpPr>
+            <a:spLocks noGrp="1"/>
+          </p:cNvSpPr>
+          <p:nvPr>
+            <p:ph type="body" idx="1"/>
+          </p:nvPr>
+        </p:nvSpPr>
+        <p:spPr/>
+        <p:txBody>
+          <a:bodyPr/>
+          <a:lstStyle/>
+          <a:p>
+            <a:r>
+              <a:rPr lang="en-BE" sz="1200" b="1" u="none" strike="noStrike" kern="1200" dirty="0">
+                <a:solidFill>
+                  <a:schemeClr val="tx1"/>
+                </a:solidFill>
+                <a:effectLst/>
+                <a:latin typeface="+mn-lt"/>
+                <a:ea typeface="+mn-ea"/>
+                <a:cs typeface="+mn-cs"/>
+              </a:rPr>
+              <a:t>Role-Based Access Control</a:t>
+            </a:r>
+            <a:r>
+              <a:rPr lang="en-BE" dirty="0"/>
+              <a:t> </a:t>
+            </a:r>
+          </a:p>
+        </p:txBody>
+      </p:sp>
+      <p:sp>
+        <p:nvSpPr>
+          <p:cNvPr id="4" name="Slide Number Placeholder 3"/>
+          <p:cNvSpPr>
+            <a:spLocks noGrp="1"/>
+          </p:cNvSpPr>
+          <p:nvPr>
+            <p:ph type="sldNum" sz="quarter" idx="5"/>
+          </p:nvPr>
+        </p:nvSpPr>
+        <p:spPr/>
+        <p:txBody>
+          <a:bodyPr/>
+          <a:lstStyle/>
+          <a:p>
+            <a:fld id="{6C11C5A2-6844-DC44-92D7-B5E8680DCECE}" type="slidenum">
+              <a:rPr lang="en-BE" smtClean="0"/>
+              <a:t>3</a:t>
+            </a:fld>
+            <a:endParaRPr lang="en-BE"/>
+          </a:p>
+        </p:txBody>
+      </p:sp>
+    </p:spTree>
+    <p:extLst>
+      <p:ext uri="{BB962C8B-B14F-4D97-AF65-F5344CB8AC3E}">
+        <p14:creationId xmlns:p14="http://schemas.microsoft.com/office/powerpoint/2010/main" val="472695462"/>
+      </p:ext>
+    </p:extLst>
+  </p:cSld>
+  <p:clrMapOvr>
+    <a:masterClrMapping/>
+  </p:clrMapOvr>
+</p:notes>
+</file>
+
+<file path=ppt/notesSlides/notesSlide2.xml><?xml version="1.0" encoding="utf-8"?>
+<p:notes xmlns:a="http://schemas.openxmlformats.org/drawingml/2006/main" xmlns:r="http://schemas.openxmlformats.org/officeDocument/2006/relationships" xmlns:p="http://schemas.openxmlformats.org/presentationml/2006/main">
+  <p:cSld>
+    <p:spTree>
+      <p:nvGrpSpPr>
+        <p:cNvPr id="1" name=""/>
+        <p:cNvGrpSpPr/>
+        <p:nvPr/>
+      </p:nvGrpSpPr>
+      <p:grpSpPr>
+        <a:xfrm>
+          <a:off x="0" y="0"/>
+          <a:ext cx="0" cy="0"/>
+          <a:chOff x="0" y="0"/>
+          <a:chExt cx="0" cy="0"/>
+        </a:xfrm>
+      </p:grpSpPr>
+      <p:sp>
+        <p:nvSpPr>
+          <p:cNvPr id="2" name="Slide Image Placeholder 1"/>
+          <p:cNvSpPr>
+            <a:spLocks noGrp="1" noRot="1" noChangeAspect="1"/>
+          </p:cNvSpPr>
+          <p:nvPr>
+            <p:ph type="sldImg"/>
+          </p:nvPr>
+        </p:nvSpPr>
+        <p:spPr/>
+      </p:sp>
+      <p:sp>
+        <p:nvSpPr>
+          <p:cNvPr id="3" name="Notes Placeholder 2"/>
+          <p:cNvSpPr>
+            <a:spLocks noGrp="1"/>
+          </p:cNvSpPr>
+          <p:nvPr>
+            <p:ph type="body" idx="1"/>
+          </p:nvPr>
+        </p:nvSpPr>
+        <p:spPr/>
+        <p:txBody>
+          <a:bodyPr/>
+          <a:lstStyle/>
+          <a:p>
+            <a:pPr fontAlgn="base"/>
+            <a:r>
+              <a:rPr lang="en-BE" sz="1200" b="1" i="0" kern="1200" dirty="0">
+                <a:solidFill>
+                  <a:schemeClr val="tx1"/>
+                </a:solidFill>
+                <a:effectLst/>
+                <a:latin typeface="+mn-lt"/>
+                <a:ea typeface="+mn-ea"/>
+                <a:cs typeface="+mn-cs"/>
+              </a:rPr>
+              <a:t>MOM</a:t>
+            </a:r>
+            <a:r>
+              <a:rPr lang="en-BE" sz="1200" b="0" i="0" kern="1200" dirty="0">
+                <a:solidFill>
+                  <a:schemeClr val="tx1"/>
+                </a:solidFill>
+                <a:effectLst/>
+                <a:latin typeface="+mn-lt"/>
+                <a:ea typeface="+mn-ea"/>
+                <a:cs typeface="+mn-cs"/>
+              </a:rPr>
+              <a:t> (message-oriented-middleware) - is an approach, an architecture for distributed system i.e. a middle layer for the whole distributed system, where there's lot of internal communication (a component is querying data, and then needs to send it to the other component, which will be doing some processing on the data) so components have to share info/data among them.</a:t>
+            </a:r>
+          </a:p>
+          <a:p>
+            <a:pPr fontAlgn="base"/>
+            <a:r>
+              <a:rPr lang="en-BE" sz="1200" b="1" i="0" kern="1200" dirty="0">
+                <a:solidFill>
+                  <a:schemeClr val="tx1"/>
+                </a:solidFill>
+                <a:effectLst/>
+                <a:latin typeface="+mn-lt"/>
+                <a:ea typeface="+mn-ea"/>
+                <a:cs typeface="+mn-cs"/>
+              </a:rPr>
+              <a:t>Message broker</a:t>
+            </a:r>
+            <a:r>
+              <a:rPr lang="en-BE" sz="1200" b="0" i="0" kern="1200" dirty="0">
+                <a:solidFill>
+                  <a:schemeClr val="tx1"/>
+                </a:solidFill>
+                <a:effectLst/>
+                <a:latin typeface="+mn-lt"/>
+                <a:ea typeface="+mn-ea"/>
+                <a:cs typeface="+mn-cs"/>
+              </a:rPr>
+              <a:t> - is any system (in MOM) which handles messages (sending as well as receiving), or to be more precise which routes messages to the specific consumer/recipient. A Message Broker is typically built upon a MOM. The MOM provides the base communication among the applications, and things like message persistence and guaranteed delivery. "Message brokers are a building block of Message oriented middleware."</a:t>
+            </a:r>
+          </a:p>
+          <a:p>
+            <a:endParaRPr lang="en-BE" dirty="0"/>
+          </a:p>
+        </p:txBody>
+      </p:sp>
+      <p:sp>
+        <p:nvSpPr>
+          <p:cNvPr id="4" name="Slide Number Placeholder 3"/>
+          <p:cNvSpPr>
+            <a:spLocks noGrp="1"/>
+          </p:cNvSpPr>
+          <p:nvPr>
+            <p:ph type="sldNum" sz="quarter" idx="5"/>
+          </p:nvPr>
+        </p:nvSpPr>
+        <p:spPr/>
+        <p:txBody>
+          <a:bodyPr/>
+          <a:lstStyle/>
+          <a:p>
+            <a:fld id="{6C11C5A2-6844-DC44-92D7-B5E8680DCECE}" type="slidenum">
+              <a:rPr lang="en-BE" smtClean="0"/>
+              <a:t>10</a:t>
+            </a:fld>
+            <a:endParaRPr lang="en-BE"/>
+          </a:p>
+        </p:txBody>
+      </p:sp>
+    </p:spTree>
+    <p:extLst>
+      <p:ext uri="{BB962C8B-B14F-4D97-AF65-F5344CB8AC3E}">
+        <p14:creationId xmlns:p14="http://schemas.microsoft.com/office/powerpoint/2010/main" val="314074155"/>
+      </p:ext>
+    </p:extLst>
+  </p:cSld>
+  <p:clrMapOvr>
+    <a:masterClrMapping/>
+  </p:clrMapOvr>
+</p:notes>
+</file>
+
+<file path=ppt/notesSlides/notesSlide3.xml><?xml version="1.0" encoding="utf-8"?>
+<p:notes xmlns:a="http://schemas.openxmlformats.org/drawingml/2006/main" xmlns:r="http://schemas.openxmlformats.org/officeDocument/2006/relationships" xmlns:p="http://schemas.openxmlformats.org/presentationml/2006/main">
+  <p:cSld>
+    <p:spTree>
+      <p:nvGrpSpPr>
+        <p:cNvPr id="1" name=""/>
+        <p:cNvGrpSpPr/>
+        <p:nvPr/>
+      </p:nvGrpSpPr>
+      <p:grpSpPr>
+        <a:xfrm>
+          <a:off x="0" y="0"/>
+          <a:ext cx="0" cy="0"/>
+          <a:chOff x="0" y="0"/>
+          <a:chExt cx="0" cy="0"/>
+        </a:xfrm>
+      </p:grpSpPr>
+      <p:sp>
+        <p:nvSpPr>
+          <p:cNvPr id="2" name="Slide Image Placeholder 1"/>
+          <p:cNvSpPr>
+            <a:spLocks noGrp="1" noRot="1" noChangeAspect="1"/>
+          </p:cNvSpPr>
+          <p:nvPr>
+            <p:ph type="sldImg"/>
+          </p:nvPr>
+        </p:nvSpPr>
+        <p:spPr/>
+      </p:sp>
+      <p:sp>
+        <p:nvSpPr>
+          <p:cNvPr id="3" name="Notes Placeholder 2"/>
+          <p:cNvSpPr>
+            <a:spLocks noGrp="1"/>
+          </p:cNvSpPr>
+          <p:nvPr>
+            <p:ph type="body" idx="1"/>
+          </p:nvPr>
+        </p:nvSpPr>
+        <p:spPr/>
+        <p:txBody>
+          <a:bodyPr/>
+          <a:lstStyle/>
+          <a:p>
+            <a:r>
+              <a:rPr lang="en-GB" dirty="0"/>
+              <a:t> </a:t>
+            </a:r>
+            <a:r>
+              <a:rPr lang="en-GB" dirty="0" err="1"/>
+              <a:t>next_retry_at</a:t>
+            </a:r>
+            <a:r>
+              <a:rPr lang="en-GB" dirty="0"/>
+              <a:t> = now + min(</a:t>
+            </a:r>
+          </a:p>
+          <a:p>
+            <a:r>
+              <a:rPr lang="en-GB" dirty="0"/>
+              <a:t>      </a:t>
+            </a:r>
+            <a:r>
+              <a:rPr lang="en-GB" dirty="0" err="1"/>
+              <a:t>base_backoff_s</a:t>
+            </a:r>
+            <a:r>
+              <a:rPr lang="en-GB" dirty="0"/>
+              <a:t> × 2 ** </a:t>
+            </a:r>
+            <a:r>
+              <a:rPr lang="en-GB" dirty="0" err="1"/>
+              <a:t>attempt_count</a:t>
+            </a:r>
+            <a:r>
+              <a:rPr lang="en-GB" dirty="0"/>
+              <a:t>,</a:t>
+            </a:r>
+          </a:p>
+          <a:p>
+            <a:r>
+              <a:rPr lang="en-GB" dirty="0"/>
+              <a:t>      </a:t>
+            </a:r>
+            <a:r>
+              <a:rPr lang="en-GB" dirty="0" err="1"/>
+              <a:t>max_backoff_s</a:t>
+            </a:r>
+            <a:r>
+              <a:rPr lang="en-GB" dirty="0"/>
+              <a:t>,</a:t>
+            </a:r>
+          </a:p>
+          <a:p>
+            <a:r>
+              <a:rPr lang="en-GB" dirty="0"/>
+              <a:t>  )</a:t>
+            </a:r>
+          </a:p>
+          <a:p>
+            <a:endParaRPr lang="en-GB" dirty="0"/>
+          </a:p>
+          <a:p>
+            <a:r>
+              <a:rPr lang="en-GB" dirty="0"/>
+              <a:t>  Stuk per </a:t>
+            </a:r>
+            <a:r>
+              <a:rPr lang="en-GB" dirty="0" err="1"/>
+              <a:t>stuk</a:t>
+            </a:r>
+            <a:endParaRPr lang="en-GB" dirty="0"/>
+          </a:p>
+          <a:p>
+            <a:endParaRPr lang="en-GB" dirty="0"/>
+          </a:p>
+          <a:p>
+            <a:r>
+              <a:rPr lang="en-GB" dirty="0"/>
+              <a:t>  ┌─────────────────────────────────────┬──────────────────────────────────────────────────────────────────────────────────────────────────────────────────────────────────────────────────┐</a:t>
+            </a:r>
+          </a:p>
+          <a:p>
+            <a:r>
+              <a:rPr lang="en-GB" dirty="0"/>
+              <a:t>  │              </a:t>
+            </a:r>
+            <a:r>
+              <a:rPr lang="en-GB" dirty="0" err="1"/>
+              <a:t>Onderdeel</a:t>
+            </a:r>
+            <a:r>
+              <a:rPr lang="en-GB" dirty="0"/>
+              <a:t>              │                                                                    </a:t>
+            </a:r>
+            <a:r>
+              <a:rPr lang="en-GB" dirty="0" err="1"/>
+              <a:t>Betekenis</a:t>
+            </a:r>
+            <a:r>
+              <a:rPr lang="en-GB" dirty="0"/>
+              <a:t>                                                                     │</a:t>
+            </a:r>
+          </a:p>
+          <a:p>
+            <a:r>
+              <a:rPr lang="en-GB" dirty="0"/>
+              <a:t>  ├─────────────────────────────────────┼──────────────────────────────────────────────────────────────────────────────────────────────────────────────────────────────────────────────────┤</a:t>
+            </a:r>
+          </a:p>
+          <a:p>
+            <a:r>
+              <a:rPr lang="en-GB" dirty="0"/>
+              <a:t>  │ now                                 │ Het </a:t>
+            </a:r>
+            <a:r>
+              <a:rPr lang="en-GB" dirty="0" err="1"/>
+              <a:t>huidige</a:t>
+            </a:r>
+            <a:r>
+              <a:rPr lang="en-GB" dirty="0"/>
+              <a:t> </a:t>
+            </a:r>
+            <a:r>
+              <a:rPr lang="en-GB" dirty="0" err="1"/>
+              <a:t>tijdstip</a:t>
+            </a:r>
+            <a:r>
+              <a:rPr lang="en-GB" dirty="0"/>
+              <a:t> (moment </a:t>
+            </a:r>
+            <a:r>
+              <a:rPr lang="en-GB" dirty="0" err="1"/>
+              <a:t>waarop</a:t>
+            </a:r>
+            <a:r>
+              <a:rPr lang="en-GB" dirty="0"/>
+              <a:t> de </a:t>
+            </a:r>
+            <a:r>
+              <a:rPr lang="en-GB" dirty="0" err="1"/>
+              <a:t>zonet</a:t>
+            </a:r>
+            <a:r>
+              <a:rPr lang="en-GB" dirty="0"/>
+              <a:t> </a:t>
+            </a:r>
+            <a:r>
+              <a:rPr lang="en-GB" dirty="0" err="1"/>
+              <a:t>mislukte</a:t>
+            </a:r>
+            <a:r>
+              <a:rPr lang="en-GB" dirty="0"/>
+              <a:t> </a:t>
+            </a:r>
+            <a:r>
+              <a:rPr lang="en-GB" dirty="0" err="1"/>
+              <a:t>poging</a:t>
+            </a:r>
+            <a:r>
+              <a:rPr lang="en-GB" dirty="0"/>
+              <a:t> </a:t>
+            </a:r>
+            <a:r>
+              <a:rPr lang="en-GB" dirty="0" err="1"/>
+              <a:t>eindigde</a:t>
+            </a:r>
+            <a:r>
+              <a:rPr lang="en-GB" dirty="0"/>
+              <a:t>).                                                                          │</a:t>
+            </a:r>
+          </a:p>
+          <a:p>
+            <a:r>
+              <a:rPr lang="en-GB" dirty="0"/>
+              <a:t>  ├─────────────────────────────────────┼──────────────────────────────────────────────────────────────────────────────────────────────────────────────────────────────────────────────────┤</a:t>
+            </a:r>
+          </a:p>
+          <a:p>
+            <a:r>
+              <a:rPr lang="en-GB" dirty="0"/>
+              <a:t>  │ </a:t>
+            </a:r>
+            <a:r>
+              <a:rPr lang="en-GB" dirty="0" err="1"/>
+              <a:t>attempt_count</a:t>
+            </a:r>
+            <a:r>
+              <a:rPr lang="en-GB" dirty="0"/>
+              <a:t>                       │ </a:t>
+            </a:r>
+            <a:r>
+              <a:rPr lang="en-GB" dirty="0" err="1"/>
+              <a:t>Hoeveel</a:t>
+            </a:r>
+            <a:r>
+              <a:rPr lang="en-GB" dirty="0"/>
+              <a:t> </a:t>
+            </a:r>
+            <a:r>
+              <a:rPr lang="en-GB" dirty="0" err="1"/>
+              <a:t>pogingen</a:t>
+            </a:r>
+            <a:r>
+              <a:rPr lang="en-GB" dirty="0"/>
+              <a:t> er al </a:t>
+            </a:r>
+            <a:r>
+              <a:rPr lang="en-GB" dirty="0" err="1"/>
+              <a:t>gefaald</a:t>
+            </a:r>
+            <a:r>
+              <a:rPr lang="en-GB" dirty="0"/>
+              <a:t> </a:t>
+            </a:r>
+            <a:r>
+              <a:rPr lang="en-GB" dirty="0" err="1"/>
+              <a:t>zijn</a:t>
+            </a:r>
+            <a:r>
+              <a:rPr lang="en-GB" dirty="0"/>
+              <a:t> </a:t>
+            </a:r>
+            <a:r>
+              <a:rPr lang="en-GB" dirty="0" err="1"/>
+              <a:t>voor</a:t>
+            </a:r>
+            <a:r>
+              <a:rPr lang="en-GB" dirty="0"/>
+              <a:t> </a:t>
+            </a:r>
+            <a:r>
+              <a:rPr lang="en-GB" dirty="0" err="1"/>
+              <a:t>dit</a:t>
+            </a:r>
+            <a:r>
+              <a:rPr lang="en-GB" dirty="0"/>
+              <a:t> </a:t>
+            </a:r>
+            <a:r>
+              <a:rPr lang="en-GB" dirty="0" err="1"/>
+              <a:t>bericht</a:t>
+            </a:r>
+            <a:r>
+              <a:rPr lang="en-GB" dirty="0"/>
+              <a:t> (</a:t>
+            </a:r>
+            <a:r>
+              <a:rPr lang="en-GB" dirty="0" err="1"/>
+              <a:t>kolom</a:t>
+            </a:r>
+            <a:r>
+              <a:rPr lang="en-GB" dirty="0"/>
+              <a:t> </a:t>
+            </a:r>
+            <a:r>
+              <a:rPr lang="en-GB" dirty="0" err="1"/>
+              <a:t>hr_messages.attempt_count</a:t>
+            </a:r>
+            <a:r>
+              <a:rPr lang="en-GB" dirty="0"/>
+              <a:t>).                                                          │</a:t>
+            </a:r>
+          </a:p>
+          <a:p>
+            <a:r>
+              <a:rPr lang="en-GB" dirty="0"/>
+              <a:t>  ├─────────────────────────────────────┼──────────────────────────────────────────────────────────────────────────────────────────────────────────────────────────────────────────────────┤</a:t>
+            </a:r>
+          </a:p>
+          <a:p>
+            <a:r>
+              <a:rPr lang="en-GB" dirty="0"/>
+              <a:t>  │ </a:t>
+            </a:r>
+            <a:r>
+              <a:rPr lang="en-GB" dirty="0" err="1"/>
+              <a:t>base_backoff_s</a:t>
+            </a:r>
+            <a:r>
+              <a:rPr lang="en-GB" dirty="0"/>
+              <a:t>                      │ Minimum </a:t>
+            </a:r>
+            <a:r>
+              <a:rPr lang="en-GB" dirty="0" err="1"/>
+              <a:t>wachttijd</a:t>
+            </a:r>
+            <a:r>
+              <a:rPr lang="en-GB" dirty="0"/>
+              <a:t> (default 5 s, config: </a:t>
+            </a:r>
+            <a:r>
+              <a:rPr lang="en-GB" dirty="0" err="1"/>
+              <a:t>broker_base_backoff_s</a:t>
+            </a:r>
+            <a:r>
+              <a:rPr lang="en-GB" dirty="0"/>
+              <a:t>).                                                                                  │</a:t>
+            </a:r>
+          </a:p>
+          <a:p>
+            <a:r>
+              <a:rPr lang="en-GB" dirty="0"/>
+              <a:t>  ├─────────────────────────────────────┼──────────────────────────────────────────────────────────────────────────────────────────────────────────────────────────────────────────────────┤</a:t>
+            </a:r>
+          </a:p>
+          <a:p>
+            <a:r>
+              <a:rPr lang="en-GB" dirty="0"/>
+              <a:t>  │ 2 ** </a:t>
+            </a:r>
+            <a:r>
+              <a:rPr lang="en-GB" dirty="0" err="1"/>
+              <a:t>attempt_count</a:t>
+            </a:r>
+            <a:r>
+              <a:rPr lang="en-GB" dirty="0"/>
+              <a:t>                  │ Exponent: </a:t>
+            </a:r>
+            <a:r>
+              <a:rPr lang="en-GB" dirty="0" err="1"/>
+              <a:t>verdubbelt</a:t>
+            </a:r>
+            <a:r>
+              <a:rPr lang="en-GB" dirty="0"/>
+              <a:t> </a:t>
+            </a:r>
+            <a:r>
+              <a:rPr lang="en-GB" dirty="0" err="1"/>
+              <a:t>na</a:t>
+            </a:r>
+            <a:r>
+              <a:rPr lang="en-GB" dirty="0"/>
+              <a:t> </a:t>
+            </a:r>
+            <a:r>
+              <a:rPr lang="en-GB" dirty="0" err="1"/>
+              <a:t>elke</a:t>
+            </a:r>
+            <a:r>
+              <a:rPr lang="en-GB" dirty="0"/>
+              <a:t> </a:t>
+            </a:r>
+            <a:r>
+              <a:rPr lang="en-GB" dirty="0" err="1"/>
+              <a:t>mislukte</a:t>
+            </a:r>
+            <a:r>
+              <a:rPr lang="en-GB" dirty="0"/>
+              <a:t> </a:t>
+            </a:r>
+            <a:r>
+              <a:rPr lang="en-GB" dirty="0" err="1"/>
+              <a:t>poging</a:t>
+            </a:r>
+            <a:r>
+              <a:rPr lang="en-GB" dirty="0"/>
+              <a:t> (1 → 2 → 4 → 8 → 16 → 32 …).                                                                        │</a:t>
+            </a:r>
+          </a:p>
+          <a:p>
+            <a:r>
+              <a:rPr lang="en-GB" dirty="0"/>
+              <a:t>  ├─────────────────────────────────────┼──────────────────────────────────────────────────────────────────────────────────────────────────────────────────────────────────────────────────┤</a:t>
+            </a:r>
+          </a:p>
+          <a:p>
+            <a:r>
+              <a:rPr lang="en-GB" dirty="0"/>
+              <a:t>  │ </a:t>
+            </a:r>
+            <a:r>
+              <a:rPr lang="en-GB" dirty="0" err="1"/>
+              <a:t>base_backoff_s</a:t>
+            </a:r>
+            <a:r>
+              <a:rPr lang="en-GB" dirty="0"/>
+              <a:t> × 2 ** </a:t>
+            </a:r>
+            <a:r>
+              <a:rPr lang="en-GB" dirty="0" err="1"/>
+              <a:t>attempt_count</a:t>
+            </a:r>
+            <a:r>
+              <a:rPr lang="en-GB" dirty="0"/>
+              <a:t> │ De "</a:t>
+            </a:r>
+            <a:r>
+              <a:rPr lang="en-GB" dirty="0" err="1"/>
+              <a:t>ideale</a:t>
+            </a:r>
+            <a:r>
+              <a:rPr lang="en-GB" dirty="0"/>
+              <a:t>" </a:t>
+            </a:r>
+            <a:r>
+              <a:rPr lang="en-GB" dirty="0" err="1"/>
+              <a:t>wachttijd</a:t>
+            </a:r>
+            <a:r>
+              <a:rPr lang="en-GB" dirty="0"/>
+              <a:t>: </a:t>
+            </a:r>
+            <a:r>
+              <a:rPr lang="en-GB" dirty="0" err="1"/>
+              <a:t>groeit</a:t>
+            </a:r>
+            <a:r>
+              <a:rPr lang="en-GB" dirty="0"/>
+              <a:t> </a:t>
+            </a:r>
+            <a:r>
+              <a:rPr lang="en-GB" dirty="0" err="1"/>
+              <a:t>exponentieel</a:t>
+            </a:r>
+            <a:r>
+              <a:rPr lang="en-GB" dirty="0"/>
+              <a:t>.                                                                                                      │</a:t>
+            </a:r>
+          </a:p>
+          <a:p>
+            <a:r>
+              <a:rPr lang="en-GB" dirty="0"/>
+              <a:t>  ├─────────────────────────────────────┼──────────────────────────────────────────────────────────────────────────────────────────────────────────────────────────────────────────────────┤</a:t>
+            </a:r>
+          </a:p>
+          <a:p>
+            <a:r>
+              <a:rPr lang="en-GB" dirty="0"/>
+              <a:t>  │ </a:t>
+            </a:r>
+            <a:r>
+              <a:rPr lang="en-GB" dirty="0" err="1"/>
+              <a:t>max_backoff_s</a:t>
+            </a:r>
+            <a:r>
+              <a:rPr lang="en-GB" dirty="0"/>
+              <a:t>                       │ Plafond (default 600 s = 10 min, config: </a:t>
+            </a:r>
+            <a:r>
+              <a:rPr lang="en-GB" dirty="0" err="1"/>
+              <a:t>broker_max_backoff_s</a:t>
+            </a:r>
+            <a:r>
+              <a:rPr lang="en-GB" dirty="0"/>
+              <a:t>).                                                                                  │</a:t>
+            </a:r>
+          </a:p>
+          <a:p>
+            <a:r>
+              <a:rPr lang="en-GB" dirty="0"/>
+              <a:t>  ├─────────────────────────────────────┼──────────────────────────────────────────────────────────────────────────────────────────────────────────────────────────────────────────────────┤</a:t>
+            </a:r>
+          </a:p>
+          <a:p>
+            <a:r>
+              <a:rPr lang="en-GB" dirty="0"/>
+              <a:t>  │ min(…, </a:t>
+            </a:r>
+            <a:r>
+              <a:rPr lang="en-GB" dirty="0" err="1"/>
+              <a:t>max_backoff_s</a:t>
+            </a:r>
+            <a:r>
+              <a:rPr lang="en-GB" dirty="0"/>
+              <a:t>)               │ Kap de </a:t>
+            </a:r>
+            <a:r>
+              <a:rPr lang="en-GB" dirty="0" err="1"/>
+              <a:t>wachttijd</a:t>
+            </a:r>
+            <a:r>
+              <a:rPr lang="en-GB" dirty="0"/>
+              <a:t> </a:t>
+            </a:r>
+            <a:r>
+              <a:rPr lang="en-GB" dirty="0" err="1"/>
+              <a:t>af</a:t>
+            </a:r>
+            <a:r>
+              <a:rPr lang="en-GB" dirty="0"/>
+              <a:t> </a:t>
+            </a:r>
+            <a:r>
+              <a:rPr lang="en-GB" dirty="0" err="1"/>
+              <a:t>zodra</a:t>
+            </a:r>
+            <a:r>
+              <a:rPr lang="en-GB" dirty="0"/>
+              <a:t> ze het plafond </a:t>
+            </a:r>
+            <a:r>
+              <a:rPr lang="en-GB" dirty="0" err="1"/>
+              <a:t>raakt</a:t>
+            </a:r>
+            <a:r>
+              <a:rPr lang="en-GB" dirty="0"/>
+              <a:t>.                                                                                                  │</a:t>
+            </a:r>
+          </a:p>
+          <a:p>
+            <a:r>
+              <a:rPr lang="en-GB" dirty="0"/>
+              <a:t>  ├─────────────────────────────────────┼──────────────────────────────────────────────────────────────────────────────────────────────────────────────────────────────────────────────────┤</a:t>
+            </a:r>
+          </a:p>
+          <a:p>
+            <a:r>
+              <a:rPr lang="en-GB" dirty="0"/>
+              <a:t>  │ </a:t>
+            </a:r>
+            <a:r>
+              <a:rPr lang="en-GB" dirty="0" err="1"/>
+              <a:t>next_retry_at</a:t>
+            </a:r>
+            <a:r>
+              <a:rPr lang="en-GB" dirty="0"/>
+              <a:t>                       │ </a:t>
+            </a:r>
+            <a:r>
+              <a:rPr lang="en-GB" dirty="0" err="1"/>
+              <a:t>Vroegste</a:t>
+            </a:r>
+            <a:r>
+              <a:rPr lang="en-GB" dirty="0"/>
+              <a:t> </a:t>
+            </a:r>
+            <a:r>
+              <a:rPr lang="en-GB" dirty="0" err="1"/>
+              <a:t>tijdstip</a:t>
+            </a:r>
+            <a:r>
+              <a:rPr lang="en-GB" dirty="0"/>
+              <a:t> </a:t>
+            </a:r>
+            <a:r>
+              <a:rPr lang="en-GB" dirty="0" err="1"/>
+              <a:t>waarop</a:t>
+            </a:r>
+            <a:r>
+              <a:rPr lang="en-GB" dirty="0"/>
+              <a:t> de worker </a:t>
+            </a:r>
+            <a:r>
+              <a:rPr lang="en-GB" dirty="0" err="1"/>
+              <a:t>dit</a:t>
+            </a:r>
+            <a:r>
+              <a:rPr lang="en-GB" dirty="0"/>
+              <a:t> </a:t>
+            </a:r>
+            <a:r>
+              <a:rPr lang="en-GB" dirty="0" err="1"/>
+              <a:t>bericht</a:t>
+            </a:r>
+            <a:r>
+              <a:rPr lang="en-GB" dirty="0"/>
+              <a:t> </a:t>
+            </a:r>
+            <a:r>
+              <a:rPr lang="en-GB" dirty="0" err="1"/>
+              <a:t>opnieuw</a:t>
+            </a:r>
+            <a:r>
+              <a:rPr lang="en-GB" dirty="0"/>
+              <a:t> mag </a:t>
+            </a:r>
+            <a:r>
+              <a:rPr lang="en-GB" dirty="0" err="1"/>
+              <a:t>proberen</a:t>
+            </a:r>
+            <a:r>
+              <a:rPr lang="en-GB" dirty="0"/>
+              <a:t>. Tot </a:t>
+            </a:r>
+            <a:r>
+              <a:rPr lang="en-GB" dirty="0" err="1"/>
+              <a:t>dat</a:t>
+            </a:r>
+            <a:r>
+              <a:rPr lang="en-GB" dirty="0"/>
+              <a:t> </a:t>
+            </a:r>
+            <a:r>
+              <a:rPr lang="en-GB" dirty="0" err="1"/>
+              <a:t>tijdstip</a:t>
+            </a:r>
+            <a:r>
+              <a:rPr lang="en-GB" dirty="0"/>
+              <a:t> </a:t>
+            </a:r>
+            <a:r>
+              <a:rPr lang="en-GB" dirty="0" err="1"/>
+              <a:t>wordt</a:t>
+            </a:r>
+            <a:r>
+              <a:rPr lang="en-GB" dirty="0"/>
+              <a:t> de </a:t>
+            </a:r>
+            <a:r>
+              <a:rPr lang="en-GB" dirty="0" err="1"/>
+              <a:t>rij</a:t>
+            </a:r>
+            <a:r>
+              <a:rPr lang="en-GB" dirty="0"/>
+              <a:t> </a:t>
+            </a:r>
+            <a:r>
+              <a:rPr lang="en-GB" dirty="0" err="1"/>
+              <a:t>overgeslagen</a:t>
+            </a:r>
+            <a:r>
+              <a:rPr lang="en-GB" dirty="0"/>
+              <a:t> door </a:t>
+            </a:r>
+            <a:r>
+              <a:rPr lang="en-GB" dirty="0" err="1"/>
+              <a:t>get_due_pending_messages</a:t>
+            </a:r>
+            <a:r>
+              <a:rPr lang="en-GB" dirty="0"/>
+              <a:t>(). │</a:t>
+            </a:r>
+          </a:p>
+          <a:p>
+            <a:r>
+              <a:rPr lang="en-GB" dirty="0"/>
+              <a:t>  └─────────────────────────────────────┴──────────────────────────────────────────────────────────────────────────────────────────────────────────────────────────────────────────────────┘</a:t>
+            </a:r>
+          </a:p>
+          <a:p>
+            <a:r>
+              <a:rPr lang="en-GB" dirty="0"/>
+              <a:t>  </a:t>
+            </a:r>
+          </a:p>
+          <a:p>
+            <a:r>
+              <a:rPr lang="en-GB" dirty="0"/>
+              <a:t>  </a:t>
+            </a:r>
+            <a:r>
+              <a:rPr lang="en-GB" dirty="0" err="1"/>
+              <a:t>Concreet</a:t>
+            </a:r>
+            <a:r>
+              <a:rPr lang="en-GB" dirty="0"/>
+              <a:t> (defaults: base 5 s, max 600 s)</a:t>
+            </a:r>
+          </a:p>
+          <a:p>
+            <a:r>
+              <a:rPr lang="en-GB" dirty="0"/>
+              <a:t>  </a:t>
+            </a:r>
+          </a:p>
+          <a:p>
+            <a:r>
+              <a:rPr lang="en-GB" dirty="0"/>
+              <a:t>  ┌───────────────┬─────────┬─────────┬─────────────────┬────────────────────────────────┐</a:t>
+            </a:r>
+          </a:p>
+          <a:p>
+            <a:r>
+              <a:rPr lang="en-GB" dirty="0"/>
+              <a:t>  │ </a:t>
+            </a:r>
+            <a:r>
+              <a:rPr lang="en-GB" dirty="0" err="1"/>
+              <a:t>attempt_count</a:t>
+            </a:r>
+            <a:r>
+              <a:rPr lang="en-GB" dirty="0"/>
+              <a:t> │ 5 × 2^n │ Met cap │    </a:t>
+            </a:r>
+            <a:r>
+              <a:rPr lang="en-GB" dirty="0" err="1"/>
+              <a:t>Wachttijd</a:t>
+            </a:r>
+            <a:r>
+              <a:rPr lang="en-GB" dirty="0"/>
+              <a:t>    │    </a:t>
+            </a:r>
+            <a:r>
+              <a:rPr lang="en-GB" dirty="0" err="1"/>
+              <a:t>next_retry_at</a:t>
+            </a:r>
+            <a:r>
+              <a:rPr lang="en-GB" dirty="0"/>
+              <a:t> (</a:t>
+            </a:r>
+            <a:r>
+              <a:rPr lang="en-GB" dirty="0" err="1"/>
+              <a:t>vanaf</a:t>
+            </a:r>
+            <a:r>
+              <a:rPr lang="en-GB" dirty="0"/>
+              <a:t> 12:00:00)    │</a:t>
+            </a:r>
+          </a:p>
+          <a:p>
+            <a:r>
+              <a:rPr lang="en-GB" dirty="0"/>
+              <a:t>  ├───────────────┼─────────┼─────────┼─────────────────┼──────────────────────────────────────┤</a:t>
+            </a:r>
+          </a:p>
+          <a:p>
+            <a:r>
+              <a:rPr lang="en-GB" dirty="0"/>
+              <a:t>  │       0       │   5 s   │   5 s   │ 5 sec           │ 12:00:05                             │</a:t>
+            </a:r>
+          </a:p>
+          <a:p>
+            <a:r>
+              <a:rPr lang="en-GB" dirty="0"/>
+              <a:t>  ├───────────────┼─────────┼─────────┼─────────────────┼──────────────────────────────────────┤</a:t>
+            </a:r>
+          </a:p>
+          <a:p>
+            <a:r>
+              <a:rPr lang="en-GB" dirty="0"/>
+              <a:t>  │       1       │  10 s   │  10 s   │ 10 sec          │ 12:00:10                             │</a:t>
+            </a:r>
+          </a:p>
+          <a:p>
+            <a:r>
+              <a:rPr lang="en-GB" dirty="0"/>
+              <a:t>  ├───────────────┼─────────┼─────────┼─────────────────┼──────────────────────────────────────┤</a:t>
+            </a:r>
+          </a:p>
+          <a:p>
+            <a:r>
+              <a:rPr lang="en-GB" dirty="0"/>
+              <a:t>  │       2       │  20 s   │  20 s   │ 20 sec          │ 12:00:20                             │</a:t>
+            </a:r>
+          </a:p>
+          <a:p>
+            <a:r>
+              <a:rPr lang="en-GB" dirty="0"/>
+              <a:t>  ├───────────────┼─────────┼─────────┼─────────────────┼──────────────────────────────────────┤</a:t>
+            </a:r>
+          </a:p>
+          <a:p>
+            <a:r>
+              <a:rPr lang="en-GB" dirty="0"/>
+              <a:t>  │       3       │  40 s   │  40 s   │ 40 sec          │ 12:00:40                             │</a:t>
+            </a:r>
+          </a:p>
+          <a:p>
+            <a:r>
+              <a:rPr lang="en-GB" dirty="0"/>
+              <a:t>  ├───────────────┼─────────┼─────────┼─────────────────┼──────────────────────────────────────┤</a:t>
+            </a:r>
+          </a:p>
+          <a:p>
+            <a:r>
+              <a:rPr lang="en-GB" dirty="0"/>
+              <a:t>  │       4       │  80 s   │  80 s   │ 1 min 20 s      │ 12:01:20                             │</a:t>
+            </a:r>
+          </a:p>
+          <a:p>
+            <a:r>
+              <a:rPr lang="en-GB" dirty="0"/>
+              <a:t>  ├───────────────┼─────────┼─────────┼─────────────────┼──────────────────────────────────────┤</a:t>
+            </a:r>
+          </a:p>
+          <a:p>
+            <a:r>
+              <a:rPr lang="en-GB" dirty="0"/>
+              <a:t>  │       5       │  160 s  │  160 s  │ 2 min 40 s      │ 12:02:40                             │</a:t>
+            </a:r>
+          </a:p>
+          <a:p>
+            <a:r>
+              <a:rPr lang="en-GB" dirty="0"/>
+              <a:t>  ├───────────────┼─────────┼─────────┼─────────────────┼──────────────────────────────────────┤</a:t>
+            </a:r>
+          </a:p>
+          <a:p>
+            <a:r>
+              <a:rPr lang="en-GB" dirty="0"/>
+              <a:t>  │       6       │  320 s  │  320 s  │ 5 min 20 s      │ 12:05:20                             │</a:t>
+            </a:r>
+          </a:p>
+          <a:p>
+            <a:r>
+              <a:rPr lang="en-GB" dirty="0"/>
+              <a:t>  ├───────────────┼─────────┼─────────┼─────────────────┼──────────────────────────────────────┤</a:t>
+            </a:r>
+          </a:p>
+          <a:p>
+            <a:r>
+              <a:rPr lang="en-GB" dirty="0"/>
+              <a:t>  │       7       │  640 s  │  600 s  │ 10 min (</a:t>
+            </a:r>
+            <a:r>
+              <a:rPr lang="en-GB" dirty="0" err="1"/>
+              <a:t>gecapt</a:t>
+            </a:r>
+            <a:r>
+              <a:rPr lang="en-GB" dirty="0"/>
+              <a:t>) │ 12:10:00                             │</a:t>
+            </a:r>
+          </a:p>
+          <a:p>
+            <a:r>
+              <a:rPr lang="en-GB" dirty="0"/>
+              <a:t>  ├───────────────┼─────────┼─────────┼─────────────────┼──────────────────────────────────────┤</a:t>
+            </a:r>
+          </a:p>
+          <a:p>
+            <a:r>
+              <a:rPr lang="en-GB" dirty="0"/>
+              <a:t>  │       8       │ 1280 s  │  600 s  │ 10 min (</a:t>
+            </a:r>
+            <a:r>
+              <a:rPr lang="en-GB" dirty="0" err="1"/>
+              <a:t>gecapt</a:t>
+            </a:r>
+            <a:r>
+              <a:rPr lang="en-GB" dirty="0"/>
+              <a:t>) │ 12:10:00                             │</a:t>
+            </a:r>
+          </a:p>
+          <a:p>
+            <a:r>
+              <a:rPr lang="en-GB" dirty="0"/>
+              <a:t>  ├───────────────┼─────────┼─────────┼─────────────────┼──────────────────────────────────────┤</a:t>
+            </a:r>
+          </a:p>
+          <a:p>
+            <a:r>
+              <a:rPr lang="en-GB" dirty="0"/>
+              <a:t>  │       9       │ 2560 s  │  600 s  │ 10 min (</a:t>
+            </a:r>
+            <a:r>
+              <a:rPr lang="en-GB" dirty="0" err="1"/>
+              <a:t>gecapt</a:t>
+            </a:r>
+            <a:r>
+              <a:rPr lang="en-GB" dirty="0"/>
+              <a:t>) │ 12:10:00                             │</a:t>
+            </a:r>
+          </a:p>
+          <a:p>
+            <a:r>
+              <a:rPr lang="en-GB" dirty="0"/>
+              <a:t>  ├───────────────┼─────────┼─────────┼─────────────────┼──────────────────────────────────────┤</a:t>
+            </a:r>
+          </a:p>
+          <a:p>
+            <a:r>
+              <a:rPr lang="en-GB" dirty="0"/>
+              <a:t>  │      10       │    —    │    —    │ —               │ → dead-letter (</a:t>
+            </a:r>
+            <a:r>
+              <a:rPr lang="en-GB" dirty="0" err="1"/>
+              <a:t>max_attempts</a:t>
+            </a:r>
+            <a:r>
+              <a:rPr lang="en-GB" dirty="0"/>
+              <a:t> </a:t>
+            </a:r>
+            <a:r>
+              <a:rPr lang="en-GB" dirty="0" err="1"/>
+              <a:t>bereikt</a:t>
+            </a:r>
+            <a:r>
+              <a:rPr lang="en-GB" dirty="0"/>
+              <a:t>) │</a:t>
+            </a:r>
+          </a:p>
+          <a:p>
+            <a:r>
+              <a:rPr lang="en-GB" dirty="0"/>
+              <a:t>  └───────────────┴─────────┴─────────┴─────────────────┴──────────────────────────────────────┘</a:t>
+            </a:r>
+          </a:p>
+          <a:p>
+            <a:r>
+              <a:rPr lang="en-GB" dirty="0"/>
+              <a:t>  </a:t>
+            </a:r>
+          </a:p>
+          <a:p>
+            <a:r>
+              <a:rPr lang="en-GB" dirty="0"/>
+              <a:t>  </a:t>
+            </a:r>
+            <a:r>
+              <a:rPr lang="en-GB" dirty="0" err="1"/>
+              <a:t>Totale</a:t>
+            </a:r>
+            <a:r>
+              <a:rPr lang="en-GB" dirty="0"/>
+              <a:t> </a:t>
+            </a:r>
+            <a:r>
+              <a:rPr lang="en-GB" dirty="0" err="1"/>
+              <a:t>tijd</a:t>
+            </a:r>
+            <a:r>
+              <a:rPr lang="en-GB" dirty="0"/>
+              <a:t> </a:t>
+            </a:r>
+            <a:r>
+              <a:rPr lang="en-GB" dirty="0" err="1"/>
+              <a:t>vóór</a:t>
+            </a:r>
+            <a:r>
+              <a:rPr lang="en-GB" dirty="0"/>
+              <a:t> dead-letter (met defaults): ~30 min — </a:t>
+            </a:r>
+            <a:r>
+              <a:rPr lang="en-GB" dirty="0" err="1"/>
+              <a:t>genoeg</a:t>
+            </a:r>
+            <a:r>
+              <a:rPr lang="en-GB" dirty="0"/>
+              <a:t> om </a:t>
+            </a:r>
+            <a:r>
+              <a:rPr lang="en-GB" dirty="0" err="1"/>
+              <a:t>een</a:t>
+            </a:r>
+            <a:r>
+              <a:rPr lang="en-GB" dirty="0"/>
+              <a:t> </a:t>
+            </a:r>
+            <a:r>
+              <a:rPr lang="en-GB" dirty="0" err="1"/>
+              <a:t>korte</a:t>
+            </a:r>
+            <a:r>
+              <a:rPr lang="en-GB" dirty="0"/>
+              <a:t> HR-</a:t>
+            </a:r>
+            <a:r>
+              <a:rPr lang="en-GB" dirty="0" err="1"/>
+              <a:t>uitval</a:t>
+            </a:r>
+            <a:r>
+              <a:rPr lang="en-GB" dirty="0"/>
+              <a:t> </a:t>
+            </a:r>
+            <a:r>
+              <a:rPr lang="en-GB" dirty="0" err="1"/>
+              <a:t>te</a:t>
+            </a:r>
+            <a:r>
+              <a:rPr lang="en-GB" dirty="0"/>
+              <a:t> </a:t>
+            </a:r>
+            <a:r>
+              <a:rPr lang="en-GB" dirty="0" err="1"/>
+              <a:t>overbruggen</a:t>
+            </a:r>
+            <a:r>
+              <a:rPr lang="en-GB" dirty="0"/>
+              <a:t> </a:t>
+            </a:r>
+            <a:r>
+              <a:rPr lang="en-GB" dirty="0" err="1"/>
+              <a:t>zonder</a:t>
+            </a:r>
+            <a:r>
+              <a:rPr lang="en-GB" dirty="0"/>
+              <a:t> </a:t>
+            </a:r>
+            <a:r>
+              <a:rPr lang="en-GB" dirty="0" err="1"/>
+              <a:t>uren</a:t>
+            </a:r>
+            <a:r>
+              <a:rPr lang="en-GB" dirty="0"/>
+              <a:t> </a:t>
+            </a:r>
+            <a:r>
+              <a:rPr lang="en-GB" dirty="0" err="1"/>
+              <a:t>te</a:t>
+            </a:r>
+            <a:r>
+              <a:rPr lang="en-GB" dirty="0"/>
+              <a:t> </a:t>
+            </a:r>
+            <a:r>
+              <a:rPr lang="en-GB" dirty="0" err="1"/>
+              <a:t>wachten</a:t>
+            </a:r>
+            <a:r>
+              <a:rPr lang="en-GB" dirty="0"/>
+              <a:t>.</a:t>
+            </a:r>
+          </a:p>
+          <a:p>
+            <a:r>
+              <a:rPr lang="en-GB" dirty="0"/>
+              <a:t>  </a:t>
+            </a:r>
+          </a:p>
+          <a:p>
+            <a:r>
+              <a:rPr lang="en-GB" dirty="0"/>
+              <a:t>  </a:t>
+            </a:r>
+            <a:r>
+              <a:rPr lang="en-GB" dirty="0" err="1"/>
+              <a:t>Waarom</a:t>
+            </a:r>
+            <a:r>
+              <a:rPr lang="en-GB" dirty="0"/>
+              <a:t> </a:t>
+            </a:r>
+            <a:r>
+              <a:rPr lang="en-GB" dirty="0" err="1"/>
+              <a:t>dit</a:t>
+            </a:r>
+            <a:r>
+              <a:rPr lang="en-GB" dirty="0"/>
+              <a:t> </a:t>
+            </a:r>
+            <a:r>
+              <a:rPr lang="en-GB" dirty="0" err="1"/>
+              <a:t>goed</a:t>
+            </a:r>
+            <a:r>
+              <a:rPr lang="en-GB" dirty="0"/>
+              <a:t> is</a:t>
+            </a:r>
+          </a:p>
+          <a:p>
+            <a:endParaRPr lang="en-GB" dirty="0"/>
+          </a:p>
+          <a:p>
+            <a:r>
+              <a:rPr lang="en-GB" dirty="0"/>
+              <a:t>  - Snel </a:t>
+            </a:r>
+            <a:r>
+              <a:rPr lang="en-GB" dirty="0" err="1"/>
+              <a:t>proberen</a:t>
+            </a:r>
+            <a:r>
+              <a:rPr lang="en-GB" dirty="0"/>
+              <a:t> </a:t>
+            </a:r>
+            <a:r>
+              <a:rPr lang="en-GB" dirty="0" err="1"/>
+              <a:t>bij</a:t>
+            </a:r>
+            <a:r>
+              <a:rPr lang="en-GB" dirty="0"/>
+              <a:t> </a:t>
+            </a:r>
+            <a:r>
+              <a:rPr lang="en-GB" dirty="0" err="1"/>
+              <a:t>hicc</a:t>
+            </a:r>
+            <a:r>
+              <a:rPr lang="en-GB" dirty="0"/>
+              <a:t>-ups: de </a:t>
+            </a:r>
+            <a:r>
+              <a:rPr lang="en-GB" dirty="0" err="1"/>
+              <a:t>eerste</a:t>
+            </a:r>
+            <a:r>
+              <a:rPr lang="en-GB" dirty="0"/>
+              <a:t> </a:t>
+            </a:r>
+            <a:r>
+              <a:rPr lang="en-GB" dirty="0" err="1"/>
+              <a:t>pogingen</a:t>
+            </a:r>
+            <a:r>
+              <a:rPr lang="en-GB" dirty="0"/>
+              <a:t> </a:t>
+            </a:r>
+            <a:r>
+              <a:rPr lang="en-GB" dirty="0" err="1"/>
+              <a:t>gebeuren</a:t>
+            </a:r>
+            <a:r>
+              <a:rPr lang="en-GB" dirty="0"/>
+              <a:t> </a:t>
+            </a:r>
+            <a:r>
+              <a:rPr lang="en-GB" dirty="0" err="1"/>
+              <a:t>binnen</a:t>
+            </a:r>
+            <a:r>
+              <a:rPr lang="en-GB" dirty="0"/>
+              <a:t> </a:t>
+            </a:r>
+            <a:r>
+              <a:rPr lang="en-GB" dirty="0" err="1"/>
+              <a:t>seconden</a:t>
+            </a:r>
+            <a:r>
+              <a:rPr lang="en-GB" dirty="0"/>
+              <a:t> — </a:t>
+            </a:r>
+            <a:r>
+              <a:rPr lang="en-GB" dirty="0" err="1"/>
+              <a:t>een</a:t>
+            </a:r>
+            <a:r>
+              <a:rPr lang="en-GB" dirty="0"/>
+              <a:t> </a:t>
+            </a:r>
+            <a:r>
+              <a:rPr lang="en-GB" dirty="0" err="1"/>
+              <a:t>kortstondige</a:t>
+            </a:r>
+            <a:r>
+              <a:rPr lang="en-GB" dirty="0"/>
+              <a:t> </a:t>
+            </a:r>
+            <a:r>
+              <a:rPr lang="en-GB" dirty="0" err="1"/>
+              <a:t>netwerk</a:t>
+            </a:r>
+            <a:r>
+              <a:rPr lang="en-GB" dirty="0"/>
+              <a:t>- of restart-glitch </a:t>
+            </a:r>
+            <a:r>
+              <a:rPr lang="en-GB" dirty="0" err="1"/>
+              <a:t>wordt</a:t>
+            </a:r>
+            <a:r>
+              <a:rPr lang="en-GB" dirty="0"/>
+              <a:t> </a:t>
+            </a:r>
+            <a:r>
+              <a:rPr lang="en-GB" dirty="0" err="1"/>
+              <a:t>vrijwel</a:t>
+            </a:r>
+            <a:r>
+              <a:rPr lang="en-GB" dirty="0"/>
+              <a:t> </a:t>
+            </a:r>
+            <a:r>
+              <a:rPr lang="en-GB" dirty="0" err="1"/>
+              <a:t>onmiddellijk</a:t>
+            </a:r>
+            <a:r>
+              <a:rPr lang="en-GB" dirty="0"/>
+              <a:t> </a:t>
+            </a:r>
+            <a:r>
+              <a:rPr lang="en-GB" dirty="0" err="1"/>
+              <a:t>opgevangen</a:t>
+            </a:r>
+            <a:r>
+              <a:rPr lang="en-GB" dirty="0"/>
+              <a:t>.</a:t>
+            </a:r>
+          </a:p>
+          <a:p>
+            <a:r>
+              <a:rPr lang="en-GB" dirty="0"/>
+              <a:t>  - Lange </a:t>
+            </a:r>
+            <a:r>
+              <a:rPr lang="en-GB" dirty="0" err="1"/>
+              <a:t>uitval</a:t>
+            </a:r>
+            <a:r>
+              <a:rPr lang="en-GB" dirty="0"/>
+              <a:t> = minder </a:t>
+            </a:r>
+            <a:r>
+              <a:rPr lang="en-GB" dirty="0" err="1"/>
+              <a:t>druk</a:t>
+            </a:r>
+            <a:r>
+              <a:rPr lang="en-GB" dirty="0"/>
+              <a:t>: </a:t>
+            </a:r>
+            <a:r>
+              <a:rPr lang="en-GB" dirty="0" err="1"/>
+              <a:t>na</a:t>
+            </a:r>
+            <a:r>
+              <a:rPr lang="en-GB" dirty="0"/>
+              <a:t> </a:t>
+            </a:r>
+            <a:r>
+              <a:rPr lang="en-GB" dirty="0" err="1"/>
+              <a:t>elke</a:t>
+            </a:r>
+            <a:r>
+              <a:rPr lang="en-GB" dirty="0"/>
+              <a:t> </a:t>
+            </a:r>
+            <a:r>
+              <a:rPr lang="en-GB" dirty="0" err="1"/>
+              <a:t>faal</a:t>
+            </a:r>
+            <a:r>
+              <a:rPr lang="en-GB" dirty="0"/>
+              <a:t> </a:t>
+            </a:r>
+            <a:r>
+              <a:rPr lang="en-GB" dirty="0" err="1"/>
+              <a:t>verdubbelt</a:t>
+            </a:r>
+            <a:r>
+              <a:rPr lang="en-GB" dirty="0"/>
+              <a:t> de </a:t>
+            </a:r>
+            <a:r>
+              <a:rPr lang="en-GB" dirty="0" err="1"/>
+              <a:t>wachttijd</a:t>
+            </a:r>
+            <a:r>
+              <a:rPr lang="en-GB" dirty="0"/>
+              <a:t>, </a:t>
+            </a:r>
+            <a:r>
+              <a:rPr lang="en-GB" dirty="0" err="1"/>
+              <a:t>dus</a:t>
+            </a:r>
+            <a:r>
+              <a:rPr lang="en-GB" dirty="0"/>
+              <a:t> </a:t>
+            </a:r>
+            <a:r>
+              <a:rPr lang="en-GB" dirty="0" err="1"/>
+              <a:t>een</a:t>
+            </a:r>
+            <a:r>
+              <a:rPr lang="en-GB" dirty="0"/>
+              <a:t> HR-</a:t>
+            </a:r>
+            <a:r>
+              <a:rPr lang="en-GB" dirty="0" err="1"/>
+              <a:t>systeem</a:t>
+            </a:r>
+            <a:r>
+              <a:rPr lang="en-GB" dirty="0"/>
+              <a:t> </a:t>
+            </a:r>
+            <a:r>
+              <a:rPr lang="en-GB" dirty="0" err="1"/>
+              <a:t>dat</a:t>
+            </a:r>
+            <a:r>
+              <a:rPr lang="en-GB" dirty="0"/>
+              <a:t> </a:t>
+            </a:r>
+            <a:r>
+              <a:rPr lang="en-GB" dirty="0" err="1"/>
+              <a:t>langere</a:t>
+            </a:r>
+            <a:r>
+              <a:rPr lang="en-GB" dirty="0"/>
+              <a:t> </a:t>
+            </a:r>
+            <a:r>
+              <a:rPr lang="en-GB" dirty="0" err="1"/>
+              <a:t>tijd</a:t>
+            </a:r>
+            <a:r>
+              <a:rPr lang="en-GB" dirty="0"/>
+              <a:t> plat </a:t>
+            </a:r>
+            <a:r>
+              <a:rPr lang="en-GB" dirty="0" err="1"/>
+              <a:t>ligt</a:t>
+            </a:r>
+            <a:r>
+              <a:rPr lang="en-GB" dirty="0"/>
+              <a:t> </a:t>
+            </a:r>
+            <a:r>
+              <a:rPr lang="en-GB" dirty="0" err="1"/>
+              <a:t>krijgt</a:t>
+            </a:r>
+            <a:r>
+              <a:rPr lang="en-GB" dirty="0"/>
+              <a:t> </a:t>
+            </a:r>
+            <a:r>
+              <a:rPr lang="en-GB" dirty="0" err="1"/>
+              <a:t>niet</a:t>
+            </a:r>
+            <a:r>
+              <a:rPr lang="en-GB" dirty="0"/>
+              <a:t> om de </a:t>
+            </a:r>
+            <a:r>
+              <a:rPr lang="en-GB" dirty="0" err="1"/>
+              <a:t>seconde</a:t>
+            </a:r>
+            <a:r>
+              <a:rPr lang="en-GB" dirty="0"/>
+              <a:t> </a:t>
+            </a:r>
+            <a:r>
+              <a:rPr lang="en-GB" dirty="0" err="1"/>
+              <a:t>een</a:t>
+            </a:r>
+            <a:r>
+              <a:rPr lang="en-GB" dirty="0"/>
+              <a:t> hammering — wat het </a:t>
+            </a:r>
+            <a:r>
+              <a:rPr lang="en-GB" dirty="0" err="1"/>
+              <a:t>zelf</a:t>
+            </a:r>
+            <a:r>
+              <a:rPr lang="en-GB" dirty="0"/>
+              <a:t> </a:t>
+            </a:r>
+            <a:r>
+              <a:rPr lang="en-GB" dirty="0" err="1"/>
+              <a:t>weer</a:t>
+            </a:r>
+            <a:r>
+              <a:rPr lang="en-GB" dirty="0"/>
+              <a:t> </a:t>
+            </a:r>
+            <a:r>
+              <a:rPr lang="en-GB" dirty="0" err="1"/>
+              <a:t>kan</a:t>
+            </a:r>
+            <a:r>
+              <a:rPr lang="en-GB" dirty="0"/>
+              <a:t> </a:t>
+            </a:r>
+            <a:r>
+              <a:rPr lang="en-GB" dirty="0" err="1"/>
+              <a:t>helpen</a:t>
+            </a:r>
+            <a:r>
+              <a:rPr lang="en-GB" dirty="0"/>
+              <a:t> </a:t>
+            </a:r>
+            <a:r>
+              <a:rPr lang="en-GB" dirty="0" err="1"/>
+              <a:t>herstellen</a:t>
+            </a:r>
+            <a:r>
+              <a:rPr lang="en-GB" dirty="0"/>
+              <a:t> ("thundering herd" </a:t>
+            </a:r>
+            <a:r>
+              <a:rPr lang="en-GB" dirty="0" err="1"/>
+              <a:t>vermijden</a:t>
+            </a:r>
+            <a:r>
+              <a:rPr lang="en-GB" dirty="0"/>
+              <a:t>).</a:t>
+            </a:r>
+          </a:p>
+          <a:p>
+            <a:r>
+              <a:rPr lang="en-GB" dirty="0"/>
+              <a:t>  - min(…, </a:t>
+            </a:r>
+            <a:r>
+              <a:rPr lang="en-GB" dirty="0" err="1"/>
+              <a:t>max_backoff_s</a:t>
+            </a:r>
+            <a:r>
+              <a:rPr lang="en-GB" dirty="0"/>
+              <a:t>) </a:t>
+            </a:r>
+            <a:r>
+              <a:rPr lang="en-GB" dirty="0" err="1"/>
+              <a:t>voorkomt</a:t>
+            </a:r>
+            <a:r>
+              <a:rPr lang="en-GB" dirty="0"/>
+              <a:t> </a:t>
+            </a:r>
+            <a:r>
+              <a:rPr lang="en-GB" dirty="0" err="1"/>
+              <a:t>eindeloos</a:t>
+            </a:r>
+            <a:r>
+              <a:rPr lang="en-GB" dirty="0"/>
+              <a:t> </a:t>
+            </a:r>
+            <a:r>
+              <a:rPr lang="en-GB" dirty="0" err="1"/>
+              <a:t>uitgroeien</a:t>
+            </a:r>
+            <a:r>
+              <a:rPr lang="en-GB" dirty="0"/>
+              <a:t>: </a:t>
+            </a:r>
+            <a:r>
+              <a:rPr lang="en-GB" dirty="0" err="1"/>
+              <a:t>zonder</a:t>
+            </a:r>
+            <a:r>
+              <a:rPr lang="en-GB" dirty="0"/>
+              <a:t> cap </a:t>
+            </a:r>
+            <a:r>
+              <a:rPr lang="en-GB" dirty="0" err="1"/>
+              <a:t>zou</a:t>
+            </a:r>
+            <a:r>
+              <a:rPr lang="en-GB" dirty="0"/>
+              <a:t> </a:t>
+            </a:r>
+            <a:r>
+              <a:rPr lang="en-GB" dirty="0" err="1"/>
+              <a:t>na</a:t>
+            </a:r>
+            <a:r>
+              <a:rPr lang="en-GB" dirty="0"/>
+              <a:t> 20 </a:t>
+            </a:r>
+            <a:r>
+              <a:rPr lang="en-GB" dirty="0" err="1"/>
+              <a:t>pogingen</a:t>
+            </a:r>
+            <a:r>
+              <a:rPr lang="en-GB" dirty="0"/>
+              <a:t> de </a:t>
+            </a:r>
+            <a:r>
+              <a:rPr lang="en-GB" dirty="0" err="1"/>
+              <a:t>wachttijd</a:t>
+            </a:r>
+            <a:r>
+              <a:rPr lang="en-GB" dirty="0"/>
+              <a:t> </a:t>
+            </a:r>
+            <a:r>
+              <a:rPr lang="en-GB" dirty="0" err="1"/>
+              <a:t>dagen</a:t>
+            </a:r>
+            <a:r>
+              <a:rPr lang="en-GB" dirty="0"/>
+              <a:t> </a:t>
+            </a:r>
+            <a:r>
+              <a:rPr lang="en-GB" dirty="0" err="1"/>
+              <a:t>worden</a:t>
+            </a:r>
+            <a:r>
+              <a:rPr lang="en-GB" dirty="0"/>
+              <a:t>; nu is </a:t>
+            </a:r>
+            <a:r>
+              <a:rPr lang="en-GB" dirty="0" err="1"/>
+              <a:t>hij</a:t>
+            </a:r>
+            <a:r>
+              <a:rPr lang="en-GB" dirty="0"/>
+              <a:t> </a:t>
+            </a:r>
+            <a:r>
+              <a:rPr lang="en-GB" dirty="0" err="1"/>
+              <a:t>gegarandeerd</a:t>
+            </a:r>
+            <a:r>
+              <a:rPr lang="en-GB" dirty="0"/>
+              <a:t> ≤ 10 min.</a:t>
+            </a:r>
+          </a:p>
+          <a:p>
+            <a:r>
+              <a:rPr lang="en-GB" dirty="0"/>
+              <a:t>  - </a:t>
+            </a:r>
+            <a:r>
+              <a:rPr lang="en-GB" dirty="0" err="1"/>
+              <a:t>Voorspelbare</a:t>
+            </a:r>
+            <a:r>
+              <a:rPr lang="en-GB" dirty="0"/>
+              <a:t> worst-case: met </a:t>
+            </a:r>
+            <a:r>
+              <a:rPr lang="en-GB" dirty="0" err="1"/>
+              <a:t>max_attempts</a:t>
+            </a:r>
+            <a:r>
+              <a:rPr lang="en-GB" dirty="0"/>
+              <a:t>=10 </a:t>
+            </a:r>
+            <a:r>
+              <a:rPr lang="en-GB" dirty="0" err="1"/>
+              <a:t>en</a:t>
+            </a:r>
+            <a:r>
+              <a:rPr lang="en-GB" dirty="0"/>
+              <a:t> </a:t>
+            </a:r>
+            <a:r>
+              <a:rPr lang="en-GB" dirty="0" err="1"/>
+              <a:t>max_backoff_s</a:t>
+            </a:r>
+            <a:r>
+              <a:rPr lang="en-GB" dirty="0"/>
+              <a:t>=600 </a:t>
+            </a:r>
+            <a:r>
+              <a:rPr lang="en-GB" dirty="0" err="1"/>
+              <a:t>weet</a:t>
+            </a:r>
+            <a:r>
+              <a:rPr lang="en-GB" dirty="0"/>
+              <a:t> je </a:t>
+            </a:r>
+            <a:r>
+              <a:rPr lang="en-GB" dirty="0" err="1"/>
+              <a:t>dat</a:t>
+            </a:r>
+            <a:r>
+              <a:rPr lang="en-GB" dirty="0"/>
+              <a:t> </a:t>
+            </a:r>
+            <a:r>
+              <a:rPr lang="en-GB" dirty="0" err="1"/>
+              <a:t>een</a:t>
+            </a:r>
+            <a:r>
+              <a:rPr lang="en-GB" dirty="0"/>
+              <a:t> </a:t>
+            </a:r>
+            <a:r>
+              <a:rPr lang="en-GB" dirty="0" err="1"/>
+              <a:t>bericht</a:t>
+            </a:r>
+            <a:r>
+              <a:rPr lang="en-GB" dirty="0"/>
+              <a:t> max ~30 min later in dead-letter </a:t>
+            </a:r>
+            <a:r>
+              <a:rPr lang="en-GB" dirty="0" err="1"/>
+              <a:t>belandt</a:t>
+            </a:r>
+            <a:r>
+              <a:rPr lang="en-GB" dirty="0"/>
+              <a:t> </a:t>
+            </a:r>
+            <a:r>
+              <a:rPr lang="en-GB" dirty="0" err="1"/>
+              <a:t>en</a:t>
+            </a:r>
+            <a:r>
+              <a:rPr lang="en-GB" dirty="0"/>
+              <a:t> je </a:t>
+            </a:r>
+            <a:r>
+              <a:rPr lang="en-GB" dirty="0" err="1"/>
+              <a:t>een</a:t>
+            </a:r>
+            <a:r>
+              <a:rPr lang="en-GB" dirty="0"/>
+              <a:t> operator-mail </a:t>
+            </a:r>
+            <a:r>
+              <a:rPr lang="en-GB" dirty="0" err="1"/>
+              <a:t>krijgt</a:t>
+            </a:r>
+            <a:r>
+              <a:rPr lang="en-GB" dirty="0"/>
+              <a:t>.</a:t>
+            </a:r>
+          </a:p>
+          <a:p>
+            <a:endParaRPr lang="en-GB" dirty="0"/>
+          </a:p>
+          <a:p>
+            <a:r>
+              <a:rPr lang="en-GB" dirty="0"/>
+              <a:t>  In code   </a:t>
+            </a:r>
+          </a:p>
+          <a:p>
+            <a:endParaRPr lang="en-GB" dirty="0"/>
+          </a:p>
+          <a:p>
+            <a:r>
+              <a:rPr lang="en-GB" dirty="0"/>
+              <a:t>  In </a:t>
+            </a:r>
+            <a:r>
+              <a:rPr lang="en-GB" dirty="0" err="1"/>
+              <a:t>MomRepository.mark_failure</a:t>
+            </a:r>
+            <a:r>
+              <a:rPr lang="en-GB" dirty="0"/>
+              <a:t>():</a:t>
+            </a:r>
+          </a:p>
+          <a:p>
+            <a:r>
+              <a:rPr lang="en-GB" dirty="0"/>
+              <a:t>  </a:t>
+            </a:r>
+          </a:p>
+          <a:p>
+            <a:r>
+              <a:rPr lang="en-GB" dirty="0"/>
+              <a:t>  delay = min(</a:t>
+            </a:r>
+            <a:r>
+              <a:rPr lang="en-GB" dirty="0" err="1"/>
+              <a:t>base_backoff_seconds</a:t>
+            </a:r>
+            <a:r>
+              <a:rPr lang="en-GB" dirty="0"/>
+              <a:t> * (2 ** </a:t>
+            </a:r>
+            <a:r>
+              <a:rPr lang="en-GB" dirty="0" err="1"/>
+              <a:t>attempt_count</a:t>
+            </a:r>
+            <a:r>
+              <a:rPr lang="en-GB" dirty="0"/>
+              <a:t>), </a:t>
+            </a:r>
+            <a:r>
+              <a:rPr lang="en-GB" dirty="0" err="1"/>
+              <a:t>max_backoff_seconds</a:t>
+            </a:r>
+            <a:r>
+              <a:rPr lang="en-GB" dirty="0"/>
+              <a:t>)</a:t>
+            </a:r>
+          </a:p>
+          <a:p>
+            <a:r>
+              <a:rPr lang="en-GB" dirty="0"/>
+              <a:t>  </a:t>
+            </a:r>
+            <a:r>
+              <a:rPr lang="en-GB" dirty="0" err="1"/>
+              <a:t>next_retry_at</a:t>
+            </a:r>
+            <a:r>
+              <a:rPr lang="en-GB" dirty="0"/>
+              <a:t> = </a:t>
+            </a:r>
+            <a:r>
+              <a:rPr lang="en-GB" dirty="0" err="1"/>
+              <a:t>datetime.now</a:t>
+            </a:r>
+            <a:r>
+              <a:rPr lang="en-GB" dirty="0"/>
+              <a:t>() + </a:t>
+            </a:r>
+            <a:r>
+              <a:rPr lang="en-GB" dirty="0" err="1"/>
+              <a:t>timedelta</a:t>
+            </a:r>
+            <a:r>
+              <a:rPr lang="en-GB" dirty="0"/>
+              <a:t>(seconds=delay)</a:t>
+            </a:r>
+          </a:p>
+          <a:p>
+            <a:r>
+              <a:rPr lang="en-GB" dirty="0"/>
+              <a:t>  </a:t>
+            </a:r>
+          </a:p>
+          <a:p>
+            <a:r>
+              <a:rPr lang="en-GB" dirty="0"/>
+              <a:t>  De broker-worker </a:t>
+            </a:r>
+            <a:r>
+              <a:rPr lang="en-GB" dirty="0" err="1"/>
+              <a:t>filtert</a:t>
+            </a:r>
+            <a:r>
+              <a:rPr lang="en-GB" dirty="0"/>
+              <a:t> </a:t>
+            </a:r>
+            <a:r>
+              <a:rPr lang="en-GB" dirty="0" err="1"/>
+              <a:t>vervolgens</a:t>
+            </a:r>
+            <a:r>
+              <a:rPr lang="en-GB" dirty="0"/>
+              <a:t> in </a:t>
+            </a:r>
+            <a:r>
+              <a:rPr lang="en-GB" dirty="0" err="1"/>
+              <a:t>get_due_pending_messages</a:t>
+            </a:r>
+            <a:r>
+              <a:rPr lang="en-GB" dirty="0"/>
+              <a:t>():</a:t>
+            </a:r>
+          </a:p>
+          <a:p>
+            <a:r>
+              <a:rPr lang="en-GB" dirty="0"/>
+              <a:t>  </a:t>
+            </a:r>
+          </a:p>
+          <a:p>
+            <a:r>
+              <a:rPr lang="en-GB" dirty="0"/>
+              <a:t>  WHERE </a:t>
+            </a:r>
+            <a:r>
+              <a:rPr lang="en-GB" dirty="0" err="1"/>
+              <a:t>dead_letter</a:t>
+            </a:r>
+            <a:r>
+              <a:rPr lang="en-GB" dirty="0"/>
+              <a:t> = false</a:t>
+            </a:r>
+          </a:p>
+          <a:p>
+            <a:r>
+              <a:rPr lang="en-GB" dirty="0"/>
+              <a:t>    AND (</a:t>
+            </a:r>
+            <a:r>
+              <a:rPr lang="en-GB" dirty="0" err="1"/>
+              <a:t>next_retry_at</a:t>
+            </a:r>
+            <a:r>
+              <a:rPr lang="en-GB" dirty="0"/>
+              <a:t> IS NULL OR </a:t>
+            </a:r>
+            <a:r>
+              <a:rPr lang="en-GB" dirty="0" err="1"/>
+              <a:t>next_retry_at</a:t>
+            </a:r>
+            <a:r>
+              <a:rPr lang="en-GB" dirty="0"/>
+              <a:t> &lt;= NOW())</a:t>
+            </a:r>
+          </a:p>
+          <a:p>
+            <a:r>
+              <a:rPr lang="en-GB" dirty="0"/>
+              <a:t>  ORDER BY </a:t>
+            </a:r>
+            <a:r>
+              <a:rPr lang="en-GB" dirty="0" err="1"/>
+              <a:t>next_retry_at</a:t>
+            </a:r>
+            <a:r>
+              <a:rPr lang="en-GB" dirty="0"/>
+              <a:t> NULLS FIRST</a:t>
+            </a:r>
+          </a:p>
+          <a:p>
+            <a:r>
+              <a:rPr lang="en-GB" dirty="0"/>
+              <a:t>  LIMIT :</a:t>
+            </a:r>
+            <a:r>
+              <a:rPr lang="en-GB" dirty="0" err="1"/>
+              <a:t>batch_size</a:t>
+            </a:r>
+            <a:endParaRPr lang="en-GB" dirty="0"/>
+          </a:p>
+          <a:p>
+            <a:endParaRPr lang="en-GB" dirty="0"/>
+          </a:p>
+          <a:p>
+            <a:r>
+              <a:rPr lang="en-GB" dirty="0"/>
+              <a:t>  → </a:t>
+            </a:r>
+            <a:r>
+              <a:rPr lang="en-GB" dirty="0" err="1"/>
+              <a:t>rijen</a:t>
+            </a:r>
+            <a:r>
+              <a:rPr lang="en-GB" dirty="0"/>
+              <a:t> </a:t>
+            </a:r>
+            <a:r>
+              <a:rPr lang="en-GB" dirty="0" err="1"/>
+              <a:t>waarvan</a:t>
+            </a:r>
+            <a:r>
+              <a:rPr lang="en-GB" dirty="0"/>
+              <a:t> </a:t>
+            </a:r>
+            <a:r>
+              <a:rPr lang="en-GB" dirty="0" err="1"/>
+              <a:t>next_retry_at</a:t>
+            </a:r>
+            <a:r>
+              <a:rPr lang="en-GB" dirty="0"/>
+              <a:t> in de </a:t>
+            </a:r>
+            <a:r>
+              <a:rPr lang="en-GB" dirty="0" err="1"/>
+              <a:t>toekomst</a:t>
+            </a:r>
+            <a:r>
+              <a:rPr lang="en-GB" dirty="0"/>
+              <a:t> </a:t>
+            </a:r>
+            <a:r>
+              <a:rPr lang="en-GB" dirty="0" err="1"/>
+              <a:t>ligt</a:t>
+            </a:r>
+            <a:r>
+              <a:rPr lang="en-GB" dirty="0"/>
+              <a:t>, </a:t>
+            </a:r>
+            <a:r>
+              <a:rPr lang="en-GB" dirty="0" err="1"/>
+              <a:t>blijven</a:t>
+            </a:r>
+            <a:r>
+              <a:rPr lang="en-GB" dirty="0"/>
+              <a:t> </a:t>
+            </a:r>
+            <a:r>
+              <a:rPr lang="en-GB" dirty="0" err="1"/>
+              <a:t>gewoon</a:t>
+            </a:r>
+            <a:r>
+              <a:rPr lang="en-GB" dirty="0"/>
+              <a:t> </a:t>
+            </a:r>
+            <a:r>
+              <a:rPr lang="en-GB" dirty="0" err="1"/>
+              <a:t>liggen</a:t>
+            </a:r>
+            <a:r>
+              <a:rPr lang="en-GB" dirty="0"/>
+              <a:t> tot </a:t>
+            </a:r>
+            <a:r>
+              <a:rPr lang="en-GB" dirty="0" err="1"/>
+              <a:t>hun</a:t>
+            </a:r>
+            <a:r>
+              <a:rPr lang="en-GB" dirty="0"/>
+              <a:t> </a:t>
+            </a:r>
+            <a:r>
+              <a:rPr lang="en-GB" dirty="0" err="1"/>
+              <a:t>beurt</a:t>
+            </a:r>
+            <a:r>
+              <a:rPr lang="en-GB" dirty="0"/>
+              <a:t> </a:t>
+            </a:r>
+            <a:r>
+              <a:rPr lang="en-GB" dirty="0" err="1"/>
+              <a:t>komt</a:t>
+            </a:r>
+            <a:r>
+              <a:rPr lang="en-GB" dirty="0"/>
+              <a:t>.</a:t>
+            </a:r>
+          </a:p>
+          <a:p>
+            <a:r>
+              <a:rPr lang="en-GB" dirty="0"/>
+              <a:t> </a:t>
+            </a:r>
+            <a:endParaRPr lang="en-BE" dirty="0"/>
+          </a:p>
+        </p:txBody>
+      </p:sp>
+      <p:sp>
+        <p:nvSpPr>
+          <p:cNvPr id="4" name="Slide Number Placeholder 3"/>
+          <p:cNvSpPr>
+            <a:spLocks noGrp="1"/>
+          </p:cNvSpPr>
+          <p:nvPr>
+            <p:ph type="sldNum" sz="quarter" idx="5"/>
+          </p:nvPr>
+        </p:nvSpPr>
+        <p:spPr/>
+        <p:txBody>
+          <a:bodyPr/>
+          <a:lstStyle/>
+          <a:p>
+            <a:fld id="{6C11C5A2-6844-DC44-92D7-B5E8680DCECE}" type="slidenum">
+              <a:rPr lang="en-BE" smtClean="0"/>
+              <a:t>12</a:t>
+            </a:fld>
+            <a:endParaRPr lang="en-BE"/>
+          </a:p>
+        </p:txBody>
+      </p:sp>
+    </p:spTree>
+    <p:extLst>
+      <p:ext uri="{BB962C8B-B14F-4D97-AF65-F5344CB8AC3E}">
+        <p14:creationId xmlns:p14="http://schemas.microsoft.com/office/powerpoint/2010/main" val="2100923138"/>
+      </p:ext>
+    </p:extLst>
+  </p:cSld>
+  <p:clrMapOvr>
+    <a:masterClrMapping/>
+  </p:clrMapOvr>
+</p:notes>
 </file>
 
 <file path=ppt/slideLayouts/slideLayout1.xml><?xml version="1.0" encoding="utf-8"?>
@@ -164,10 +2716,9 @@
           <a:lstStyle/>
           <a:p>
             <a:r>
-              <a:rPr lang="en-US" smtClean="0"/>
+              <a:rPr lang="en-US"/>
               <a:t>Click to edit Master title style</a:t>
             </a:r>
-            <a:endParaRPr lang="en-US"/>
           </a:p>
         </p:txBody>
       </p:sp>
@@ -283,10 +2834,9 @@
           </a:lstStyle>
           <a:p>
             <a:r>
-              <a:rPr lang="en-US" smtClean="0"/>
+              <a:rPr lang="en-US"/>
               <a:t>Click to edit Master subtitle style</a:t>
             </a:r>
-            <a:endParaRPr lang="en-US"/>
           </a:p>
         </p:txBody>
       </p:sp>
@@ -307,7 +2857,7 @@
           <a:p>
             <a:fld id="{5BCAD085-E8A6-8845-BD4E-CB4CCA059FC4}" type="datetimeFigureOut">
               <a:rPr lang="en-US" smtClean="0"/>
-              <a:t>1/27/13</a:t>
+              <a:t>6/17/26</a:t>
             </a:fld>
             <a:endParaRPr lang="en-US"/>
           </a:p>
@@ -401,10 +2951,9 @@
           <a:lstStyle/>
           <a:p>
             <a:r>
-              <a:rPr lang="en-US" smtClean="0"/>
+              <a:rPr lang="en-US"/>
               <a:t>Click to edit Master title style</a:t>
             </a:r>
-            <a:endParaRPr lang="en-US"/>
           </a:p>
         </p:txBody>
       </p:sp>
@@ -425,38 +2974,37 @@
           <a:p>
             <a:pPr lvl="0"/>
             <a:r>
-              <a:rPr lang="en-US" smtClean="0"/>
+              <a:rPr lang="en-US"/>
               <a:t>Click to edit Master text styles</a:t>
             </a:r>
           </a:p>
           <a:p>
             <a:pPr lvl="1"/>
             <a:r>
-              <a:rPr lang="en-US" smtClean="0"/>
+              <a:rPr lang="en-US"/>
               <a:t>Second level</a:t>
             </a:r>
           </a:p>
           <a:p>
             <a:pPr lvl="2"/>
             <a:r>
-              <a:rPr lang="en-US" smtClean="0"/>
+              <a:rPr lang="en-US"/>
               <a:t>Third level</a:t>
             </a:r>
           </a:p>
           <a:p>
             <a:pPr lvl="3"/>
             <a:r>
-              <a:rPr lang="en-US" smtClean="0"/>
+              <a:rPr lang="en-US"/>
               <a:t>Fourth level</a:t>
             </a:r>
           </a:p>
           <a:p>
             <a:pPr lvl="4"/>
             <a:r>
-              <a:rPr lang="en-US" smtClean="0"/>
+              <a:rPr lang="en-US"/>
               <a:t>Fifth level</a:t>
             </a:r>
-            <a:endParaRPr lang="en-US"/>
           </a:p>
         </p:txBody>
       </p:sp>
@@ -477,7 +3025,7 @@
           <a:p>
             <a:fld id="{5BCAD085-E8A6-8845-BD4E-CB4CCA059FC4}" type="datetimeFigureOut">
               <a:rPr lang="en-US" smtClean="0"/>
-              <a:t>1/27/13</a:t>
+              <a:t>6/17/26</a:t>
             </a:fld>
             <a:endParaRPr lang="en-US"/>
           </a:p>
@@ -576,10 +3124,9 @@
           <a:lstStyle/>
           <a:p>
             <a:r>
-              <a:rPr lang="en-US" smtClean="0"/>
+              <a:rPr lang="en-US"/>
               <a:t>Click to edit Master title style</a:t>
             </a:r>
-            <a:endParaRPr lang="en-US"/>
           </a:p>
         </p:txBody>
       </p:sp>
@@ -605,38 +3152,37 @@
           <a:p>
             <a:pPr lvl="0"/>
             <a:r>
-              <a:rPr lang="en-US" smtClean="0"/>
+              <a:rPr lang="en-US"/>
               <a:t>Click to edit Master text styles</a:t>
             </a:r>
           </a:p>
           <a:p>
             <a:pPr lvl="1"/>
             <a:r>
-              <a:rPr lang="en-US" smtClean="0"/>
+              <a:rPr lang="en-US"/>
               <a:t>Second level</a:t>
             </a:r>
           </a:p>
           <a:p>
             <a:pPr lvl="2"/>
             <a:r>
-              <a:rPr lang="en-US" smtClean="0"/>
+              <a:rPr lang="en-US"/>
               <a:t>Third level</a:t>
             </a:r>
           </a:p>
           <a:p>
             <a:pPr lvl="3"/>
             <a:r>
-              <a:rPr lang="en-US" smtClean="0"/>
+              <a:rPr lang="en-US"/>
               <a:t>Fourth level</a:t>
             </a:r>
           </a:p>
           <a:p>
             <a:pPr lvl="4"/>
             <a:r>
-              <a:rPr lang="en-US" smtClean="0"/>
+              <a:rPr lang="en-US"/>
               <a:t>Fifth level</a:t>
             </a:r>
-            <a:endParaRPr lang="en-US"/>
           </a:p>
         </p:txBody>
       </p:sp>
@@ -657,7 +3203,7 @@
           <a:p>
             <a:fld id="{5BCAD085-E8A6-8845-BD4E-CB4CCA059FC4}" type="datetimeFigureOut">
               <a:rPr lang="en-US" smtClean="0"/>
-              <a:t>1/27/13</a:t>
+              <a:t>6/17/26</a:t>
             </a:fld>
             <a:endParaRPr lang="en-US"/>
           </a:p>
@@ -751,10 +3297,9 @@
           <a:lstStyle/>
           <a:p>
             <a:r>
-              <a:rPr lang="en-US" smtClean="0"/>
+              <a:rPr lang="en-US"/>
               <a:t>Click to edit Master title style</a:t>
             </a:r>
-            <a:endParaRPr lang="en-US"/>
           </a:p>
         </p:txBody>
       </p:sp>
@@ -775,38 +3320,37 @@
           <a:p>
             <a:pPr lvl="0"/>
             <a:r>
-              <a:rPr lang="en-US" smtClean="0"/>
+              <a:rPr lang="en-US"/>
               <a:t>Click to edit Master text styles</a:t>
             </a:r>
           </a:p>
           <a:p>
             <a:pPr lvl="1"/>
             <a:r>
-              <a:rPr lang="en-US" smtClean="0"/>
+              <a:rPr lang="en-US"/>
               <a:t>Second level</a:t>
             </a:r>
           </a:p>
           <a:p>
             <a:pPr lvl="2"/>
             <a:r>
-              <a:rPr lang="en-US" smtClean="0"/>
+              <a:rPr lang="en-US"/>
               <a:t>Third level</a:t>
             </a:r>
           </a:p>
           <a:p>
             <a:pPr lvl="3"/>
             <a:r>
-              <a:rPr lang="en-US" smtClean="0"/>
+              <a:rPr lang="en-US"/>
               <a:t>Fourth level</a:t>
             </a:r>
           </a:p>
           <a:p>
             <a:pPr lvl="4"/>
             <a:r>
-              <a:rPr lang="en-US" smtClean="0"/>
+              <a:rPr lang="en-US"/>
               <a:t>Fifth level</a:t>
             </a:r>
-            <a:endParaRPr lang="en-US"/>
           </a:p>
         </p:txBody>
       </p:sp>
@@ -827,7 +3371,7 @@
           <a:p>
             <a:fld id="{5BCAD085-E8A6-8845-BD4E-CB4CCA059FC4}" type="datetimeFigureOut">
               <a:rPr lang="en-US" smtClean="0"/>
-              <a:t>1/27/13</a:t>
+              <a:t>6/17/26</a:t>
             </a:fld>
             <a:endParaRPr lang="en-US"/>
           </a:p>
@@ -930,10 +3474,9 @@
           </a:lstStyle>
           <a:p>
             <a:r>
-              <a:rPr lang="en-US" smtClean="0"/>
+              <a:rPr lang="en-US"/>
               <a:t>Click to edit Master title style</a:t>
             </a:r>
-            <a:endParaRPr lang="en-US"/>
           </a:p>
         </p:txBody>
       </p:sp>
@@ -1050,7 +3593,7 @@
           <a:p>
             <a:pPr lvl="0"/>
             <a:r>
-              <a:rPr lang="en-US" smtClean="0"/>
+              <a:rPr lang="en-US"/>
               <a:t>Click to edit Master text styles</a:t>
             </a:r>
           </a:p>
@@ -1073,7 +3616,7 @@
           <a:p>
             <a:fld id="{5BCAD085-E8A6-8845-BD4E-CB4CCA059FC4}" type="datetimeFigureOut">
               <a:rPr lang="en-US" smtClean="0"/>
-              <a:t>1/27/13</a:t>
+              <a:t>6/17/26</a:t>
             </a:fld>
             <a:endParaRPr lang="en-US"/>
           </a:p>
@@ -1167,10 +3710,9 @@
           <a:lstStyle/>
           <a:p>
             <a:r>
-              <a:rPr lang="en-US" smtClean="0"/>
+              <a:rPr lang="en-US"/>
               <a:t>Click to edit Master title style</a:t>
             </a:r>
-            <a:endParaRPr lang="en-US"/>
           </a:p>
         </p:txBody>
       </p:sp>
@@ -1224,38 +3766,37 @@
           <a:p>
             <a:pPr lvl="0"/>
             <a:r>
-              <a:rPr lang="en-US" smtClean="0"/>
+              <a:rPr lang="en-US"/>
               <a:t>Click to edit Master text styles</a:t>
             </a:r>
           </a:p>
           <a:p>
             <a:pPr lvl="1"/>
             <a:r>
-              <a:rPr lang="en-US" smtClean="0"/>
+              <a:rPr lang="en-US"/>
               <a:t>Second level</a:t>
             </a:r>
           </a:p>
           <a:p>
             <a:pPr lvl="2"/>
             <a:r>
-              <a:rPr lang="en-US" smtClean="0"/>
+              <a:rPr lang="en-US"/>
               <a:t>Third level</a:t>
             </a:r>
           </a:p>
           <a:p>
             <a:pPr lvl="3"/>
             <a:r>
-              <a:rPr lang="en-US" smtClean="0"/>
+              <a:rPr lang="en-US"/>
               <a:t>Fourth level</a:t>
             </a:r>
           </a:p>
           <a:p>
             <a:pPr lvl="4"/>
             <a:r>
-              <a:rPr lang="en-US" smtClean="0"/>
+              <a:rPr lang="en-US"/>
               <a:t>Fifth level</a:t>
             </a:r>
-            <a:endParaRPr lang="en-US"/>
           </a:p>
         </p:txBody>
       </p:sp>
@@ -1309,38 +3850,37 @@
           <a:p>
             <a:pPr lvl="0"/>
             <a:r>
-              <a:rPr lang="en-US" smtClean="0"/>
+              <a:rPr lang="en-US"/>
               <a:t>Click to edit Master text styles</a:t>
             </a:r>
           </a:p>
           <a:p>
             <a:pPr lvl="1"/>
             <a:r>
-              <a:rPr lang="en-US" smtClean="0"/>
+              <a:rPr lang="en-US"/>
               <a:t>Second level</a:t>
             </a:r>
           </a:p>
           <a:p>
             <a:pPr lvl="2"/>
             <a:r>
-              <a:rPr lang="en-US" smtClean="0"/>
+              <a:rPr lang="en-US"/>
               <a:t>Third level</a:t>
             </a:r>
           </a:p>
           <a:p>
             <a:pPr lvl="3"/>
             <a:r>
-              <a:rPr lang="en-US" smtClean="0"/>
+              <a:rPr lang="en-US"/>
               <a:t>Fourth level</a:t>
             </a:r>
           </a:p>
           <a:p>
             <a:pPr lvl="4"/>
             <a:r>
-              <a:rPr lang="en-US" smtClean="0"/>
+              <a:rPr lang="en-US"/>
               <a:t>Fifth level</a:t>
             </a:r>
-            <a:endParaRPr lang="en-US"/>
           </a:p>
         </p:txBody>
       </p:sp>
@@ -1361,7 +3901,7 @@
           <a:p>
             <a:fld id="{5BCAD085-E8A6-8845-BD4E-CB4CCA059FC4}" type="datetimeFigureOut">
               <a:rPr lang="en-US" smtClean="0"/>
-              <a:t>1/27/13</a:t>
+              <a:t>6/17/26</a:t>
             </a:fld>
             <a:endParaRPr lang="en-US"/>
           </a:p>
@@ -1459,10 +3999,9 @@
           </a:lstStyle>
           <a:p>
             <a:r>
-              <a:rPr lang="en-US" smtClean="0"/>
+              <a:rPr lang="en-US"/>
               <a:t>Click to edit Master title style</a:t>
             </a:r>
-            <a:endParaRPr lang="en-US"/>
           </a:p>
         </p:txBody>
       </p:sp>
@@ -1525,7 +4064,7 @@
           <a:p>
             <a:pPr lvl="0"/>
             <a:r>
-              <a:rPr lang="en-US" smtClean="0"/>
+              <a:rPr lang="en-US"/>
               <a:t>Click to edit Master text styles</a:t>
             </a:r>
           </a:p>
@@ -1581,38 +4120,37 @@
           <a:p>
             <a:pPr lvl="0"/>
             <a:r>
-              <a:rPr lang="en-US" smtClean="0"/>
+              <a:rPr lang="en-US"/>
               <a:t>Click to edit Master text styles</a:t>
             </a:r>
           </a:p>
           <a:p>
             <a:pPr lvl="1"/>
             <a:r>
-              <a:rPr lang="en-US" smtClean="0"/>
+              <a:rPr lang="en-US"/>
               <a:t>Second level</a:t>
             </a:r>
           </a:p>
           <a:p>
             <a:pPr lvl="2"/>
             <a:r>
-              <a:rPr lang="en-US" smtClean="0"/>
+              <a:rPr lang="en-US"/>
               <a:t>Third level</a:t>
             </a:r>
           </a:p>
           <a:p>
             <a:pPr lvl="3"/>
             <a:r>
-              <a:rPr lang="en-US" smtClean="0"/>
+              <a:rPr lang="en-US"/>
               <a:t>Fourth level</a:t>
             </a:r>
           </a:p>
           <a:p>
             <a:pPr lvl="4"/>
             <a:r>
-              <a:rPr lang="en-US" smtClean="0"/>
+              <a:rPr lang="en-US"/>
               <a:t>Fifth level</a:t>
             </a:r>
-            <a:endParaRPr lang="en-US"/>
           </a:p>
         </p:txBody>
       </p:sp>
@@ -1675,7 +4213,7 @@
           <a:p>
             <a:pPr lvl="0"/>
             <a:r>
-              <a:rPr lang="en-US" smtClean="0"/>
+              <a:rPr lang="en-US"/>
               <a:t>Click to edit Master text styles</a:t>
             </a:r>
           </a:p>
@@ -1731,38 +4269,37 @@
           <a:p>
             <a:pPr lvl="0"/>
             <a:r>
-              <a:rPr lang="en-US" smtClean="0"/>
+              <a:rPr lang="en-US"/>
               <a:t>Click to edit Master text styles</a:t>
             </a:r>
           </a:p>
           <a:p>
             <a:pPr lvl="1"/>
             <a:r>
-              <a:rPr lang="en-US" smtClean="0"/>
+              <a:rPr lang="en-US"/>
               <a:t>Second level</a:t>
             </a:r>
           </a:p>
           <a:p>
             <a:pPr lvl="2"/>
             <a:r>
-              <a:rPr lang="en-US" smtClean="0"/>
+              <a:rPr lang="en-US"/>
               <a:t>Third level</a:t>
             </a:r>
           </a:p>
           <a:p>
             <a:pPr lvl="3"/>
             <a:r>
-              <a:rPr lang="en-US" smtClean="0"/>
+              <a:rPr lang="en-US"/>
               <a:t>Fourth level</a:t>
             </a:r>
           </a:p>
           <a:p>
             <a:pPr lvl="4"/>
             <a:r>
-              <a:rPr lang="en-US" smtClean="0"/>
+              <a:rPr lang="en-US"/>
               <a:t>Fifth level</a:t>
             </a:r>
-            <a:endParaRPr lang="en-US"/>
           </a:p>
         </p:txBody>
       </p:sp>
@@ -1783,7 +4320,7 @@
           <a:p>
             <a:fld id="{5BCAD085-E8A6-8845-BD4E-CB4CCA059FC4}" type="datetimeFigureOut">
               <a:rPr lang="en-US" smtClean="0"/>
-              <a:t>1/27/13</a:t>
+              <a:t>6/17/26</a:t>
             </a:fld>
             <a:endParaRPr lang="en-US"/>
           </a:p>
@@ -1877,10 +4414,9 @@
           <a:lstStyle/>
           <a:p>
             <a:r>
-              <a:rPr lang="en-US" smtClean="0"/>
+              <a:rPr lang="en-US"/>
               <a:t>Click to edit Master title style</a:t>
             </a:r>
-            <a:endParaRPr lang="en-US"/>
           </a:p>
         </p:txBody>
       </p:sp>
@@ -1901,7 +4437,7 @@
           <a:p>
             <a:fld id="{5BCAD085-E8A6-8845-BD4E-CB4CCA059FC4}" type="datetimeFigureOut">
               <a:rPr lang="en-US" smtClean="0"/>
-              <a:t>1/27/13</a:t>
+              <a:t>6/17/26</a:t>
             </a:fld>
             <a:endParaRPr lang="en-US"/>
           </a:p>
@@ -1996,7 +4532,7 @@
           <a:p>
             <a:fld id="{5BCAD085-E8A6-8845-BD4E-CB4CCA059FC4}" type="datetimeFigureOut">
               <a:rPr lang="en-US" smtClean="0"/>
-              <a:t>1/27/13</a:t>
+              <a:t>6/17/26</a:t>
             </a:fld>
             <a:endParaRPr lang="en-US"/>
           </a:p>
@@ -2099,10 +4635,9 @@
           </a:lstStyle>
           <a:p>
             <a:r>
-              <a:rPr lang="en-US" smtClean="0"/>
+              <a:rPr lang="en-US"/>
               <a:t>Click to edit Master title style</a:t>
             </a:r>
-            <a:endParaRPr lang="en-US"/>
           </a:p>
         </p:txBody>
       </p:sp>
@@ -2156,38 +4691,37 @@
           <a:p>
             <a:pPr lvl="0"/>
             <a:r>
-              <a:rPr lang="en-US" smtClean="0"/>
+              <a:rPr lang="en-US"/>
               <a:t>Click to edit Master text styles</a:t>
             </a:r>
           </a:p>
           <a:p>
             <a:pPr lvl="1"/>
             <a:r>
-              <a:rPr lang="en-US" smtClean="0"/>
+              <a:rPr lang="en-US"/>
               <a:t>Second level</a:t>
             </a:r>
           </a:p>
           <a:p>
             <a:pPr lvl="2"/>
             <a:r>
-              <a:rPr lang="en-US" smtClean="0"/>
+              <a:rPr lang="en-US"/>
               <a:t>Third level</a:t>
             </a:r>
           </a:p>
           <a:p>
             <a:pPr lvl="3"/>
             <a:r>
-              <a:rPr lang="en-US" smtClean="0"/>
+              <a:rPr lang="en-US"/>
               <a:t>Fourth level</a:t>
             </a:r>
           </a:p>
           <a:p>
             <a:pPr lvl="4"/>
             <a:r>
-              <a:rPr lang="en-US" smtClean="0"/>
+              <a:rPr lang="en-US"/>
               <a:t>Fifth level</a:t>
             </a:r>
-            <a:endParaRPr lang="en-US"/>
           </a:p>
         </p:txBody>
       </p:sp>
@@ -2250,7 +4784,7 @@
           <a:p>
             <a:pPr lvl="0"/>
             <a:r>
-              <a:rPr lang="en-US" smtClean="0"/>
+              <a:rPr lang="en-US"/>
               <a:t>Click to edit Master text styles</a:t>
             </a:r>
           </a:p>
@@ -2273,7 +4807,7 @@
           <a:p>
             <a:fld id="{5BCAD085-E8A6-8845-BD4E-CB4CCA059FC4}" type="datetimeFigureOut">
               <a:rPr lang="en-US" smtClean="0"/>
-              <a:t>1/27/13</a:t>
+              <a:t>6/17/26</a:t>
             </a:fld>
             <a:endParaRPr lang="en-US"/>
           </a:p>
@@ -2376,10 +4910,9 @@
           </a:lstStyle>
           <a:p>
             <a:r>
-              <a:rPr lang="en-US" smtClean="0"/>
+              <a:rPr lang="en-US"/>
               <a:t>Click to edit Master title style</a:t>
             </a:r>
-            <a:endParaRPr lang="en-US"/>
           </a:p>
         </p:txBody>
       </p:sp>
@@ -2503,7 +5036,7 @@
           <a:p>
             <a:pPr lvl="0"/>
             <a:r>
-              <a:rPr lang="en-US" smtClean="0"/>
+              <a:rPr lang="en-US"/>
               <a:t>Click to edit Master text styles</a:t>
             </a:r>
           </a:p>
@@ -2526,7 +5059,7 @@
           <a:p>
             <a:fld id="{5BCAD085-E8A6-8845-BD4E-CB4CCA059FC4}" type="datetimeFigureOut">
               <a:rPr lang="en-US" smtClean="0"/>
-              <a:t>1/27/13</a:t>
+              <a:t>6/17/26</a:t>
             </a:fld>
             <a:endParaRPr lang="en-US"/>
           </a:p>
@@ -2635,10 +5168,9 @@
           <a:lstStyle/>
           <a:p>
             <a:r>
-              <a:rPr lang="en-US" smtClean="0"/>
+              <a:rPr lang="en-US"/>
               <a:t>Click to edit Master title style</a:t>
             </a:r>
-            <a:endParaRPr lang="en-US"/>
           </a:p>
         </p:txBody>
       </p:sp>
@@ -2669,38 +5201,37 @@
           <a:p>
             <a:pPr lvl="0"/>
             <a:r>
-              <a:rPr lang="en-US" smtClean="0"/>
+              <a:rPr lang="en-US"/>
               <a:t>Click to edit Master text styles</a:t>
             </a:r>
           </a:p>
           <a:p>
             <a:pPr lvl="1"/>
             <a:r>
-              <a:rPr lang="en-US" smtClean="0"/>
+              <a:rPr lang="en-US"/>
               <a:t>Second level</a:t>
             </a:r>
           </a:p>
           <a:p>
             <a:pPr lvl="2"/>
             <a:r>
-              <a:rPr lang="en-US" smtClean="0"/>
+              <a:rPr lang="en-US"/>
               <a:t>Third level</a:t>
             </a:r>
           </a:p>
           <a:p>
             <a:pPr lvl="3"/>
             <a:r>
-              <a:rPr lang="en-US" smtClean="0"/>
+              <a:rPr lang="en-US"/>
               <a:t>Fourth level</a:t>
             </a:r>
           </a:p>
           <a:p>
             <a:pPr lvl="4"/>
             <a:r>
-              <a:rPr lang="en-US" smtClean="0"/>
+              <a:rPr lang="en-US"/>
               <a:t>Fifth level</a:t>
             </a:r>
-            <a:endParaRPr lang="en-US"/>
           </a:p>
         </p:txBody>
       </p:sp>
@@ -2739,7 +5270,7 @@
           <a:p>
             <a:fld id="{5BCAD085-E8A6-8845-BD4E-CB4CCA059FC4}" type="datetimeFigureOut">
               <a:rPr lang="en-US" smtClean="0"/>
-              <a:t>1/27/13</a:t>
+              <a:t>6/17/26</a:t>
             </a:fld>
             <a:endParaRPr lang="en-US"/>
           </a:p>
@@ -3098,7 +5629,7 @@
 </file>
 
 <file path=ppt/slides/slide1.xml><?xml version="1.0" encoding="utf-8"?>
-<p:sld xmlns:a="http://schemas.openxmlformats.org/drawingml/2006/main" xmlns:p="http://schemas.openxmlformats.org/presentationml/2006/main" xmlns:r="http://schemas.openxmlformats.org/officeDocument/2006/relationships">
+<p:sld xmlns:a="http://schemas.openxmlformats.org/drawingml/2006/main" xmlns:r="http://schemas.openxmlformats.org/officeDocument/2006/relationships" xmlns:p="http://schemas.openxmlformats.org/presentationml/2006/main">
   <p:cSld>
     <p:spTree>
       <p:nvGrpSpPr>
@@ -3106,7 +5637,14 @@
         <p:cNvGrpSpPr/>
         <p:nvPr/>
       </p:nvGrpSpPr>
-      <p:grpSpPr/>
+      <p:grpSpPr>
+        <a:xfrm>
+          <a:off x="0" y="0"/>
+          <a:ext cx="0" cy="0"/>
+          <a:chOff x="0" y="0"/>
+          <a:chExt cx="0" cy="0"/>
+        </a:xfrm>
+      </p:grpSpPr>
       <p:sp>
         <p:nvSpPr>
           <p:cNvPr id="2" name="Rectangle 1"/>
@@ -3147,6 +5685,7 @@
           <a:lstStyle/>
           <a:p>
             <a:pPr algn="ctr"/>
+            <a:endParaRPr/>
           </a:p>
         </p:txBody>
       </p:sp>
@@ -3190,6 +5729,7 @@
           <a:lstStyle/>
           <a:p>
             <a:pPr algn="ctr"/>
+            <a:endParaRPr/>
           </a:p>
         </p:txBody>
       </p:sp>
@@ -3377,7 +5917,7 @@
 </file>
 
 <file path=ppt/slides/slide10.xml><?xml version="1.0" encoding="utf-8"?>
-<p:sld xmlns:a="http://schemas.openxmlformats.org/drawingml/2006/main" xmlns:p="http://schemas.openxmlformats.org/presentationml/2006/main" xmlns:r="http://schemas.openxmlformats.org/officeDocument/2006/relationships">
+<p:sld xmlns:a="http://schemas.openxmlformats.org/drawingml/2006/main" xmlns:r="http://schemas.openxmlformats.org/officeDocument/2006/relationships" xmlns:p="http://schemas.openxmlformats.org/presentationml/2006/main">
   <p:cSld>
     <p:spTree>
       <p:nvGrpSpPr>
@@ -3385,7 +5925,14 @@
         <p:cNvGrpSpPr/>
         <p:nvPr/>
       </p:nvGrpSpPr>
-      <p:grpSpPr/>
+      <p:grpSpPr>
+        <a:xfrm>
+          <a:off x="0" y="0"/>
+          <a:ext cx="0" cy="0"/>
+          <a:chOff x="0" y="0"/>
+          <a:chExt cx="0" cy="0"/>
+        </a:xfrm>
+      </p:grpSpPr>
       <p:sp>
         <p:nvSpPr>
           <p:cNvPr id="2" name="Rectangle 1"/>
@@ -3426,6 +5973,7 @@
           <a:lstStyle/>
           <a:p>
             <a:pPr algn="ctr"/>
+            <a:endParaRPr/>
           </a:p>
         </p:txBody>
       </p:sp>
@@ -3469,6 +6017,7 @@
           <a:lstStyle/>
           <a:p>
             <a:pPr algn="ctr"/>
+            <a:endParaRPr/>
           </a:p>
         </p:txBody>
       </p:sp>
@@ -3551,7 +6100,7 @@
           <p:nvPr/>
         </p:nvPicPr>
         <p:blipFill>
-          <a:blip r:embed="rId2"/>
+          <a:blip r:embed="rId3"/>
           <a:stretch>
             <a:fillRect/>
           </a:stretch>
@@ -3606,6 +6155,7 @@
           <a:lstStyle/>
           <a:p>
             <a:pPr algn="ctr"/>
+            <a:endParaRPr/>
           </a:p>
         </p:txBody>
       </p:sp>
@@ -3719,6 +6269,7 @@
           <a:lstStyle/>
           <a:p>
             <a:pPr algn="ctr"/>
+            <a:endParaRPr/>
           </a:p>
         </p:txBody>
       </p:sp>
@@ -3832,6 +6383,7 @@
           <a:lstStyle/>
           <a:p>
             <a:pPr algn="ctr"/>
+            <a:endParaRPr/>
           </a:p>
         </p:txBody>
       </p:sp>
@@ -3945,6 +6497,7 @@
           <a:lstStyle/>
           <a:p>
             <a:pPr algn="ctr"/>
+            <a:endParaRPr/>
           </a:p>
         </p:txBody>
       </p:sp>
@@ -4097,7 +6650,7 @@
 </file>
 
 <file path=ppt/slides/slide11.xml><?xml version="1.0" encoding="utf-8"?>
-<p:sld xmlns:a="http://schemas.openxmlformats.org/drawingml/2006/main" xmlns:p="http://schemas.openxmlformats.org/presentationml/2006/main" xmlns:r="http://schemas.openxmlformats.org/officeDocument/2006/relationships">
+<p:sld xmlns:a="http://schemas.openxmlformats.org/drawingml/2006/main" xmlns:r="http://schemas.openxmlformats.org/officeDocument/2006/relationships" xmlns:p="http://schemas.openxmlformats.org/presentationml/2006/main">
   <p:cSld>
     <p:spTree>
       <p:nvGrpSpPr>
@@ -4105,7 +6658,14 @@
         <p:cNvGrpSpPr/>
         <p:nvPr/>
       </p:nvGrpSpPr>
-      <p:grpSpPr/>
+      <p:grpSpPr>
+        <a:xfrm>
+          <a:off x="0" y="0"/>
+          <a:ext cx="0" cy="0"/>
+          <a:chOff x="0" y="0"/>
+          <a:chExt cx="0" cy="0"/>
+        </a:xfrm>
+      </p:grpSpPr>
       <p:sp>
         <p:nvSpPr>
           <p:cNvPr id="2" name="Rectangle 1"/>
@@ -4146,6 +6706,7 @@
           <a:lstStyle/>
           <a:p>
             <a:pPr algn="ctr"/>
+            <a:endParaRPr/>
           </a:p>
         </p:txBody>
       </p:sp>
@@ -4189,6 +6750,7 @@
           <a:lstStyle/>
           <a:p>
             <a:pPr algn="ctr"/>
+            <a:endParaRPr/>
           </a:p>
         </p:txBody>
       </p:sp>
@@ -4408,6 +6970,7 @@
           <a:lstStyle/>
           <a:p>
             <a:pPr algn="ctr"/>
+            <a:endParaRPr/>
           </a:p>
         </p:txBody>
       </p:sp>
@@ -4494,15 +7057,12 @@
           </a:p>
           <a:p>
             <a:pPr algn="l"/>
-            <a:r>
-              <a:rPr sz="1100" b="0">
-                <a:solidFill>
-                  <a:srgbClr val="E6E6E6"/>
-                </a:solidFill>
-                <a:latin typeface="JetBrains Mono"/>
-              </a:rPr>
-              <a:t/>
-            </a:r>
+            <a:endParaRPr sz="1100" b="0">
+              <a:solidFill>
+                <a:srgbClr val="E6E6E6"/>
+              </a:solidFill>
+              <a:latin typeface="JetBrains Mono"/>
+            </a:endParaRPr>
           </a:p>
         </p:txBody>
       </p:sp>
@@ -4583,6 +7143,7 @@
           <a:lstStyle/>
           <a:p>
             <a:pPr algn="ctr"/>
+            <a:endParaRPr/>
           </a:p>
         </p:txBody>
       </p:sp>
@@ -4663,6 +7224,7 @@
           <a:lstStyle/>
           <a:p>
             <a:pPr algn="ctr"/>
+            <a:endParaRPr/>
           </a:p>
         </p:txBody>
       </p:sp>
@@ -4743,6 +7305,7 @@
           <a:lstStyle/>
           <a:p>
             <a:pPr algn="ctr"/>
+            <a:endParaRPr/>
           </a:p>
         </p:txBody>
       </p:sp>
@@ -4823,6 +7386,7 @@
           <a:lstStyle/>
           <a:p>
             <a:pPr algn="ctr"/>
+            <a:endParaRPr/>
           </a:p>
         </p:txBody>
       </p:sp>
@@ -4903,6 +7467,7 @@
           <a:lstStyle/>
           <a:p>
             <a:pPr algn="ctr"/>
+            <a:endParaRPr/>
           </a:p>
         </p:txBody>
       </p:sp>
@@ -4983,6 +7548,7 @@
           <a:lstStyle/>
           <a:p>
             <a:pPr algn="ctr"/>
+            <a:endParaRPr/>
           </a:p>
         </p:txBody>
       </p:sp>
@@ -5063,6 +7629,7 @@
           <a:lstStyle/>
           <a:p>
             <a:pPr algn="ctr"/>
+            <a:endParaRPr/>
           </a:p>
         </p:txBody>
       </p:sp>
@@ -5143,6 +7710,7 @@
           <a:lstStyle/>
           <a:p>
             <a:pPr algn="ctr"/>
+            <a:endParaRPr/>
           </a:p>
         </p:txBody>
       </p:sp>
@@ -5223,6 +7791,7 @@
           <a:lstStyle/>
           <a:p>
             <a:pPr algn="ctr"/>
+            <a:endParaRPr/>
           </a:p>
         </p:txBody>
       </p:sp>
@@ -5303,6 +7872,7 @@
           <a:lstStyle/>
           <a:p>
             <a:pPr algn="ctr"/>
+            <a:endParaRPr/>
           </a:p>
         </p:txBody>
       </p:sp>
@@ -5383,6 +7953,7 @@
           <a:lstStyle/>
           <a:p>
             <a:pPr algn="ctr"/>
+            <a:endParaRPr/>
           </a:p>
         </p:txBody>
       </p:sp>
@@ -5463,6 +8034,7 @@
           <a:lstStyle/>
           <a:p>
             <a:pPr algn="ctr"/>
+            <a:endParaRPr/>
           </a:p>
         </p:txBody>
       </p:sp>
@@ -5543,6 +8115,7 @@
           <a:lstStyle/>
           <a:p>
             <a:pPr algn="ctr"/>
+            <a:endParaRPr/>
           </a:p>
         </p:txBody>
       </p:sp>
@@ -5623,6 +8196,7 @@
           <a:lstStyle/>
           <a:p>
             <a:pPr algn="ctr"/>
+            <a:endParaRPr/>
           </a:p>
         </p:txBody>
       </p:sp>
@@ -5740,7 +8314,7 @@
 </file>
 
 <file path=ppt/slides/slide12.xml><?xml version="1.0" encoding="utf-8"?>
-<p:sld xmlns:a="http://schemas.openxmlformats.org/drawingml/2006/main" xmlns:p="http://schemas.openxmlformats.org/presentationml/2006/main" xmlns:r="http://schemas.openxmlformats.org/officeDocument/2006/relationships">
+<p:sld xmlns:a="http://schemas.openxmlformats.org/drawingml/2006/main" xmlns:r="http://schemas.openxmlformats.org/officeDocument/2006/relationships" xmlns:p="http://schemas.openxmlformats.org/presentationml/2006/main">
   <p:cSld>
     <p:spTree>
       <p:nvGrpSpPr>
@@ -5748,7 +8322,14 @@
         <p:cNvGrpSpPr/>
         <p:nvPr/>
       </p:nvGrpSpPr>
-      <p:grpSpPr/>
+      <p:grpSpPr>
+        <a:xfrm>
+          <a:off x="0" y="0"/>
+          <a:ext cx="0" cy="0"/>
+          <a:chOff x="0" y="0"/>
+          <a:chExt cx="0" cy="0"/>
+        </a:xfrm>
+      </p:grpSpPr>
       <p:sp>
         <p:nvSpPr>
           <p:cNvPr id="2" name="Rectangle 1"/>
@@ -5789,6 +8370,7 @@
           <a:lstStyle/>
           <a:p>
             <a:pPr algn="ctr"/>
+            <a:endParaRPr/>
           </a:p>
         </p:txBody>
       </p:sp>
@@ -5832,6 +8414,7 @@
           <a:lstStyle/>
           <a:p>
             <a:pPr algn="ctr"/>
+            <a:endParaRPr/>
           </a:p>
         </p:txBody>
       </p:sp>
@@ -5980,6 +8563,7 @@
           <a:lstStyle/>
           <a:p>
             <a:pPr algn="ctr"/>
+            <a:endParaRPr/>
           </a:p>
         </p:txBody>
       </p:sp>
@@ -6007,62 +8591,122 @@
           <a:p>
             <a:pPr algn="l"/>
             <a:r>
-              <a:rPr sz="1100" b="0">
+              <a:rPr sz="1100" b="0" dirty="0" err="1">
                 <a:solidFill>
                   <a:srgbClr val="E6E6E6"/>
                 </a:solidFill>
                 <a:latin typeface="JetBrains Mono"/>
               </a:rPr>
-              <a:t>next_retry_at = now + min(</a:t>
-            </a:r>
-          </a:p>
-          <a:p>
-            <a:pPr algn="l"/>
-            <a:r>
-              <a:rPr sz="1100" b="0">
+              <a:t>next_retry_at</a:t>
+            </a:r>
+            <a:r>
+              <a:rPr sz="1100" b="0" dirty="0">
                 <a:solidFill>
                   <a:srgbClr val="E6E6E6"/>
                 </a:solidFill>
                 <a:latin typeface="JetBrains Mono"/>
               </a:rPr>
-              <a:t>    base_backoff_s × 2 ** attempt_count,</a:t>
-            </a:r>
-          </a:p>
-          <a:p>
-            <a:pPr algn="l"/>
-            <a:r>
-              <a:rPr sz="1100" b="0">
+              <a:t> = now + min(</a:t>
+            </a:r>
+          </a:p>
+          <a:p>
+            <a:pPr algn="l"/>
+            <a:r>
+              <a:rPr sz="1100" b="0" dirty="0">
                 <a:solidFill>
                   <a:srgbClr val="E6E6E6"/>
                 </a:solidFill>
                 <a:latin typeface="JetBrains Mono"/>
               </a:rPr>
-              <a:t>    max_backoff_s,</a:t>
-            </a:r>
-          </a:p>
-          <a:p>
-            <a:pPr algn="l"/>
-            <a:r>
-              <a:rPr sz="1100" b="0">
+              <a:t>    </a:t>
+            </a:r>
+            <a:r>
+              <a:rPr sz="1100" b="0" dirty="0" err="1">
                 <a:solidFill>
                   <a:srgbClr val="E6E6E6"/>
                 </a:solidFill>
                 <a:latin typeface="JetBrains Mono"/>
               </a:rPr>
+              <a:t>base_backoff_s</a:t>
+            </a:r>
+            <a:r>
+              <a:rPr sz="1100" b="0" dirty="0">
+                <a:solidFill>
+                  <a:srgbClr val="E6E6E6"/>
+                </a:solidFill>
+                <a:latin typeface="JetBrains Mono"/>
+              </a:rPr>
+              <a:t> × 2 ** </a:t>
+            </a:r>
+            <a:r>
+              <a:rPr sz="1100" b="0" dirty="0" err="1">
+                <a:solidFill>
+                  <a:srgbClr val="E6E6E6"/>
+                </a:solidFill>
+                <a:latin typeface="JetBrains Mono"/>
+              </a:rPr>
+              <a:t>attempt_count</a:t>
+            </a:r>
+            <a:r>
+              <a:rPr sz="1100" b="0" dirty="0">
+                <a:solidFill>
+                  <a:srgbClr val="E6E6E6"/>
+                </a:solidFill>
+                <a:latin typeface="JetBrains Mono"/>
+              </a:rPr>
+              <a:t>,</a:t>
+            </a:r>
+          </a:p>
+          <a:p>
+            <a:pPr algn="l"/>
+            <a:r>
+              <a:rPr sz="1100" b="0" dirty="0">
+                <a:solidFill>
+                  <a:srgbClr val="E6E6E6"/>
+                </a:solidFill>
+                <a:latin typeface="JetBrains Mono"/>
+              </a:rPr>
+              <a:t>    </a:t>
+            </a:r>
+            <a:r>
+              <a:rPr sz="1100" b="0" dirty="0" err="1">
+                <a:solidFill>
+                  <a:srgbClr val="E6E6E6"/>
+                </a:solidFill>
+                <a:latin typeface="JetBrains Mono"/>
+              </a:rPr>
+              <a:t>max_backoff_s</a:t>
+            </a:r>
+            <a:r>
+              <a:rPr sz="1100" b="0" dirty="0">
+                <a:solidFill>
+                  <a:srgbClr val="E6E6E6"/>
+                </a:solidFill>
+                <a:latin typeface="JetBrains Mono"/>
+              </a:rPr>
+              <a:t>,</a:t>
+            </a:r>
+          </a:p>
+          <a:p>
+            <a:pPr algn="l"/>
+            <a:r>
+              <a:rPr sz="1100" b="0" dirty="0">
+                <a:solidFill>
+                  <a:srgbClr val="E6E6E6"/>
+                </a:solidFill>
+                <a:latin typeface="JetBrains Mono"/>
+              </a:rPr>
               <a:t>)</a:t>
             </a:r>
           </a:p>
           <a:p>
             <a:pPr algn="l"/>
-            <a:r>
-              <a:rPr sz="1100" b="0">
-                <a:solidFill>
-                  <a:srgbClr val="E6E6E6"/>
-                </a:solidFill>
-                <a:latin typeface="JetBrains Mono"/>
-              </a:rPr>
-              <a:t/>
-            </a:r>
+            <a:endParaRPr sz="1100" b="0" dirty="0">
+              <a:solidFill>
+                <a:srgbClr val="E6E6E6"/>
+              </a:solidFill>
+              <a:latin typeface="JetBrains Mono"/>
+            </a:endParaRPr>
           </a:p>
         </p:txBody>
       </p:sp>
@@ -6143,6 +8787,7 @@
           <a:lstStyle/>
           <a:p>
             <a:pPr algn="ctr"/>
+            <a:endParaRPr/>
           </a:p>
         </p:txBody>
       </p:sp>
@@ -6223,6 +8868,7 @@
           <a:lstStyle/>
           <a:p>
             <a:pPr algn="ctr"/>
+            <a:endParaRPr/>
           </a:p>
         </p:txBody>
       </p:sp>
@@ -6303,6 +8949,7 @@
           <a:lstStyle/>
           <a:p>
             <a:pPr algn="ctr"/>
+            <a:endParaRPr/>
           </a:p>
         </p:txBody>
       </p:sp>
@@ -6383,6 +9030,7 @@
           <a:lstStyle/>
           <a:p>
             <a:pPr algn="ctr"/>
+            <a:endParaRPr/>
           </a:p>
         </p:txBody>
       </p:sp>
@@ -6463,6 +9111,7 @@
           <a:lstStyle/>
           <a:p>
             <a:pPr algn="ctr"/>
+            <a:endParaRPr/>
           </a:p>
         </p:txBody>
       </p:sp>
@@ -6543,6 +9192,7 @@
           <a:lstStyle/>
           <a:p>
             <a:pPr algn="ctr"/>
+            <a:endParaRPr/>
           </a:p>
         </p:txBody>
       </p:sp>
@@ -6623,6 +9273,7 @@
           <a:lstStyle/>
           <a:p>
             <a:pPr algn="ctr"/>
+            <a:endParaRPr/>
           </a:p>
         </p:txBody>
       </p:sp>
@@ -6703,6 +9354,7 @@
           <a:lstStyle/>
           <a:p>
             <a:pPr algn="ctr"/>
+            <a:endParaRPr/>
           </a:p>
         </p:txBody>
       </p:sp>
@@ -6783,6 +9435,7 @@
           <a:lstStyle/>
           <a:p>
             <a:pPr algn="ctr"/>
+            <a:endParaRPr/>
           </a:p>
         </p:txBody>
       </p:sp>
@@ -6863,6 +9516,7 @@
           <a:lstStyle/>
           <a:p>
             <a:pPr algn="ctr"/>
+            <a:endParaRPr/>
           </a:p>
         </p:txBody>
       </p:sp>
@@ -6943,6 +9597,7 @@
           <a:lstStyle/>
           <a:p>
             <a:pPr algn="ctr"/>
+            <a:endParaRPr/>
           </a:p>
         </p:txBody>
       </p:sp>
@@ -7023,6 +9678,7 @@
           <a:lstStyle/>
           <a:p>
             <a:pPr algn="ctr"/>
+            <a:endParaRPr/>
           </a:p>
         </p:txBody>
       </p:sp>
@@ -7103,6 +9759,7 @@
           <a:lstStyle/>
           <a:p>
             <a:pPr algn="ctr"/>
+            <a:endParaRPr/>
           </a:p>
         </p:txBody>
       </p:sp>
@@ -7183,6 +9840,7 @@
           <a:lstStyle/>
           <a:p>
             <a:pPr algn="ctr"/>
+            <a:endParaRPr/>
           </a:p>
         </p:txBody>
       </p:sp>
@@ -7263,6 +9921,7 @@
           <a:lstStyle/>
           <a:p>
             <a:pPr algn="ctr"/>
+            <a:endParaRPr/>
           </a:p>
         </p:txBody>
       </p:sp>
@@ -7343,6 +10002,7 @@
           <a:lstStyle/>
           <a:p>
             <a:pPr algn="ctr"/>
+            <a:endParaRPr/>
           </a:p>
         </p:txBody>
       </p:sp>
@@ -7423,6 +10083,7 @@
           <a:lstStyle/>
           <a:p>
             <a:pPr algn="ctr"/>
+            <a:endParaRPr/>
           </a:p>
         </p:txBody>
       </p:sp>
@@ -7503,6 +10164,7 @@
           <a:lstStyle/>
           <a:p>
             <a:pPr algn="ctr"/>
+            <a:endParaRPr/>
           </a:p>
         </p:txBody>
       </p:sp>
@@ -7583,6 +10245,7 @@
           <a:lstStyle/>
           <a:p>
             <a:pPr algn="ctr"/>
+            <a:endParaRPr/>
           </a:p>
         </p:txBody>
       </p:sp>
@@ -7663,6 +10326,7 @@
           <a:lstStyle/>
           <a:p>
             <a:pPr algn="ctr"/>
+            <a:endParaRPr/>
           </a:p>
         </p:txBody>
       </p:sp>
@@ -7743,6 +10407,7 @@
           <a:lstStyle/>
           <a:p>
             <a:pPr algn="ctr"/>
+            <a:endParaRPr/>
           </a:p>
         </p:txBody>
       </p:sp>
@@ -7856,6 +10521,7 @@
           <a:lstStyle/>
           <a:p>
             <a:pPr algn="ctr"/>
+            <a:endParaRPr/>
           </a:p>
         </p:txBody>
       </p:sp>
@@ -7902,7 +10568,7 @@
         </p:nvSpPr>
         <p:spPr>
           <a:xfrm>
-            <a:off x="8686800" y="2743200"/>
+            <a:off x="8458200" y="2734056"/>
             <a:ext cx="1828800" cy="640080"/>
           </a:xfrm>
           <a:prstGeom prst="roundRect">
@@ -7934,6 +10600,7 @@
           <a:lstStyle/>
           <a:p>
             <a:pPr algn="ctr"/>
+            <a:endParaRPr/>
           </a:p>
         </p:txBody>
       </p:sp>
@@ -7946,7 +10613,7 @@
         <p:spPr>
           <a:xfrm>
             <a:off x="8686800" y="2907792"/>
-            <a:ext cx="1828800" cy="640080"/>
+            <a:ext cx="1600200" cy="276999"/>
           </a:xfrm>
           <a:prstGeom prst="rect">
             <a:avLst/>
@@ -7961,7 +10628,7 @@
           <a:p>
             <a:pPr algn="ctr"/>
             <a:r>
-              <a:rPr sz="1200" b="1">
+              <a:rPr sz="1200" b="1" dirty="0">
                 <a:solidFill>
                   <a:srgbClr val="FFFFFF"/>
                 </a:solidFill>
@@ -8012,6 +10679,7 @@
           <a:lstStyle/>
           <a:p>
             <a:pPr algn="ctr"/>
+            <a:endParaRPr/>
           </a:p>
         </p:txBody>
       </p:sp>
@@ -8058,7 +10726,7 @@
         </p:nvSpPr>
         <p:spPr>
           <a:xfrm>
-            <a:off x="8686800" y="3840480"/>
+            <a:off x="8534400" y="3852303"/>
             <a:ext cx="1828800" cy="640080"/>
           </a:xfrm>
           <a:prstGeom prst="roundRect">
@@ -8090,6 +10758,7 @@
           <a:lstStyle/>
           <a:p>
             <a:pPr algn="ctr"/>
+            <a:endParaRPr/>
           </a:p>
         </p:txBody>
       </p:sp>
@@ -8101,7 +10770,7 @@
         </p:nvSpPr>
         <p:spPr>
           <a:xfrm>
-            <a:off x="8686800" y="4005072"/>
+            <a:off x="8595360" y="4003157"/>
             <a:ext cx="1828800" cy="640080"/>
           </a:xfrm>
           <a:prstGeom prst="rect">
@@ -8117,7 +10786,7 @@
           <a:p>
             <a:pPr algn="ctr"/>
             <a:r>
-              <a:rPr sz="1200" b="1">
+              <a:rPr sz="1200" b="1" dirty="0" err="1">
                 <a:solidFill>
                   <a:srgbClr val="FFFFFF"/>
                 </a:solidFill>
@@ -8125,6 +10794,12 @@
               </a:rPr>
               <a:t>dead_letter</a:t>
             </a:r>
+            <a:endParaRPr sz="1200" b="1" dirty="0">
+              <a:solidFill>
+                <a:srgbClr val="FFFFFF"/>
+              </a:solidFill>
+              <a:latin typeface="Calibri"/>
+            </a:endParaRPr>
           </a:p>
         </p:txBody>
       </p:sp>
@@ -8136,7 +10811,7 @@
         </p:nvSpPr>
         <p:spPr>
           <a:xfrm>
-            <a:off x="8275320" y="2788920"/>
+            <a:off x="8161020" y="2808909"/>
             <a:ext cx="457200" cy="548640"/>
           </a:xfrm>
           <a:prstGeom prst="rect">
@@ -8152,7 +10827,7 @@
           <a:p>
             <a:pPr algn="l"/>
             <a:r>
-              <a:rPr sz="2400" b="1">
+              <a:rPr sz="2400" b="1" dirty="0">
                 <a:solidFill>
                   <a:srgbClr val="222222"/>
                 </a:solidFill>
@@ -8171,7 +10846,7 @@
         </p:nvSpPr>
         <p:spPr>
           <a:xfrm>
-            <a:off x="10104120" y="2788920"/>
+            <a:off x="10195560" y="2788920"/>
             <a:ext cx="457200" cy="548640"/>
           </a:xfrm>
           <a:prstGeom prst="rect">
@@ -8187,7 +10862,7 @@
           <a:p>
             <a:pPr algn="l"/>
             <a:r>
-              <a:rPr sz="2400" b="1">
+              <a:rPr sz="2400" b="1" dirty="0">
                 <a:solidFill>
                   <a:srgbClr val="222222"/>
                 </a:solidFill>
@@ -8206,7 +10881,7 @@
         </p:nvSpPr>
         <p:spPr>
           <a:xfrm>
-            <a:off x="9509760" y="3337560"/>
+            <a:off x="9297109" y="3367671"/>
             <a:ext cx="457200" cy="548640"/>
           </a:xfrm>
           <a:prstGeom prst="rect">
@@ -8222,7 +10897,7 @@
           <a:p>
             <a:pPr algn="l"/>
             <a:r>
-              <a:rPr sz="2400" b="1">
+              <a:rPr sz="2400" b="1" dirty="0">
                 <a:solidFill>
                   <a:srgbClr val="222222"/>
                 </a:solidFill>
@@ -8371,7 +11046,7 @@
 </file>
 
 <file path=ppt/slides/slide13.xml><?xml version="1.0" encoding="utf-8"?>
-<p:sld xmlns:a="http://schemas.openxmlformats.org/drawingml/2006/main" xmlns:p="http://schemas.openxmlformats.org/presentationml/2006/main" xmlns:r="http://schemas.openxmlformats.org/officeDocument/2006/relationships">
+<p:sld xmlns:a="http://schemas.openxmlformats.org/drawingml/2006/main" xmlns:r="http://schemas.openxmlformats.org/officeDocument/2006/relationships" xmlns:p="http://schemas.openxmlformats.org/presentationml/2006/main">
   <p:cSld>
     <p:spTree>
       <p:nvGrpSpPr>
@@ -8379,7 +11054,14 @@
         <p:cNvGrpSpPr/>
         <p:nvPr/>
       </p:nvGrpSpPr>
-      <p:grpSpPr/>
+      <p:grpSpPr>
+        <a:xfrm>
+          <a:off x="0" y="0"/>
+          <a:ext cx="0" cy="0"/>
+          <a:chOff x="0" y="0"/>
+          <a:chExt cx="0" cy="0"/>
+        </a:xfrm>
+      </p:grpSpPr>
       <p:sp>
         <p:nvSpPr>
           <p:cNvPr id="2" name="Rectangle 1"/>
@@ -8420,6 +11102,7 @@
           <a:lstStyle/>
           <a:p>
             <a:pPr algn="ctr"/>
+            <a:endParaRPr/>
           </a:p>
         </p:txBody>
       </p:sp>
@@ -8463,6 +11146,7 @@
           <a:lstStyle/>
           <a:p>
             <a:pPr algn="ctr"/>
+            <a:endParaRPr/>
           </a:p>
         </p:txBody>
       </p:sp>
@@ -8576,6 +11260,7 @@
           <a:lstStyle/>
           <a:p>
             <a:pPr algn="ctr"/>
+            <a:endParaRPr/>
           </a:p>
         </p:txBody>
       </p:sp>
@@ -8782,6 +11467,15 @@
           </a:p>
           <a:p>
             <a:pPr algn="l"/>
+            <a:endParaRPr sz="1100" b="0">
+              <a:solidFill>
+                <a:srgbClr val="E6E6E6"/>
+              </a:solidFill>
+              <a:latin typeface="JetBrains Mono"/>
+            </a:endParaRPr>
+          </a:p>
+          <a:p>
+            <a:pPr algn="l"/>
             <a:r>
               <a:rPr sz="1100" b="0">
                 <a:solidFill>
@@ -8789,7 +11483,7 @@
                 </a:solidFill>
                 <a:latin typeface="JetBrains Mono"/>
               </a:rPr>
-              <a:t/>
+              <a:t>    hr_m = HrMessage(</a:t>
             </a:r>
           </a:p>
           <a:p>
@@ -8801,7 +11495,7 @@
                 </a:solidFill>
                 <a:latin typeface="JetBrains Mono"/>
               </a:rPr>
-              <a:t>    hr_m = HrMessage(</a:t>
+              <a:t>        message=json.dumps(dto.to_dict()),</a:t>
             </a:r>
           </a:p>
           <a:p>
@@ -8813,7 +11507,7 @@
                 </a:solidFill>
                 <a:latin typeface="JetBrains Mono"/>
               </a:rPr>
-              <a:t>        message=json.dumps(dto.to_dict()),</a:t>
+              <a:t>        datetime_created=datetime.now(),</a:t>
             </a:r>
           </a:p>
           <a:p>
@@ -8825,7 +11519,7 @@
                 </a:solidFill>
                 <a:latin typeface="JetBrains Mono"/>
               </a:rPr>
-              <a:t>        datetime_created=datetime.now(),</a:t>
+              <a:t>    )</a:t>
             </a:r>
           </a:p>
           <a:p>
@@ -8837,32 +11531,17 @@
                 </a:solidFill>
                 <a:latin typeface="JetBrains Mono"/>
               </a:rPr>
-              <a:t>    )</a:t>
-            </a:r>
-          </a:p>
-          <a:p>
-            <a:pPr algn="l"/>
-            <a:r>
-              <a:rPr sz="1100" b="0">
-                <a:solidFill>
-                  <a:srgbClr val="E6E6E6"/>
-                </a:solidFill>
-                <a:latin typeface="JetBrains Mono"/>
-              </a:rPr>
               <a:t>    await self._msg_queue.put(hr_m)</a:t>
             </a:r>
           </a:p>
           <a:p>
             <a:pPr algn="l"/>
-            <a:r>
-              <a:rPr sz="1100" b="0">
-                <a:solidFill>
-                  <a:srgbClr val="E6E6E6"/>
-                </a:solidFill>
-                <a:latin typeface="JetBrains Mono"/>
-              </a:rPr>
-              <a:t/>
-            </a:r>
+            <a:endParaRPr sz="1100" b="0">
+              <a:solidFill>
+                <a:srgbClr val="E6E6E6"/>
+              </a:solidFill>
+              <a:latin typeface="JetBrains Mono"/>
+            </a:endParaRPr>
           </a:p>
         </p:txBody>
       </p:sp>
@@ -8943,6 +11622,7 @@
           <a:lstStyle/>
           <a:p>
             <a:pPr algn="ctr"/>
+            <a:endParaRPr/>
           </a:p>
         </p:txBody>
       </p:sp>
@@ -9023,6 +11703,7 @@
           <a:lstStyle/>
           <a:p>
             <a:pPr algn="ctr"/>
+            <a:endParaRPr/>
           </a:p>
         </p:txBody>
       </p:sp>
@@ -9103,6 +11784,7 @@
           <a:lstStyle/>
           <a:p>
             <a:pPr algn="ctr"/>
+            <a:endParaRPr/>
           </a:p>
         </p:txBody>
       </p:sp>
@@ -9183,6 +11865,7 @@
           <a:lstStyle/>
           <a:p>
             <a:pPr algn="ctr"/>
+            <a:endParaRPr/>
           </a:p>
         </p:txBody>
       </p:sp>
@@ -9263,6 +11946,7 @@
           <a:lstStyle/>
           <a:p>
             <a:pPr algn="ctr"/>
+            <a:endParaRPr/>
           </a:p>
         </p:txBody>
       </p:sp>
@@ -9343,6 +12027,7 @@
           <a:lstStyle/>
           <a:p>
             <a:pPr algn="ctr"/>
+            <a:endParaRPr/>
           </a:p>
         </p:txBody>
       </p:sp>
@@ -9423,6 +12108,7 @@
           <a:lstStyle/>
           <a:p>
             <a:pPr algn="ctr"/>
+            <a:endParaRPr/>
           </a:p>
         </p:txBody>
       </p:sp>
@@ -9503,6 +12189,7 @@
           <a:lstStyle/>
           <a:p>
             <a:pPr algn="ctr"/>
+            <a:endParaRPr/>
           </a:p>
         </p:txBody>
       </p:sp>
@@ -9583,6 +12270,7 @@
           <a:lstStyle/>
           <a:p>
             <a:pPr algn="ctr"/>
+            <a:endParaRPr/>
           </a:p>
         </p:txBody>
       </p:sp>
@@ -9663,6 +12351,7 @@
           <a:lstStyle/>
           <a:p>
             <a:pPr algn="ctr"/>
+            <a:endParaRPr/>
           </a:p>
         </p:txBody>
       </p:sp>
@@ -9743,6 +12432,7 @@
           <a:lstStyle/>
           <a:p>
             <a:pPr algn="ctr"/>
+            <a:endParaRPr/>
           </a:p>
         </p:txBody>
       </p:sp>
@@ -9823,6 +12513,7 @@
           <a:lstStyle/>
           <a:p>
             <a:pPr algn="ctr"/>
+            <a:endParaRPr/>
           </a:p>
         </p:txBody>
       </p:sp>
@@ -9903,6 +12594,7 @@
           <a:lstStyle/>
           <a:p>
             <a:pPr algn="ctr"/>
+            <a:endParaRPr/>
           </a:p>
         </p:txBody>
       </p:sp>
@@ -9983,6 +12675,7 @@
           <a:lstStyle/>
           <a:p>
             <a:pPr algn="ctr"/>
+            <a:endParaRPr/>
           </a:p>
         </p:txBody>
       </p:sp>
@@ -10170,7 +12863,7 @@
 </file>
 
 <file path=ppt/slides/slide14.xml><?xml version="1.0" encoding="utf-8"?>
-<p:sld xmlns:a="http://schemas.openxmlformats.org/drawingml/2006/main" xmlns:p="http://schemas.openxmlformats.org/presentationml/2006/main" xmlns:r="http://schemas.openxmlformats.org/officeDocument/2006/relationships">
+<p:sld xmlns:a="http://schemas.openxmlformats.org/drawingml/2006/main" xmlns:r="http://schemas.openxmlformats.org/officeDocument/2006/relationships" xmlns:p="http://schemas.openxmlformats.org/presentationml/2006/main">
   <p:cSld>
     <p:spTree>
       <p:nvGrpSpPr>
@@ -10178,7 +12871,14 @@
         <p:cNvGrpSpPr/>
         <p:nvPr/>
       </p:nvGrpSpPr>
-      <p:grpSpPr/>
+      <p:grpSpPr>
+        <a:xfrm>
+          <a:off x="0" y="0"/>
+          <a:ext cx="0" cy="0"/>
+          <a:chOff x="0" y="0"/>
+          <a:chExt cx="0" cy="0"/>
+        </a:xfrm>
+      </p:grpSpPr>
       <p:sp>
         <p:nvSpPr>
           <p:cNvPr id="2" name="Rectangle 1"/>
@@ -10219,6 +12919,7 @@
           <a:lstStyle/>
           <a:p>
             <a:pPr algn="ctr"/>
+            <a:endParaRPr/>
           </a:p>
         </p:txBody>
       </p:sp>
@@ -10262,6 +12963,7 @@
           <a:lstStyle/>
           <a:p>
             <a:pPr algn="ctr"/>
+            <a:endParaRPr/>
           </a:p>
         </p:txBody>
       </p:sp>
@@ -10482,6 +13184,7 @@
           <a:lstStyle/>
           <a:p>
             <a:pPr algn="ctr"/>
+            <a:endParaRPr/>
           </a:p>
         </p:txBody>
       </p:sp>
@@ -10628,15 +13331,12 @@
           </a:p>
           <a:p>
             <a:pPr algn="l"/>
-            <a:r>
-              <a:rPr sz="1100" b="0">
-                <a:solidFill>
-                  <a:srgbClr val="E6E6E6"/>
-                </a:solidFill>
-                <a:latin typeface="JetBrains Mono"/>
-              </a:rPr>
-              <a:t/>
-            </a:r>
+            <a:endParaRPr sz="1100" b="0">
+              <a:solidFill>
+                <a:srgbClr val="E6E6E6"/>
+              </a:solidFill>
+              <a:latin typeface="JetBrains Mono"/>
+            </a:endParaRPr>
           </a:p>
         </p:txBody>
       </p:sp>
@@ -10719,7 +13419,7 @@
 </file>
 
 <file path=ppt/slides/slide15.xml><?xml version="1.0" encoding="utf-8"?>
-<p:sld xmlns:a="http://schemas.openxmlformats.org/drawingml/2006/main" xmlns:p="http://schemas.openxmlformats.org/presentationml/2006/main" xmlns:r="http://schemas.openxmlformats.org/officeDocument/2006/relationships">
+<p:sld xmlns:a="http://schemas.openxmlformats.org/drawingml/2006/main" xmlns:r="http://schemas.openxmlformats.org/officeDocument/2006/relationships" xmlns:p="http://schemas.openxmlformats.org/presentationml/2006/main">
   <p:cSld>
     <p:spTree>
       <p:nvGrpSpPr>
@@ -10727,7 +13427,14 @@
         <p:cNvGrpSpPr/>
         <p:nvPr/>
       </p:nvGrpSpPr>
-      <p:grpSpPr/>
+      <p:grpSpPr>
+        <a:xfrm>
+          <a:off x="0" y="0"/>
+          <a:ext cx="0" cy="0"/>
+          <a:chOff x="0" y="0"/>
+          <a:chExt cx="0" cy="0"/>
+        </a:xfrm>
+      </p:grpSpPr>
       <p:sp>
         <p:nvSpPr>
           <p:cNvPr id="2" name="Rectangle 1"/>
@@ -10768,6 +13475,7 @@
           <a:lstStyle/>
           <a:p>
             <a:pPr algn="ctr"/>
+            <a:endParaRPr/>
           </a:p>
         </p:txBody>
       </p:sp>
@@ -10811,6 +13519,7 @@
           <a:lstStyle/>
           <a:p>
             <a:pPr algn="ctr"/>
+            <a:endParaRPr/>
           </a:p>
         </p:txBody>
       </p:sp>
@@ -10926,6 +13635,7 @@
           <a:lstStyle/>
           <a:p>
             <a:pPr algn="ctr"/>
+            <a:endParaRPr/>
           </a:p>
         </p:txBody>
       </p:sp>
@@ -10969,6 +13679,7 @@
           <a:lstStyle/>
           <a:p>
             <a:pPr algn="ctr"/>
+            <a:endParaRPr/>
           </a:p>
         </p:txBody>
       </p:sp>
@@ -11120,6 +13831,7 @@
           <a:lstStyle/>
           <a:p>
             <a:pPr algn="ctr"/>
+            <a:endParaRPr/>
           </a:p>
         </p:txBody>
       </p:sp>
@@ -11163,6 +13875,7 @@
           <a:lstStyle/>
           <a:p>
             <a:pPr algn="ctr"/>
+            <a:endParaRPr/>
           </a:p>
         </p:txBody>
       </p:sp>
@@ -11314,6 +14027,7 @@
           <a:lstStyle/>
           <a:p>
             <a:pPr algn="ctr"/>
+            <a:endParaRPr/>
           </a:p>
         </p:txBody>
       </p:sp>
@@ -11357,6 +14071,7 @@
           <a:lstStyle/>
           <a:p>
             <a:pPr algn="ctr"/>
+            <a:endParaRPr/>
           </a:p>
         </p:txBody>
       </p:sp>
@@ -11557,7 +14272,7 @@
 </file>
 
 <file path=ppt/slides/slide16.xml><?xml version="1.0" encoding="utf-8"?>
-<p:sld xmlns:a="http://schemas.openxmlformats.org/drawingml/2006/main" xmlns:p="http://schemas.openxmlformats.org/presentationml/2006/main" xmlns:r="http://schemas.openxmlformats.org/officeDocument/2006/relationships">
+<p:sld xmlns:a="http://schemas.openxmlformats.org/drawingml/2006/main" xmlns:r="http://schemas.openxmlformats.org/officeDocument/2006/relationships" xmlns:p="http://schemas.openxmlformats.org/presentationml/2006/main">
   <p:cSld>
     <p:spTree>
       <p:nvGrpSpPr>
@@ -11565,7 +14280,14 @@
         <p:cNvGrpSpPr/>
         <p:nvPr/>
       </p:nvGrpSpPr>
-      <p:grpSpPr/>
+      <p:grpSpPr>
+        <a:xfrm>
+          <a:off x="0" y="0"/>
+          <a:ext cx="0" cy="0"/>
+          <a:chOff x="0" y="0"/>
+          <a:chExt cx="0" cy="0"/>
+        </a:xfrm>
+      </p:grpSpPr>
       <p:sp>
         <p:nvSpPr>
           <p:cNvPr id="2" name="Rectangle 1"/>
@@ -11606,6 +14328,7 @@
           <a:lstStyle/>
           <a:p>
             <a:pPr algn="ctr"/>
+            <a:endParaRPr/>
           </a:p>
         </p:txBody>
       </p:sp>
@@ -11649,6 +14372,7 @@
           <a:lstStyle/>
           <a:p>
             <a:pPr algn="ctr"/>
+            <a:endParaRPr/>
           </a:p>
         </p:txBody>
       </p:sp>
@@ -12038,7 +14762,7 @@
 </file>
 
 <file path=ppt/slides/slide17.xml><?xml version="1.0" encoding="utf-8"?>
-<p:sld xmlns:a="http://schemas.openxmlformats.org/drawingml/2006/main" xmlns:p="http://schemas.openxmlformats.org/presentationml/2006/main" xmlns:r="http://schemas.openxmlformats.org/officeDocument/2006/relationships">
+<p:sld xmlns:a="http://schemas.openxmlformats.org/drawingml/2006/main" xmlns:r="http://schemas.openxmlformats.org/officeDocument/2006/relationships" xmlns:p="http://schemas.openxmlformats.org/presentationml/2006/main">
   <p:cSld>
     <p:spTree>
       <p:nvGrpSpPr>
@@ -12046,7 +14770,14 @@
         <p:cNvGrpSpPr/>
         <p:nvPr/>
       </p:nvGrpSpPr>
-      <p:grpSpPr/>
+      <p:grpSpPr>
+        <a:xfrm>
+          <a:off x="0" y="0"/>
+          <a:ext cx="0" cy="0"/>
+          <a:chOff x="0" y="0"/>
+          <a:chExt cx="0" cy="0"/>
+        </a:xfrm>
+      </p:grpSpPr>
       <p:sp>
         <p:nvSpPr>
           <p:cNvPr id="2" name="Rectangle 1"/>
@@ -12087,6 +14818,7 @@
           <a:lstStyle/>
           <a:p>
             <a:pPr algn="ctr"/>
+            <a:endParaRPr/>
           </a:p>
         </p:txBody>
       </p:sp>
@@ -12130,6 +14862,7 @@
           <a:lstStyle/>
           <a:p>
             <a:pPr algn="ctr"/>
+            <a:endParaRPr/>
           </a:p>
         </p:txBody>
       </p:sp>
@@ -12243,6 +14976,7 @@
           <a:lstStyle/>
           <a:p>
             <a:pPr algn="ctr"/>
+            <a:endParaRPr/>
           </a:p>
         </p:txBody>
       </p:sp>
@@ -12305,6 +15039,15 @@
           </a:p>
           <a:p>
             <a:pPr algn="l"/>
+            <a:endParaRPr sz="1100" b="0">
+              <a:solidFill>
+                <a:srgbClr val="E6E6E6"/>
+              </a:solidFill>
+              <a:latin typeface="JetBrains Mono"/>
+            </a:endParaRPr>
+          </a:p>
+          <a:p>
+            <a:pPr algn="l"/>
             <a:r>
               <a:rPr sz="1100" b="0">
                 <a:solidFill>
@@ -12312,7 +15055,7 @@
                 </a:solidFill>
                 <a:latin typeface="JetBrains Mono"/>
               </a:rPr>
-              <a:t/>
+              <a:t>    @classmethod</a:t>
             </a:r>
           </a:p>
           <a:p>
@@ -12324,6 +15067,18 @@
                 </a:solidFill>
                 <a:latin typeface="JetBrains Mono"/>
               </a:rPr>
+              <a:t>    def get_language(cls) -&gt; str: ...</a:t>
+            </a:r>
+          </a:p>
+          <a:p>
+            <a:pPr algn="l"/>
+            <a:r>
+              <a:rPr sz="1100" b="0">
+                <a:solidFill>
+                  <a:srgbClr val="E6E6E6"/>
+                </a:solidFill>
+                <a:latin typeface="JetBrains Mono"/>
+              </a:rPr>
               <a:t>    @classmethod</a:t>
             </a:r>
           </a:p>
@@ -12336,8 +15091,26 @@
                 </a:solidFill>
                 <a:latin typeface="JetBrains Mono"/>
               </a:rPr>
-              <a:t>    def get_language(cls) -&gt; str: ...</a:t>
-            </a:r>
+              <a:t>    def set_language(cls, lang: str) -&gt; None: ...</a:t>
+            </a:r>
+          </a:p>
+          <a:p>
+            <a:pPr algn="l"/>
+            <a:endParaRPr sz="1100" b="0">
+              <a:solidFill>
+                <a:srgbClr val="E6E6E6"/>
+              </a:solidFill>
+              <a:latin typeface="JetBrains Mono"/>
+            </a:endParaRPr>
+          </a:p>
+          <a:p>
+            <a:pPr algn="l"/>
+            <a:endParaRPr sz="1100" b="0">
+              <a:solidFill>
+                <a:srgbClr val="E6E6E6"/>
+              </a:solidFill>
+              <a:latin typeface="JetBrains Mono"/>
+            </a:endParaRPr>
           </a:p>
           <a:p>
             <a:pPr algn="l"/>
@@ -12348,7 +15121,7 @@
                 </a:solidFill>
                 <a:latin typeface="JetBrains Mono"/>
               </a:rPr>
-              <a:t>    @classmethod</a:t>
+              <a:t># warriorfit/i18n/translator.py</a:t>
             </a:r>
           </a:p>
           <a:p>
@@ -12360,7 +15133,7 @@
                 </a:solidFill>
                 <a:latin typeface="JetBrains Mono"/>
               </a:rPr>
-              <a:t>    def set_language(cls, lang: str) -&gt; None: ...</a:t>
+              <a:t>def t(key: str, **kwargs) -&gt; str:</a:t>
             </a:r>
           </a:p>
           <a:p>
@@ -12372,7 +15145,7 @@
                 </a:solidFill>
                 <a:latin typeface="JetBrains Mono"/>
               </a:rPr>
-              <a:t/>
+              <a:t>    catalog = _catalog_for(LanguageStore.get_language())</a:t>
             </a:r>
           </a:p>
           <a:p>
@@ -12384,68 +15157,17 @@
                 </a:solidFill>
                 <a:latin typeface="JetBrains Mono"/>
               </a:rPr>
-              <a:t/>
-            </a:r>
-          </a:p>
-          <a:p>
-            <a:pPr algn="l"/>
-            <a:r>
-              <a:rPr sz="1100" b="0">
-                <a:solidFill>
-                  <a:srgbClr val="E6E6E6"/>
-                </a:solidFill>
-                <a:latin typeface="JetBrains Mono"/>
-              </a:rPr>
-              <a:t># warriorfit/i18n/translator.py</a:t>
-            </a:r>
-          </a:p>
-          <a:p>
-            <a:pPr algn="l"/>
-            <a:r>
-              <a:rPr sz="1100" b="0">
-                <a:solidFill>
-                  <a:srgbClr val="E6E6E6"/>
-                </a:solidFill>
-                <a:latin typeface="JetBrains Mono"/>
-              </a:rPr>
-              <a:t>def t(key: str, **kwargs) -&gt; str:</a:t>
-            </a:r>
-          </a:p>
-          <a:p>
-            <a:pPr algn="l"/>
-            <a:r>
-              <a:rPr sz="1100" b="0">
-                <a:solidFill>
-                  <a:srgbClr val="E6E6E6"/>
-                </a:solidFill>
-                <a:latin typeface="JetBrains Mono"/>
-              </a:rPr>
-              <a:t>    catalog = _catalog_for(LanguageStore.get_language())</a:t>
-            </a:r>
-          </a:p>
-          <a:p>
-            <a:pPr algn="l"/>
-            <a:r>
-              <a:rPr sz="1100" b="0">
-                <a:solidFill>
-                  <a:srgbClr val="E6E6E6"/>
-                </a:solidFill>
-                <a:latin typeface="JetBrains Mono"/>
-              </a:rPr>
               <a:t>    return catalog.get(key, key).format(**kwargs)</a:t>
             </a:r>
           </a:p>
           <a:p>
             <a:pPr algn="l"/>
-            <a:r>
-              <a:rPr sz="1100" b="0">
-                <a:solidFill>
-                  <a:srgbClr val="E6E6E6"/>
-                </a:solidFill>
-                <a:latin typeface="JetBrains Mono"/>
-              </a:rPr>
-              <a:t/>
-            </a:r>
+            <a:endParaRPr sz="1100" b="0">
+              <a:solidFill>
+                <a:srgbClr val="E6E6E6"/>
+              </a:solidFill>
+              <a:latin typeface="JetBrains Mono"/>
+            </a:endParaRPr>
           </a:p>
         </p:txBody>
       </p:sp>
@@ -12623,7 +15345,7 @@
 </file>
 
 <file path=ppt/slides/slide18.xml><?xml version="1.0" encoding="utf-8"?>
-<p:sld xmlns:a="http://schemas.openxmlformats.org/drawingml/2006/main" xmlns:p="http://schemas.openxmlformats.org/presentationml/2006/main" xmlns:r="http://schemas.openxmlformats.org/officeDocument/2006/relationships">
+<p:sld xmlns:a="http://schemas.openxmlformats.org/drawingml/2006/main" xmlns:r="http://schemas.openxmlformats.org/officeDocument/2006/relationships" xmlns:p="http://schemas.openxmlformats.org/presentationml/2006/main">
   <p:cSld>
     <p:spTree>
       <p:nvGrpSpPr>
@@ -12631,7 +15353,14 @@
         <p:cNvGrpSpPr/>
         <p:nvPr/>
       </p:nvGrpSpPr>
-      <p:grpSpPr/>
+      <p:grpSpPr>
+        <a:xfrm>
+          <a:off x="0" y="0"/>
+          <a:ext cx="0" cy="0"/>
+          <a:chOff x="0" y="0"/>
+          <a:chExt cx="0" cy="0"/>
+        </a:xfrm>
+      </p:grpSpPr>
       <p:sp>
         <p:nvSpPr>
           <p:cNvPr id="2" name="Rectangle 1"/>
@@ -12672,6 +15401,7 @@
           <a:lstStyle/>
           <a:p>
             <a:pPr algn="ctr"/>
+            <a:endParaRPr/>
           </a:p>
         </p:txBody>
       </p:sp>
@@ -12715,6 +15445,7 @@
           <a:lstStyle/>
           <a:p>
             <a:pPr algn="ctr"/>
+            <a:endParaRPr/>
           </a:p>
         </p:txBody>
       </p:sp>
@@ -13242,7 +15973,7 @@
 </file>
 
 <file path=ppt/slides/slide19.xml><?xml version="1.0" encoding="utf-8"?>
-<p:sld xmlns:a="http://schemas.openxmlformats.org/drawingml/2006/main" xmlns:p="http://schemas.openxmlformats.org/presentationml/2006/main" xmlns:r="http://schemas.openxmlformats.org/officeDocument/2006/relationships">
+<p:sld xmlns:a="http://schemas.openxmlformats.org/drawingml/2006/main" xmlns:r="http://schemas.openxmlformats.org/officeDocument/2006/relationships" xmlns:p="http://schemas.openxmlformats.org/presentationml/2006/main">
   <p:cSld>
     <p:spTree>
       <p:nvGrpSpPr>
@@ -13250,7 +15981,14 @@
         <p:cNvGrpSpPr/>
         <p:nvPr/>
       </p:nvGrpSpPr>
-      <p:grpSpPr/>
+      <p:grpSpPr>
+        <a:xfrm>
+          <a:off x="0" y="0"/>
+          <a:ext cx="0" cy="0"/>
+          <a:chOff x="0" y="0"/>
+          <a:chExt cx="0" cy="0"/>
+        </a:xfrm>
+      </p:grpSpPr>
       <p:sp>
         <p:nvSpPr>
           <p:cNvPr id="2" name="Rectangle 1"/>
@@ -13291,6 +16029,7 @@
           <a:lstStyle/>
           <a:p>
             <a:pPr algn="ctr"/>
+            <a:endParaRPr/>
           </a:p>
         </p:txBody>
       </p:sp>
@@ -13334,6 +16073,7 @@
           <a:lstStyle/>
           <a:p>
             <a:pPr algn="ctr"/>
+            <a:endParaRPr/>
           </a:p>
         </p:txBody>
       </p:sp>
@@ -13569,7 +16309,7 @@
 </file>
 
 <file path=ppt/slides/slide2.xml><?xml version="1.0" encoding="utf-8"?>
-<p:sld xmlns:a="http://schemas.openxmlformats.org/drawingml/2006/main" xmlns:p="http://schemas.openxmlformats.org/presentationml/2006/main" xmlns:r="http://schemas.openxmlformats.org/officeDocument/2006/relationships">
+<p:sld xmlns:a="http://schemas.openxmlformats.org/drawingml/2006/main" xmlns:r="http://schemas.openxmlformats.org/officeDocument/2006/relationships" xmlns:p="http://schemas.openxmlformats.org/presentationml/2006/main">
   <p:cSld>
     <p:spTree>
       <p:nvGrpSpPr>
@@ -13577,7 +16317,14 @@
         <p:cNvGrpSpPr/>
         <p:nvPr/>
       </p:nvGrpSpPr>
-      <p:grpSpPr/>
+      <p:grpSpPr>
+        <a:xfrm>
+          <a:off x="0" y="0"/>
+          <a:ext cx="0" cy="0"/>
+          <a:chOff x="0" y="0"/>
+          <a:chExt cx="0" cy="0"/>
+        </a:xfrm>
+      </p:grpSpPr>
       <p:sp>
         <p:nvSpPr>
           <p:cNvPr id="2" name="Rectangle 1"/>
@@ -13618,6 +16365,7 @@
           <a:lstStyle/>
           <a:p>
             <a:pPr algn="ctr"/>
+            <a:endParaRPr/>
           </a:p>
         </p:txBody>
       </p:sp>
@@ -13661,6 +16409,7 @@
           <a:lstStyle/>
           <a:p>
             <a:pPr algn="ctr"/>
+            <a:endParaRPr/>
           </a:p>
         </p:txBody>
       </p:sp>
@@ -13774,6 +16523,7 @@
           <a:lstStyle/>
           <a:p>
             <a:pPr algn="ctr"/>
+            <a:endParaRPr/>
           </a:p>
         </p:txBody>
       </p:sp>
@@ -13922,6 +16672,7 @@
           <a:lstStyle/>
           <a:p>
             <a:pPr algn="ctr"/>
+            <a:endParaRPr/>
           </a:p>
         </p:txBody>
       </p:sp>
@@ -14070,6 +16821,7 @@
           <a:lstStyle/>
           <a:p>
             <a:pPr algn="ctr"/>
+            <a:endParaRPr/>
           </a:p>
         </p:txBody>
       </p:sp>
@@ -14218,6 +16970,7 @@
           <a:lstStyle/>
           <a:p>
             <a:pPr algn="ctr"/>
+            <a:endParaRPr/>
           </a:p>
         </p:txBody>
       </p:sp>
@@ -14366,6 +17119,7 @@
           <a:lstStyle/>
           <a:p>
             <a:pPr algn="ctr"/>
+            <a:endParaRPr/>
           </a:p>
         </p:txBody>
       </p:sp>
@@ -14514,6 +17268,7 @@
           <a:lstStyle/>
           <a:p>
             <a:pPr algn="ctr"/>
+            <a:endParaRPr/>
           </a:p>
         </p:txBody>
       </p:sp>
@@ -14662,6 +17417,7 @@
           <a:lstStyle/>
           <a:p>
             <a:pPr algn="ctr"/>
+            <a:endParaRPr/>
           </a:p>
         </p:txBody>
       </p:sp>
@@ -14810,6 +17566,7 @@
           <a:lstStyle/>
           <a:p>
             <a:pPr algn="ctr"/>
+            <a:endParaRPr/>
           </a:p>
         </p:txBody>
       </p:sp>
@@ -15032,7 +17789,7 @@
 </file>
 
 <file path=ppt/slides/slide20.xml><?xml version="1.0" encoding="utf-8"?>
-<p:sld xmlns:a="http://schemas.openxmlformats.org/drawingml/2006/main" xmlns:p="http://schemas.openxmlformats.org/presentationml/2006/main" xmlns:r="http://schemas.openxmlformats.org/officeDocument/2006/relationships">
+<p:sld xmlns:a="http://schemas.openxmlformats.org/drawingml/2006/main" xmlns:r="http://schemas.openxmlformats.org/officeDocument/2006/relationships" xmlns:p="http://schemas.openxmlformats.org/presentationml/2006/main">
   <p:cSld>
     <p:spTree>
       <p:nvGrpSpPr>
@@ -15040,7 +17797,14 @@
         <p:cNvGrpSpPr/>
         <p:nvPr/>
       </p:nvGrpSpPr>
-      <p:grpSpPr/>
+      <p:grpSpPr>
+        <a:xfrm>
+          <a:off x="0" y="0"/>
+          <a:ext cx="0" cy="0"/>
+          <a:chOff x="0" y="0"/>
+          <a:chExt cx="0" cy="0"/>
+        </a:xfrm>
+      </p:grpSpPr>
       <p:sp>
         <p:nvSpPr>
           <p:cNvPr id="2" name="Rectangle 1"/>
@@ -15081,6 +17845,7 @@
           <a:lstStyle/>
           <a:p>
             <a:pPr algn="ctr"/>
+            <a:endParaRPr/>
           </a:p>
         </p:txBody>
       </p:sp>
@@ -15196,6 +17961,7 @@
           <a:lstStyle/>
           <a:p>
             <a:pPr algn="ctr"/>
+            <a:endParaRPr/>
           </a:p>
         </p:txBody>
       </p:sp>
@@ -15347,6 +18113,7 @@
           <a:lstStyle/>
           <a:p>
             <a:pPr algn="ctr"/>
+            <a:endParaRPr/>
           </a:p>
         </p:txBody>
       </p:sp>
@@ -15498,6 +18265,7 @@
           <a:lstStyle/>
           <a:p>
             <a:pPr algn="ctr"/>
+            <a:endParaRPr/>
           </a:p>
         </p:txBody>
       </p:sp>
@@ -15651,7 +18419,7 @@
 </file>
 
 <file path=ppt/slides/slide3.xml><?xml version="1.0" encoding="utf-8"?>
-<p:sld xmlns:a="http://schemas.openxmlformats.org/drawingml/2006/main" xmlns:p="http://schemas.openxmlformats.org/presentationml/2006/main" xmlns:r="http://schemas.openxmlformats.org/officeDocument/2006/relationships">
+<p:sld xmlns:a="http://schemas.openxmlformats.org/drawingml/2006/main" xmlns:r="http://schemas.openxmlformats.org/officeDocument/2006/relationships" xmlns:p="http://schemas.openxmlformats.org/presentationml/2006/main">
   <p:cSld>
     <p:spTree>
       <p:nvGrpSpPr>
@@ -15659,7 +18427,14 @@
         <p:cNvGrpSpPr/>
         <p:nvPr/>
       </p:nvGrpSpPr>
-      <p:grpSpPr/>
+      <p:grpSpPr>
+        <a:xfrm>
+          <a:off x="0" y="0"/>
+          <a:ext cx="0" cy="0"/>
+          <a:chOff x="0" y="0"/>
+          <a:chExt cx="0" cy="0"/>
+        </a:xfrm>
+      </p:grpSpPr>
       <p:sp>
         <p:nvSpPr>
           <p:cNvPr id="2" name="Rectangle 1"/>
@@ -15700,6 +18475,7 @@
           <a:lstStyle/>
           <a:p>
             <a:pPr algn="ctr"/>
+            <a:endParaRPr/>
           </a:p>
         </p:txBody>
       </p:sp>
@@ -15743,6 +18519,7 @@
           <a:lstStyle/>
           <a:p>
             <a:pPr algn="ctr"/>
+            <a:endParaRPr/>
           </a:p>
         </p:txBody>
       </p:sp>
@@ -15789,7 +18566,7 @@
         </p:nvSpPr>
         <p:spPr>
           <a:xfrm>
-            <a:off x="548640" y="868680"/>
+            <a:off x="533754" y="914400"/>
             <a:ext cx="10972800" cy="777240"/>
           </a:xfrm>
           <a:prstGeom prst="rect">
@@ -15805,14 +18582,56 @@
           <a:p>
             <a:pPr algn="l"/>
             <a:r>
-              <a:rPr sz="3200" b="1">
+              <a:rPr sz="3200" b="1" dirty="0" err="1">
                 <a:solidFill>
                   <a:srgbClr val="222222"/>
                 </a:solidFill>
                 <a:latin typeface="Calibri"/>
               </a:rPr>
-              <a:t>Gelaagde, unidirectionele afhankelijkheidsstroom</a:t>
-            </a:r>
+              <a:t>Gelaagde</a:t>
+            </a:r>
+            <a:r>
+              <a:rPr sz="3200" b="1" dirty="0">
+                <a:solidFill>
+                  <a:srgbClr val="222222"/>
+                </a:solidFill>
+                <a:latin typeface="Calibri"/>
+              </a:rPr>
+              <a:t>, </a:t>
+            </a:r>
+            <a:r>
+              <a:rPr sz="3200" b="1" dirty="0" err="1">
+                <a:solidFill>
+                  <a:srgbClr val="222222"/>
+                </a:solidFill>
+                <a:latin typeface="Calibri"/>
+              </a:rPr>
+              <a:t>unidirectionele</a:t>
+            </a:r>
+            <a:r>
+              <a:rPr sz="3200" b="1" dirty="0">
+                <a:solidFill>
+                  <a:srgbClr val="222222"/>
+                </a:solidFill>
+                <a:latin typeface="Calibri"/>
+              </a:rPr>
+              <a:t> </a:t>
+            </a:r>
+            <a:r>
+              <a:rPr sz="3200" b="1" dirty="0" err="1">
+                <a:solidFill>
+                  <a:srgbClr val="222222"/>
+                </a:solidFill>
+                <a:latin typeface="Calibri"/>
+              </a:rPr>
+              <a:t>afhankelijkheidsstroom</a:t>
+            </a:r>
+            <a:endParaRPr sz="3200" b="1" dirty="0">
+              <a:solidFill>
+                <a:srgbClr val="222222"/>
+              </a:solidFill>
+              <a:latin typeface="Calibri"/>
+            </a:endParaRPr>
           </a:p>
         </p:txBody>
       </p:sp>
@@ -15856,6 +18675,7 @@
           <a:lstStyle/>
           <a:p>
             <a:pPr algn="ctr"/>
+            <a:endParaRPr/>
           </a:p>
         </p:txBody>
       </p:sp>
@@ -15969,6 +18789,7 @@
           <a:lstStyle/>
           <a:p>
             <a:pPr algn="ctr"/>
+            <a:endParaRPr/>
           </a:p>
         </p:txBody>
       </p:sp>
@@ -16082,6 +18903,7 @@
           <a:lstStyle/>
           <a:p>
             <a:pPr algn="ctr"/>
+            <a:endParaRPr/>
           </a:p>
         </p:txBody>
       </p:sp>
@@ -16195,6 +19017,7 @@
           <a:lstStyle/>
           <a:p>
             <a:pPr algn="ctr"/>
+            <a:endParaRPr/>
           </a:p>
         </p:txBody>
       </p:sp>
@@ -16308,6 +19131,7 @@
           <a:lstStyle/>
           <a:p>
             <a:pPr algn="ctr"/>
+            <a:endParaRPr/>
           </a:p>
         </p:txBody>
       </p:sp>
@@ -16425,7 +19249,7 @@
           <p:nvPr/>
         </p:nvPicPr>
         <p:blipFill>
-          <a:blip r:embed="rId2"/>
+          <a:blip r:embed="rId3"/>
           <a:stretch>
             <a:fillRect/>
           </a:stretch>
@@ -16519,7 +19343,7 @@
 </file>
 
 <file path=ppt/slides/slide4.xml><?xml version="1.0" encoding="utf-8"?>
-<p:sld xmlns:a="http://schemas.openxmlformats.org/drawingml/2006/main" xmlns:p="http://schemas.openxmlformats.org/presentationml/2006/main" xmlns:r="http://schemas.openxmlformats.org/officeDocument/2006/relationships">
+<p:sld xmlns:a="http://schemas.openxmlformats.org/drawingml/2006/main" xmlns:r="http://schemas.openxmlformats.org/officeDocument/2006/relationships" xmlns:p="http://schemas.openxmlformats.org/presentationml/2006/main">
   <p:cSld>
     <p:spTree>
       <p:nvGrpSpPr>
@@ -16527,7 +19351,14 @@
         <p:cNvGrpSpPr/>
         <p:nvPr/>
       </p:nvGrpSpPr>
-      <p:grpSpPr/>
+      <p:grpSpPr>
+        <a:xfrm>
+          <a:off x="0" y="0"/>
+          <a:ext cx="0" cy="0"/>
+          <a:chOff x="0" y="0"/>
+          <a:chExt cx="0" cy="0"/>
+        </a:xfrm>
+      </p:grpSpPr>
       <p:sp>
         <p:nvSpPr>
           <p:cNvPr id="2" name="Rectangle 1"/>
@@ -16568,6 +19399,7 @@
           <a:lstStyle/>
           <a:p>
             <a:pPr algn="ctr"/>
+            <a:endParaRPr/>
           </a:p>
         </p:txBody>
       </p:sp>
@@ -16611,6 +19443,7 @@
           <a:lstStyle/>
           <a:p>
             <a:pPr algn="ctr"/>
+            <a:endParaRPr/>
           </a:p>
         </p:txBody>
       </p:sp>
@@ -16724,6 +19557,7 @@
           <a:lstStyle/>
           <a:p>
             <a:pPr algn="ctr"/>
+            <a:endParaRPr/>
           </a:p>
         </p:txBody>
       </p:sp>
@@ -17026,15 +19860,12 @@
           </a:p>
           <a:p>
             <a:pPr algn="l"/>
-            <a:r>
-              <a:rPr sz="1100" b="0">
-                <a:solidFill>
-                  <a:srgbClr val="E6E6E6"/>
-                </a:solidFill>
-                <a:latin typeface="JetBrains Mono"/>
-              </a:rPr>
-              <a:t/>
-            </a:r>
+            <a:endParaRPr sz="1100" b="0">
+              <a:solidFill>
+                <a:srgbClr val="E6E6E6"/>
+              </a:solidFill>
+              <a:latin typeface="JetBrains Mono"/>
+            </a:endParaRPr>
           </a:p>
         </p:txBody>
       </p:sp>
@@ -17117,7 +19948,7 @@
 </file>
 
 <file path=ppt/slides/slide5.xml><?xml version="1.0" encoding="utf-8"?>
-<p:sld xmlns:a="http://schemas.openxmlformats.org/drawingml/2006/main" xmlns:p="http://schemas.openxmlformats.org/presentationml/2006/main" xmlns:r="http://schemas.openxmlformats.org/officeDocument/2006/relationships">
+<p:sld xmlns:a="http://schemas.openxmlformats.org/drawingml/2006/main" xmlns:r="http://schemas.openxmlformats.org/officeDocument/2006/relationships" xmlns:p="http://schemas.openxmlformats.org/presentationml/2006/main">
   <p:cSld>
     <p:spTree>
       <p:nvGrpSpPr>
@@ -17125,7 +19956,14 @@
         <p:cNvGrpSpPr/>
         <p:nvPr/>
       </p:nvGrpSpPr>
-      <p:grpSpPr/>
+      <p:grpSpPr>
+        <a:xfrm>
+          <a:off x="0" y="0"/>
+          <a:ext cx="0" cy="0"/>
+          <a:chOff x="0" y="0"/>
+          <a:chExt cx="0" cy="0"/>
+        </a:xfrm>
+      </p:grpSpPr>
       <p:sp>
         <p:nvSpPr>
           <p:cNvPr id="2" name="Rectangle 1"/>
@@ -17166,6 +20004,7 @@
           <a:lstStyle/>
           <a:p>
             <a:pPr algn="ctr"/>
+            <a:endParaRPr/>
           </a:p>
         </p:txBody>
       </p:sp>
@@ -17209,6 +20048,7 @@
           <a:lstStyle/>
           <a:p>
             <a:pPr algn="ctr"/>
+            <a:endParaRPr/>
           </a:p>
         </p:txBody>
       </p:sp>
@@ -17357,6 +20197,7 @@
           <a:lstStyle/>
           <a:p>
             <a:pPr algn="ctr"/>
+            <a:endParaRPr/>
           </a:p>
         </p:txBody>
       </p:sp>
@@ -17395,6 +20236,15 @@
           </a:p>
           <a:p>
             <a:pPr algn="l"/>
+            <a:endParaRPr sz="1100" b="0">
+              <a:solidFill>
+                <a:srgbClr val="E6E6E6"/>
+              </a:solidFill>
+              <a:latin typeface="JetBrains Mono"/>
+            </a:endParaRPr>
+          </a:p>
+          <a:p>
+            <a:pPr algn="l"/>
             <a:r>
               <a:rPr sz="1100" b="0">
                 <a:solidFill>
@@ -17402,7 +20252,7 @@
                 </a:solidFill>
                 <a:latin typeface="JetBrains Mono"/>
               </a:rPr>
-              <a:t/>
+              <a:t>def _get_page():</a:t>
             </a:r>
           </a:p>
           <a:p>
@@ -17414,7 +20264,7 @@
                 </a:solidFill>
                 <a:latin typeface="JetBrains Mono"/>
               </a:rPr>
-              <a:t>def _get_page():</a:t>
+              <a:t>    global _page</a:t>
             </a:r>
           </a:p>
           <a:p>
@@ -17426,7 +20276,7 @@
                 </a:solidFill>
                 <a:latin typeface="JetBrains Mono"/>
               </a:rPr>
-              <a:t>    global _page</a:t>
+              <a:t>    if _page is None:</a:t>
             </a:r>
           </a:p>
           <a:p>
@@ -17438,7 +20288,7 @@
                 </a:solidFill>
                 <a:latin typeface="JetBrains Mono"/>
               </a:rPr>
-              <a:t>    if _page is None:</a:t>
+              <a:t>        _page = MfftEvalPage()   # @inject pakt controllers uit Container</a:t>
             </a:r>
           </a:p>
           <a:p>
@@ -17450,8 +20300,17 @@
                 </a:solidFill>
                 <a:latin typeface="JetBrains Mono"/>
               </a:rPr>
-              <a:t>        _page = MfftEvalPage()   # @inject pakt controllers uit Container</a:t>
-            </a:r>
+              <a:t>    return _page</a:t>
+            </a:r>
+          </a:p>
+          <a:p>
+            <a:pPr algn="l"/>
+            <a:endParaRPr sz="1100" b="0">
+              <a:solidFill>
+                <a:srgbClr val="E6E6E6"/>
+              </a:solidFill>
+              <a:latin typeface="JetBrains Mono"/>
+            </a:endParaRPr>
           </a:p>
           <a:p>
             <a:pPr algn="l"/>
@@ -17462,7 +20321,7 @@
                 </a:solidFill>
                 <a:latin typeface="JetBrains Mono"/>
               </a:rPr>
-              <a:t>    return _page</a:t>
+              <a:t>def get_ui():</a:t>
             </a:r>
           </a:p>
           <a:p>
@@ -17474,8 +20333,17 @@
                 </a:solidFill>
                 <a:latin typeface="JetBrains Mono"/>
               </a:rPr>
-              <a:t/>
-            </a:r>
+              <a:t>    return _get_page().get_ui()</a:t>
+            </a:r>
+          </a:p>
+          <a:p>
+            <a:pPr algn="l"/>
+            <a:endParaRPr sz="1100" b="0">
+              <a:solidFill>
+                <a:srgbClr val="E6E6E6"/>
+              </a:solidFill>
+              <a:latin typeface="JetBrains Mono"/>
+            </a:endParaRPr>
           </a:p>
           <a:p>
             <a:pPr algn="l"/>
@@ -17486,7 +20354,7 @@
                 </a:solidFill>
                 <a:latin typeface="JetBrains Mono"/>
               </a:rPr>
-              <a:t>def get_ui():</a:t>
+              <a:t>def server(input, output, session):</a:t>
             </a:r>
           </a:p>
           <a:p>
@@ -17498,56 +20366,17 @@
                 </a:solidFill>
                 <a:latin typeface="JetBrains Mono"/>
               </a:rPr>
-              <a:t>    return _get_page().get_ui()</a:t>
-            </a:r>
-          </a:p>
-          <a:p>
-            <a:pPr algn="l"/>
-            <a:r>
-              <a:rPr sz="1100" b="0">
-                <a:solidFill>
-                  <a:srgbClr val="E6E6E6"/>
-                </a:solidFill>
-                <a:latin typeface="JetBrains Mono"/>
-              </a:rPr>
-              <a:t/>
-            </a:r>
-          </a:p>
-          <a:p>
-            <a:pPr algn="l"/>
-            <a:r>
-              <a:rPr sz="1100" b="0">
-                <a:solidFill>
-                  <a:srgbClr val="E6E6E6"/>
-                </a:solidFill>
-                <a:latin typeface="JetBrains Mono"/>
-              </a:rPr>
-              <a:t>def server(input, output, session):</a:t>
-            </a:r>
-          </a:p>
-          <a:p>
-            <a:pPr algn="l"/>
-            <a:r>
-              <a:rPr sz="1100" b="0">
-                <a:solidFill>
-                  <a:srgbClr val="E6E6E6"/>
-                </a:solidFill>
-                <a:latin typeface="JetBrains Mono"/>
-              </a:rPr>
               <a:t>    return _get_page().server(input, output, session)</a:t>
             </a:r>
           </a:p>
           <a:p>
             <a:pPr algn="l"/>
-            <a:r>
-              <a:rPr sz="1100" b="0">
-                <a:solidFill>
-                  <a:srgbClr val="E6E6E6"/>
-                </a:solidFill>
-                <a:latin typeface="JetBrains Mono"/>
-              </a:rPr>
-              <a:t/>
-            </a:r>
+            <a:endParaRPr sz="1100" b="0">
+              <a:solidFill>
+                <a:srgbClr val="E6E6E6"/>
+              </a:solidFill>
+              <a:latin typeface="JetBrains Mono"/>
+            </a:endParaRPr>
           </a:p>
         </p:txBody>
       </p:sp>
@@ -17713,7 +20542,7 @@
 </file>
 
 <file path=ppt/slides/slide6.xml><?xml version="1.0" encoding="utf-8"?>
-<p:sld xmlns:a="http://schemas.openxmlformats.org/drawingml/2006/main" xmlns:p="http://schemas.openxmlformats.org/presentationml/2006/main" xmlns:r="http://schemas.openxmlformats.org/officeDocument/2006/relationships">
+<p:sld xmlns:a="http://schemas.openxmlformats.org/drawingml/2006/main" xmlns:r="http://schemas.openxmlformats.org/officeDocument/2006/relationships" xmlns:p="http://schemas.openxmlformats.org/presentationml/2006/main">
   <p:cSld>
     <p:spTree>
       <p:nvGrpSpPr>
@@ -17721,7 +20550,14 @@
         <p:cNvGrpSpPr/>
         <p:nvPr/>
       </p:nvGrpSpPr>
-      <p:grpSpPr/>
+      <p:grpSpPr>
+        <a:xfrm>
+          <a:off x="0" y="0"/>
+          <a:ext cx="0" cy="0"/>
+          <a:chOff x="0" y="0"/>
+          <a:chExt cx="0" cy="0"/>
+        </a:xfrm>
+      </p:grpSpPr>
       <p:sp>
         <p:nvSpPr>
           <p:cNvPr id="2" name="Rectangle 1"/>
@@ -17762,6 +20598,7 @@
           <a:lstStyle/>
           <a:p>
             <a:pPr algn="ctr"/>
+            <a:endParaRPr/>
           </a:p>
         </p:txBody>
       </p:sp>
@@ -17805,6 +20642,7 @@
           <a:lstStyle/>
           <a:p>
             <a:pPr algn="ctr"/>
+            <a:endParaRPr/>
           </a:p>
         </p:txBody>
       </p:sp>
@@ -17918,6 +20756,7 @@
           <a:lstStyle/>
           <a:p>
             <a:pPr algn="ctr"/>
+            <a:endParaRPr/>
           </a:p>
         </p:txBody>
       </p:sp>
@@ -17968,6 +20807,15 @@
           </a:p>
           <a:p>
             <a:pPr algn="l"/>
+            <a:endParaRPr sz="1100" b="0">
+              <a:solidFill>
+                <a:srgbClr val="E6E6E6"/>
+              </a:solidFill>
+              <a:latin typeface="JetBrains Mono"/>
+            </a:endParaRPr>
+          </a:p>
+          <a:p>
+            <a:pPr algn="l"/>
             <a:r>
               <a:rPr sz="1100" b="0">
                 <a:solidFill>
@@ -17975,7 +20823,7 @@
                 </a:solidFill>
                 <a:latin typeface="JetBrains Mono"/>
               </a:rPr>
-              <a:t/>
+              <a:t>    # Repositories</a:t>
             </a:r>
           </a:p>
           <a:p>
@@ -17987,7 +20835,7 @@
                 </a:solidFill>
                 <a:latin typeface="JetBrains Mono"/>
               </a:rPr>
-              <a:t>    # Repositories</a:t>
+              <a:t>    user_repository = providers.Singleton(UserRepository, config=config)</a:t>
             </a:r>
           </a:p>
           <a:p>
@@ -17999,7 +20847,7 @@
                 </a:solidFill>
                 <a:latin typeface="JetBrains Mono"/>
               </a:rPr>
-              <a:t>    user_repository = providers.Singleton(UserRepository, config=config)</a:t>
+              <a:t>    fitness_test_repository = providers.Singleton(</a:t>
             </a:r>
           </a:p>
           <a:p>
@@ -18011,7 +20859,7 @@
                 </a:solidFill>
                 <a:latin typeface="JetBrains Mono"/>
               </a:rPr>
-              <a:t>    fitness_test_repository = providers.Singleton(</a:t>
+              <a:t>        FitnessTestRepository, config=config</a:t>
             </a:r>
           </a:p>
           <a:p>
@@ -18023,8 +20871,17 @@
                 </a:solidFill>
                 <a:latin typeface="JetBrains Mono"/>
               </a:rPr>
-              <a:t>        FitnessTestRepository, config=config</a:t>
-            </a:r>
+              <a:t>    )</a:t>
+            </a:r>
+          </a:p>
+          <a:p>
+            <a:pPr algn="l"/>
+            <a:endParaRPr sz="1100" b="0">
+              <a:solidFill>
+                <a:srgbClr val="E6E6E6"/>
+              </a:solidFill>
+              <a:latin typeface="JetBrains Mono"/>
+            </a:endParaRPr>
           </a:p>
           <a:p>
             <a:pPr algn="l"/>
@@ -18035,11 +20892,92 @@
                 </a:solidFill>
                 <a:latin typeface="JetBrains Mono"/>
               </a:rPr>
+              <a:t>    # Services</a:t>
+            </a:r>
+          </a:p>
+          <a:p>
+            <a:pPr algn="l"/>
+            <a:r>
+              <a:rPr sz="1100" b="0">
+                <a:solidFill>
+                  <a:srgbClr val="E6E6E6"/>
+                </a:solidFill>
+                <a:latin typeface="JetBrains Mono"/>
+              </a:rPr>
+              <a:t>    test_service = providers.Singleton(</a:t>
+            </a:r>
+          </a:p>
+          <a:p>
+            <a:pPr algn="l"/>
+            <a:r>
+              <a:rPr sz="1100" b="0">
+                <a:solidFill>
+                  <a:srgbClr val="E6E6E6"/>
+                </a:solidFill>
+                <a:latin typeface="JetBrains Mono"/>
+              </a:rPr>
+              <a:t>        ServiceTest,</a:t>
+            </a:r>
+          </a:p>
+          <a:p>
+            <a:pPr algn="l"/>
+            <a:r>
+              <a:rPr sz="1100" b="0">
+                <a:solidFill>
+                  <a:srgbClr val="E6E6E6"/>
+                </a:solidFill>
+                <a:latin typeface="JetBrains Mono"/>
+              </a:rPr>
+              <a:t>        fitness_test_repository=fitness_test_repository,</a:t>
+            </a:r>
+          </a:p>
+          <a:p>
+            <a:pPr algn="l"/>
+            <a:r>
+              <a:rPr sz="1100" b="0">
+                <a:solidFill>
+                  <a:srgbClr val="E6E6E6"/>
+                </a:solidFill>
+                <a:latin typeface="JetBrains Mono"/>
+              </a:rPr>
+              <a:t>        user_repository=user_repository,</a:t>
+            </a:r>
+          </a:p>
+          <a:p>
+            <a:pPr algn="l"/>
+            <a:r>
+              <a:rPr sz="1100" b="0">
+                <a:solidFill>
+                  <a:srgbClr val="E6E6E6"/>
+                </a:solidFill>
+                <a:latin typeface="JetBrains Mono"/>
+              </a:rPr>
+              <a:t>        notify_mail=notify_mail,</a:t>
+            </a:r>
+          </a:p>
+          <a:p>
+            <a:pPr algn="l"/>
+            <a:r>
+              <a:rPr sz="1100" b="0">
+                <a:solidFill>
+                  <a:srgbClr val="E6E6E6"/>
+                </a:solidFill>
+                <a:latin typeface="JetBrains Mono"/>
+              </a:rPr>
               <a:t>    )</a:t>
             </a:r>
           </a:p>
           <a:p>
             <a:pPr algn="l"/>
+            <a:endParaRPr sz="1100" b="0">
+              <a:solidFill>
+                <a:srgbClr val="E6E6E6"/>
+              </a:solidFill>
+              <a:latin typeface="JetBrains Mono"/>
+            </a:endParaRPr>
+          </a:p>
+          <a:p>
+            <a:pPr algn="l"/>
             <a:r>
               <a:rPr sz="1100" b="0">
                 <a:solidFill>
@@ -18047,7 +20985,7 @@
                 </a:solidFill>
                 <a:latin typeface="JetBrains Mono"/>
               </a:rPr>
-              <a:t/>
+              <a:t>    # Controllers</a:t>
             </a:r>
           </a:p>
           <a:p>
@@ -18059,7 +20997,7 @@
                 </a:solidFill>
                 <a:latin typeface="JetBrains Mono"/>
               </a:rPr>
-              <a:t>    # Services</a:t>
+              <a:t>    mfft_eval_controller = providers.Singleton(</a:t>
             </a:r>
           </a:p>
           <a:p>
@@ -18071,7 +21009,7 @@
                 </a:solidFill>
                 <a:latin typeface="JetBrains Mono"/>
               </a:rPr>
-              <a:t>    test_service = providers.Singleton(</a:t>
+              <a:t>        MfftEvalController,</a:t>
             </a:r>
           </a:p>
           <a:p>
@@ -18083,7 +21021,7 @@
                 </a:solidFill>
                 <a:latin typeface="JetBrains Mono"/>
               </a:rPr>
-              <a:t>        ServiceTest,</a:t>
+              <a:t>        service=test_service,</a:t>
             </a:r>
           </a:p>
           <a:p>
@@ -18095,7 +21033,7 @@
                 </a:solidFill>
                 <a:latin typeface="JetBrains Mono"/>
               </a:rPr>
-              <a:t>        fitness_test_repository=fitness_test_repository,</a:t>
+              <a:t>        mil_service=military_service,</a:t>
             </a:r>
           </a:p>
           <a:p>
@@ -18107,128 +21045,17 @@
                 </a:solidFill>
                 <a:latin typeface="JetBrains Mono"/>
               </a:rPr>
-              <a:t>        user_repository=user_repository,</a:t>
-            </a:r>
-          </a:p>
-          <a:p>
-            <a:pPr algn="l"/>
-            <a:r>
-              <a:rPr sz="1100" b="0">
-                <a:solidFill>
-                  <a:srgbClr val="E6E6E6"/>
-                </a:solidFill>
-                <a:latin typeface="JetBrains Mono"/>
-              </a:rPr>
-              <a:t>        notify_mail=notify_mail,</a:t>
-            </a:r>
-          </a:p>
-          <a:p>
-            <a:pPr algn="l"/>
-            <a:r>
-              <a:rPr sz="1100" b="0">
-                <a:solidFill>
-                  <a:srgbClr val="E6E6E6"/>
-                </a:solidFill>
-                <a:latin typeface="JetBrains Mono"/>
-              </a:rPr>
               <a:t>    )</a:t>
             </a:r>
           </a:p>
           <a:p>
             <a:pPr algn="l"/>
-            <a:r>
-              <a:rPr sz="1100" b="0">
-                <a:solidFill>
-                  <a:srgbClr val="E6E6E6"/>
-                </a:solidFill>
-                <a:latin typeface="JetBrains Mono"/>
-              </a:rPr>
-              <a:t/>
-            </a:r>
-          </a:p>
-          <a:p>
-            <a:pPr algn="l"/>
-            <a:r>
-              <a:rPr sz="1100" b="0">
-                <a:solidFill>
-                  <a:srgbClr val="E6E6E6"/>
-                </a:solidFill>
-                <a:latin typeface="JetBrains Mono"/>
-              </a:rPr>
-              <a:t>    # Controllers</a:t>
-            </a:r>
-          </a:p>
-          <a:p>
-            <a:pPr algn="l"/>
-            <a:r>
-              <a:rPr sz="1100" b="0">
-                <a:solidFill>
-                  <a:srgbClr val="E6E6E6"/>
-                </a:solidFill>
-                <a:latin typeface="JetBrains Mono"/>
-              </a:rPr>
-              <a:t>    mfft_eval_controller = providers.Singleton(</a:t>
-            </a:r>
-          </a:p>
-          <a:p>
-            <a:pPr algn="l"/>
-            <a:r>
-              <a:rPr sz="1100" b="0">
-                <a:solidFill>
-                  <a:srgbClr val="E6E6E6"/>
-                </a:solidFill>
-                <a:latin typeface="JetBrains Mono"/>
-              </a:rPr>
-              <a:t>        MfftEvalController,</a:t>
-            </a:r>
-          </a:p>
-          <a:p>
-            <a:pPr algn="l"/>
-            <a:r>
-              <a:rPr sz="1100" b="0">
-                <a:solidFill>
-                  <a:srgbClr val="E6E6E6"/>
-                </a:solidFill>
-                <a:latin typeface="JetBrains Mono"/>
-              </a:rPr>
-              <a:t>        service=test_service,</a:t>
-            </a:r>
-          </a:p>
-          <a:p>
-            <a:pPr algn="l"/>
-            <a:r>
-              <a:rPr sz="1100" b="0">
-                <a:solidFill>
-                  <a:srgbClr val="E6E6E6"/>
-                </a:solidFill>
-                <a:latin typeface="JetBrains Mono"/>
-              </a:rPr>
-              <a:t>        mil_service=military_service,</a:t>
-            </a:r>
-          </a:p>
-          <a:p>
-            <a:pPr algn="l"/>
-            <a:r>
-              <a:rPr sz="1100" b="0">
-                <a:solidFill>
-                  <a:srgbClr val="E6E6E6"/>
-                </a:solidFill>
-                <a:latin typeface="JetBrains Mono"/>
-              </a:rPr>
-              <a:t>    )</a:t>
-            </a:r>
-          </a:p>
-          <a:p>
-            <a:pPr algn="l"/>
-            <a:r>
-              <a:rPr sz="1100" b="0">
-                <a:solidFill>
-                  <a:srgbClr val="E6E6E6"/>
-                </a:solidFill>
-                <a:latin typeface="JetBrains Mono"/>
-              </a:rPr>
-              <a:t/>
-            </a:r>
+            <a:endParaRPr sz="1100" b="0">
+              <a:solidFill>
+                <a:srgbClr val="E6E6E6"/>
+              </a:solidFill>
+              <a:latin typeface="JetBrains Mono"/>
+            </a:endParaRPr>
           </a:p>
         </p:txBody>
       </p:sp>
@@ -18394,7 +21221,7 @@
 </file>
 
 <file path=ppt/slides/slide7.xml><?xml version="1.0" encoding="utf-8"?>
-<p:sld xmlns:a="http://schemas.openxmlformats.org/drawingml/2006/main" xmlns:p="http://schemas.openxmlformats.org/presentationml/2006/main" xmlns:r="http://schemas.openxmlformats.org/officeDocument/2006/relationships">
+<p:sld xmlns:a="http://schemas.openxmlformats.org/drawingml/2006/main" xmlns:r="http://schemas.openxmlformats.org/officeDocument/2006/relationships" xmlns:p="http://schemas.openxmlformats.org/presentationml/2006/main">
   <p:cSld>
     <p:spTree>
       <p:nvGrpSpPr>
@@ -18402,7 +21229,14 @@
         <p:cNvGrpSpPr/>
         <p:nvPr/>
       </p:nvGrpSpPr>
-      <p:grpSpPr/>
+      <p:grpSpPr>
+        <a:xfrm>
+          <a:off x="0" y="0"/>
+          <a:ext cx="0" cy="0"/>
+          <a:chOff x="0" y="0"/>
+          <a:chExt cx="0" cy="0"/>
+        </a:xfrm>
+      </p:grpSpPr>
       <p:sp>
         <p:nvSpPr>
           <p:cNvPr id="2" name="Rectangle 1"/>
@@ -18443,6 +21277,7 @@
           <a:lstStyle/>
           <a:p>
             <a:pPr algn="ctr"/>
+            <a:endParaRPr/>
           </a:p>
         </p:txBody>
       </p:sp>
@@ -18486,6 +21321,7 @@
           <a:lstStyle/>
           <a:p>
             <a:pPr algn="ctr"/>
+            <a:endParaRPr/>
           </a:p>
         </p:txBody>
       </p:sp>
@@ -18599,6 +21435,7 @@
           <a:lstStyle/>
           <a:p>
             <a:pPr algn="ctr"/>
+            <a:endParaRPr/>
           </a:p>
         </p:txBody>
       </p:sp>
@@ -18805,15 +21642,12 @@
           </a:p>
           <a:p>
             <a:pPr algn="l"/>
-            <a:r>
-              <a:rPr sz="1100" b="0">
-                <a:solidFill>
-                  <a:srgbClr val="E6E6E6"/>
-                </a:solidFill>
-                <a:latin typeface="JetBrains Mono"/>
-              </a:rPr>
-              <a:t/>
-            </a:r>
+            <a:endParaRPr sz="1100" b="0">
+              <a:solidFill>
+                <a:srgbClr val="E6E6E6"/>
+              </a:solidFill>
+              <a:latin typeface="JetBrains Mono"/>
+            </a:endParaRPr>
           </a:p>
         </p:txBody>
       </p:sp>
@@ -18896,7 +21730,7 @@
 </file>
 
 <file path=ppt/slides/slide8.xml><?xml version="1.0" encoding="utf-8"?>
-<p:sld xmlns:a="http://schemas.openxmlformats.org/drawingml/2006/main" xmlns:p="http://schemas.openxmlformats.org/presentationml/2006/main" xmlns:r="http://schemas.openxmlformats.org/officeDocument/2006/relationships">
+<p:sld xmlns:a="http://schemas.openxmlformats.org/drawingml/2006/main" xmlns:r="http://schemas.openxmlformats.org/officeDocument/2006/relationships" xmlns:p="http://schemas.openxmlformats.org/presentationml/2006/main">
   <p:cSld>
     <p:spTree>
       <p:nvGrpSpPr>
@@ -18904,7 +21738,14 @@
         <p:cNvGrpSpPr/>
         <p:nvPr/>
       </p:nvGrpSpPr>
-      <p:grpSpPr/>
+      <p:grpSpPr>
+        <a:xfrm>
+          <a:off x="0" y="0"/>
+          <a:ext cx="0" cy="0"/>
+          <a:chOff x="0" y="0"/>
+          <a:chExt cx="0" cy="0"/>
+        </a:xfrm>
+      </p:grpSpPr>
       <p:sp>
         <p:nvSpPr>
           <p:cNvPr id="2" name="Rectangle 1"/>
@@ -18945,6 +21786,7 @@
           <a:lstStyle/>
           <a:p>
             <a:pPr algn="ctr"/>
+            <a:endParaRPr/>
           </a:p>
         </p:txBody>
       </p:sp>
@@ -18988,6 +21830,7 @@
           <a:lstStyle/>
           <a:p>
             <a:pPr algn="ctr"/>
+            <a:endParaRPr/>
           </a:p>
         </p:txBody>
       </p:sp>
@@ -19259,7 +22102,7 @@
 </file>
 
 <file path=ppt/slides/slide9.xml><?xml version="1.0" encoding="utf-8"?>
-<p:sld xmlns:a="http://schemas.openxmlformats.org/drawingml/2006/main" xmlns:p="http://schemas.openxmlformats.org/presentationml/2006/main" xmlns:r="http://schemas.openxmlformats.org/officeDocument/2006/relationships">
+<p:sld xmlns:a="http://schemas.openxmlformats.org/drawingml/2006/main" xmlns:r="http://schemas.openxmlformats.org/officeDocument/2006/relationships" xmlns:p="http://schemas.openxmlformats.org/presentationml/2006/main">
   <p:cSld>
     <p:spTree>
       <p:nvGrpSpPr>
@@ -19267,7 +22110,14 @@
         <p:cNvGrpSpPr/>
         <p:nvPr/>
       </p:nvGrpSpPr>
-      <p:grpSpPr/>
+      <p:grpSpPr>
+        <a:xfrm>
+          <a:off x="0" y="0"/>
+          <a:ext cx="0" cy="0"/>
+          <a:chOff x="0" y="0"/>
+          <a:chExt cx="0" cy="0"/>
+        </a:xfrm>
+      </p:grpSpPr>
       <p:sp>
         <p:nvSpPr>
           <p:cNvPr id="2" name="Rectangle 1"/>
@@ -19308,6 +22158,7 @@
           <a:lstStyle/>
           <a:p>
             <a:pPr algn="ctr"/>
+            <a:endParaRPr/>
           </a:p>
         </p:txBody>
       </p:sp>
@@ -19351,6 +22202,7 @@
           <a:lstStyle/>
           <a:p>
             <a:pPr algn="ctr"/>
+            <a:endParaRPr/>
           </a:p>
         </p:txBody>
       </p:sp>
@@ -19466,6 +22318,7 @@
           <a:lstStyle/>
           <a:p>
             <a:pPr algn="ctr"/>
+            <a:endParaRPr/>
           </a:p>
         </p:txBody>
       </p:sp>
@@ -19546,6 +22399,7 @@
           <a:lstStyle/>
           <a:p>
             <a:pPr algn="ctr"/>
+            <a:endParaRPr/>
           </a:p>
         </p:txBody>
       </p:sp>
@@ -19626,6 +22480,7 @@
           <a:lstStyle/>
           <a:p>
             <a:pPr algn="ctr"/>
+            <a:endParaRPr/>
           </a:p>
         </p:txBody>
       </p:sp>
@@ -19706,6 +22561,7 @@
           <a:lstStyle/>
           <a:p>
             <a:pPr algn="ctr"/>
+            <a:endParaRPr/>
           </a:p>
         </p:txBody>
       </p:sp>
@@ -19786,6 +22642,7 @@
           <a:lstStyle/>
           <a:p>
             <a:pPr algn="ctr"/>
+            <a:endParaRPr/>
           </a:p>
         </p:txBody>
       </p:sp>
@@ -19866,6 +22723,7 @@
           <a:lstStyle/>
           <a:p>
             <a:pPr algn="ctr"/>
+            <a:endParaRPr/>
           </a:p>
         </p:txBody>
       </p:sp>
@@ -19946,6 +22804,7 @@
           <a:lstStyle/>
           <a:p>
             <a:pPr algn="ctr"/>
+            <a:endParaRPr/>
           </a:p>
         </p:txBody>
       </p:sp>
@@ -20026,6 +22885,7 @@
           <a:lstStyle/>
           <a:p>
             <a:pPr algn="ctr"/>
+            <a:endParaRPr/>
           </a:p>
         </p:txBody>
       </p:sp>
@@ -20106,6 +22966,7 @@
           <a:lstStyle/>
           <a:p>
             <a:pPr algn="ctr"/>
+            <a:endParaRPr/>
           </a:p>
         </p:txBody>
       </p:sp>
@@ -20186,6 +23047,7 @@
           <a:lstStyle/>
           <a:p>
             <a:pPr algn="ctr"/>
+            <a:endParaRPr/>
           </a:p>
         </p:txBody>
       </p:sp>
@@ -20266,6 +23128,7 @@
           <a:lstStyle/>
           <a:p>
             <a:pPr algn="ctr"/>
+            <a:endParaRPr/>
           </a:p>
         </p:txBody>
       </p:sp>
@@ -20346,6 +23209,7 @@
           <a:lstStyle/>
           <a:p>
             <a:pPr algn="ctr"/>
+            <a:endParaRPr/>
           </a:p>
         </p:txBody>
       </p:sp>
@@ -20426,6 +23290,7 @@
           <a:lstStyle/>
           <a:p>
             <a:pPr algn="ctr"/>
+            <a:endParaRPr/>
           </a:p>
         </p:txBody>
       </p:sp>
@@ -20506,6 +23371,7 @@
           <a:lstStyle/>
           <a:p>
             <a:pPr algn="ctr"/>
+            <a:endParaRPr/>
           </a:p>
         </p:txBody>
       </p:sp>
@@ -20586,6 +23452,7 @@
           <a:lstStyle/>
           <a:p>
             <a:pPr algn="ctr"/>
+            <a:endParaRPr/>
           </a:p>
         </p:txBody>
       </p:sp>
@@ -20666,6 +23533,7 @@
           <a:lstStyle/>
           <a:p>
             <a:pPr algn="ctr"/>
+            <a:endParaRPr/>
           </a:p>
         </p:txBody>
       </p:sp>
@@ -20746,6 +23614,7 @@
           <a:lstStyle/>
           <a:p>
             <a:pPr algn="ctr"/>
+            <a:endParaRPr/>
           </a:p>
         </p:txBody>
       </p:sp>
@@ -20826,6 +23695,7 @@
           <a:lstStyle/>
           <a:p>
             <a:pPr algn="ctr"/>
+            <a:endParaRPr/>
           </a:p>
         </p:txBody>
       </p:sp>
@@ -20906,6 +23776,7 @@
           <a:lstStyle/>
           <a:p>
             <a:pPr algn="ctr"/>
+            <a:endParaRPr/>
           </a:p>
         </p:txBody>
       </p:sp>
@@ -20986,6 +23857,7 @@
           <a:lstStyle/>
           <a:p>
             <a:pPr algn="ctr"/>
+            <a:endParaRPr/>
           </a:p>
         </p:txBody>
       </p:sp>
@@ -21066,6 +23938,7 @@
           <a:lstStyle/>
           <a:p>
             <a:pPr algn="ctr"/>
+            <a:endParaRPr/>
           </a:p>
         </p:txBody>
       </p:sp>
@@ -21146,6 +24019,7 @@
           <a:lstStyle/>
           <a:p>
             <a:pPr algn="ctr"/>
+            <a:endParaRPr/>
           </a:p>
         </p:txBody>
       </p:sp>
@@ -21226,6 +24100,7 @@
           <a:lstStyle/>
           <a:p>
             <a:pPr algn="ctr"/>
+            <a:endParaRPr/>
           </a:p>
         </p:txBody>
       </p:sp>
@@ -21306,6 +24181,7 @@
           <a:lstStyle/>
           <a:p>
             <a:pPr algn="ctr"/>
+            <a:endParaRPr/>
           </a:p>
         </p:txBody>
       </p:sp>
@@ -21386,6 +24262,7 @@
           <a:lstStyle/>
           <a:p>
             <a:pPr algn="ctr"/>
+            <a:endParaRPr/>
           </a:p>
         </p:txBody>
       </p:sp>
@@ -21466,6 +24343,7 @@
           <a:lstStyle/>
           <a:p>
             <a:pPr algn="ctr"/>
+            <a:endParaRPr/>
           </a:p>
         </p:txBody>
       </p:sp>
@@ -21546,6 +24424,7 @@
           <a:lstStyle/>
           <a:p>
             <a:pPr algn="ctr"/>
+            <a:endParaRPr/>
           </a:p>
         </p:txBody>
       </p:sp>
@@ -21626,6 +24505,7 @@
           <a:lstStyle/>
           <a:p>
             <a:pPr algn="ctr"/>
+            <a:endParaRPr/>
           </a:p>
         </p:txBody>
       </p:sp>
@@ -21706,6 +24586,7 @@
           <a:lstStyle/>
           <a:p>
             <a:pPr algn="ctr"/>
+            <a:endParaRPr/>
           </a:p>
         </p:txBody>
       </p:sp>
@@ -21786,6 +24667,7 @@
           <a:lstStyle/>
           <a:p>
             <a:pPr algn="ctr"/>
+            <a:endParaRPr/>
           </a:p>
         </p:txBody>
       </p:sp>
@@ -21866,6 +24748,7 @@
           <a:lstStyle/>
           <a:p>
             <a:pPr algn="ctr"/>
+            <a:endParaRPr/>
           </a:p>
         </p:txBody>
       </p:sp>
@@ -21946,6 +24829,7 @@
           <a:lstStyle/>
           <a:p>
             <a:pPr algn="ctr"/>
+            <a:endParaRPr/>
           </a:p>
         </p:txBody>
       </p:sp>
@@ -22026,6 +24910,7 @@
           <a:lstStyle/>
           <a:p>
             <a:pPr algn="ctr"/>
+            <a:endParaRPr/>
           </a:p>
         </p:txBody>
       </p:sp>
@@ -22106,6 +24991,7 @@
           <a:lstStyle/>
           <a:p>
             <a:pPr algn="ctr"/>
+            <a:endParaRPr/>
           </a:p>
         </p:txBody>
       </p:sp>
@@ -22186,6 +25072,7 @@
           <a:lstStyle/>
           <a:p>
             <a:pPr algn="ctr"/>
+            <a:endParaRPr/>
           </a:p>
         </p:txBody>
       </p:sp>
@@ -22266,6 +25153,7 @@
           <a:lstStyle/>
           <a:p>
             <a:pPr algn="ctr"/>
+            <a:endParaRPr/>
           </a:p>
         </p:txBody>
       </p:sp>
@@ -22346,6 +25234,7 @@
           <a:lstStyle/>
           <a:p>
             <a:pPr algn="ctr"/>
+            <a:endParaRPr/>
           </a:p>
         </p:txBody>
       </p:sp>
@@ -22426,6 +25315,7 @@
           <a:lstStyle/>
           <a:p>
             <a:pPr algn="ctr"/>
+            <a:endParaRPr/>
           </a:p>
         </p:txBody>
       </p:sp>
@@ -22506,6 +25396,7 @@
           <a:lstStyle/>
           <a:p>
             <a:pPr algn="ctr"/>
+            <a:endParaRPr/>
           </a:p>
         </p:txBody>
       </p:sp>
@@ -22586,6 +25477,7 @@
           <a:lstStyle/>
           <a:p>
             <a:pPr algn="ctr"/>
+            <a:endParaRPr/>
           </a:p>
         </p:txBody>
       </p:sp>
@@ -22666,6 +25558,7 @@
           <a:lstStyle/>
           <a:p>
             <a:pPr algn="ctr"/>
+            <a:endParaRPr/>
           </a:p>
         </p:txBody>
       </p:sp>
@@ -22746,6 +25639,7 @@
           <a:lstStyle/>
           <a:p>
             <a:pPr algn="ctr"/>
+            <a:endParaRPr/>
           </a:p>
         </p:txBody>
       </p:sp>
@@ -22826,6 +25720,7 @@
           <a:lstStyle/>
           <a:p>
             <a:pPr algn="ctr"/>
+            <a:endParaRPr/>
           </a:p>
         </p:txBody>
       </p:sp>
@@ -22906,6 +25801,7 @@
           <a:lstStyle/>
           <a:p>
             <a:pPr algn="ctr"/>
+            <a:endParaRPr/>
           </a:p>
         </p:txBody>
       </p:sp>
@@ -22986,6 +25882,7 @@
           <a:lstStyle/>
           <a:p>
             <a:pPr algn="ctr"/>
+            <a:endParaRPr/>
           </a:p>
         </p:txBody>
       </p:sp>
@@ -23147,6 +26044,7 @@
           <a:lstStyle/>
           <a:p>
             <a:pPr algn="ctr"/>
+            <a:endParaRPr/>
           </a:p>
         </p:txBody>
       </p:sp>
@@ -23221,15 +26119,12 @@
           </a:p>
           <a:p>
             <a:pPr algn="l"/>
-            <a:r>
-              <a:rPr sz="1100" b="0">
-                <a:solidFill>
-                  <a:srgbClr val="E6E6E6"/>
-                </a:solidFill>
-                <a:latin typeface="JetBrains Mono"/>
-              </a:rPr>
-              <a:t/>
-            </a:r>
+            <a:endParaRPr sz="1100" b="0">
+              <a:solidFill>
+                <a:srgbClr val="E6E6E6"/>
+              </a:solidFill>
+              <a:latin typeface="JetBrains Mono"/>
+            </a:endParaRPr>
           </a:p>
         </p:txBody>
       </p:sp>
@@ -23629,4 +26524,319 @@
   </a:objectDefaults>
   <a:extraClrSchemeLst/>
 </a:theme>
+</file>
+
+<file path=ppt/theme/theme2.xml><?xml version="1.0" encoding="utf-8"?>
+<a:theme xmlns:a="http://schemas.openxmlformats.org/drawingml/2006/main" name="Office Theme">
+  <a:themeElements>
+    <a:clrScheme name="Office">
+      <a:dk1>
+        <a:sysClr val="windowText" lastClr="000000"/>
+      </a:dk1>
+      <a:lt1>
+        <a:sysClr val="window" lastClr="FFFFFF"/>
+      </a:lt1>
+      <a:dk2>
+        <a:srgbClr val="0E2841"/>
+      </a:dk2>
+      <a:lt2>
+        <a:srgbClr val="E8E8E8"/>
+      </a:lt2>
+      <a:accent1>
+        <a:srgbClr val="156082"/>
+      </a:accent1>
+      <a:accent2>
+        <a:srgbClr val="E97132"/>
+      </a:accent2>
+      <a:accent3>
+        <a:srgbClr val="196B24"/>
+      </a:accent3>
+      <a:accent4>
+        <a:srgbClr val="0F9ED5"/>
+      </a:accent4>
+      <a:accent5>
+        <a:srgbClr val="A02B93"/>
+      </a:accent5>
+      <a:accent6>
+        <a:srgbClr val="4EA72E"/>
+      </a:accent6>
+      <a:hlink>
+        <a:srgbClr val="467886"/>
+      </a:hlink>
+      <a:folHlink>
+        <a:srgbClr val="96607D"/>
+      </a:folHlink>
+    </a:clrScheme>
+    <a:fontScheme name="Office">
+      <a:majorFont>
+        <a:latin typeface="Aptos Display" panose="02110004020202020204"/>
+        <a:ea typeface=""/>
+        <a:cs typeface=""/>
+        <a:font script="Jpan" typeface="游ゴシック Light"/>
+        <a:font script="Hang" typeface="맑은 고딕"/>
+        <a:font script="Hans" typeface="等线 Light"/>
+        <a:font script="Hant" typeface="新細明體"/>
+        <a:font script="Arab" typeface="Times New Roman"/>
+        <a:font script="Hebr" typeface="Times New Roman"/>
+        <a:font script="Thai" typeface="Angsana New"/>
+        <a:font script="Ethi" typeface="Nyala"/>
+        <a:font script="Beng" typeface="Vrinda"/>
+        <a:font script="Gujr" typeface="Shruti"/>
+        <a:font script="Khmr" typeface="MoolBoran"/>
+        <a:font script="Knda" typeface="Tunga"/>
+        <a:font script="Guru" typeface="Raavi"/>
+        <a:font script="Cans" typeface="Euphemia"/>
+        <a:font script="Cher" typeface="Plantagenet Cherokee"/>
+        <a:font script="Yiii" typeface="Microsoft Yi Baiti"/>
+        <a:font script="Tibt" typeface="Microsoft Himalaya"/>
+        <a:font script="Thaa" typeface="MV Boli"/>
+        <a:font script="Deva" typeface="Mangal"/>
+        <a:font script="Telu" typeface="Gautami"/>
+        <a:font script="Taml" typeface="Latha"/>
+        <a:font script="Syrc" typeface="Estrangelo Edessa"/>
+        <a:font script="Orya" typeface="Kalinga"/>
+        <a:font script="Mlym" typeface="Kartika"/>
+        <a:font script="Laoo" typeface="DokChampa"/>
+        <a:font script="Sinh" typeface="Iskoola Pota"/>
+        <a:font script="Mong" typeface="Mongolian Baiti"/>
+        <a:font script="Viet" typeface="Times New Roman"/>
+        <a:font script="Uigh" typeface="Microsoft Uighur"/>
+        <a:font script="Geor" typeface="Sylfaen"/>
+        <a:font script="Armn" typeface="Arial"/>
+        <a:font script="Bugi" typeface="Leelawadee UI"/>
+        <a:font script="Bopo" typeface="Microsoft JhengHei"/>
+        <a:font script="Java" typeface="Javanese Text"/>
+        <a:font script="Lisu" typeface="Segoe UI"/>
+        <a:font script="Mymr" typeface="Myanmar Text"/>
+        <a:font script="Nkoo" typeface="Ebrima"/>
+        <a:font script="Olck" typeface="Nirmala UI"/>
+        <a:font script="Osma" typeface="Ebrima"/>
+        <a:font script="Phag" typeface="Phagspa"/>
+        <a:font script="Syrn" typeface="Estrangelo Edessa"/>
+        <a:font script="Syrj" typeface="Estrangelo Edessa"/>
+        <a:font script="Syre" typeface="Estrangelo Edessa"/>
+        <a:font script="Sora" typeface="Nirmala UI"/>
+        <a:font script="Tale" typeface="Microsoft Tai Le"/>
+        <a:font script="Talu" typeface="Microsoft New Tai Lue"/>
+        <a:font script="Tfng" typeface="Ebrima"/>
+      </a:majorFont>
+      <a:minorFont>
+        <a:latin typeface="Aptos" panose="02110004020202020204"/>
+        <a:ea typeface=""/>
+        <a:cs typeface=""/>
+        <a:font script="Jpan" typeface="游ゴシック"/>
+        <a:font script="Hang" typeface="맑은 고딕"/>
+        <a:font script="Hans" typeface="等线"/>
+        <a:font script="Hant" typeface="新細明體"/>
+        <a:font script="Arab" typeface="Arial"/>
+        <a:font script="Hebr" typeface="Arial"/>
+        <a:font script="Thai" typeface="Cordia New"/>
+        <a:font script="Ethi" typeface="Nyala"/>
+        <a:font script="Beng" typeface="Vrinda"/>
+        <a:font script="Gujr" typeface="Shruti"/>
+        <a:font script="Khmr" typeface="DaunPenh"/>
+        <a:font script="Knda" typeface="Tunga"/>
+        <a:font script="Guru" typeface="Raavi"/>
+        <a:font script="Cans" typeface="Euphemia"/>
+        <a:font script="Cher" typeface="Plantagenet Cherokee"/>
+        <a:font script="Yiii" typeface="Microsoft Yi Baiti"/>
+        <a:font script="Tibt" typeface="Microsoft Himalaya"/>
+        <a:font script="Thaa" typeface="MV Boli"/>
+        <a:font script="Deva" typeface="Mangal"/>
+        <a:font script="Telu" typeface="Gautami"/>
+        <a:font script="Taml" typeface="Latha"/>
+        <a:font script="Syrc" typeface="Estrangelo Edessa"/>
+        <a:font script="Orya" typeface="Kalinga"/>
+        <a:font script="Mlym" typeface="Kartika"/>
+        <a:font script="Laoo" typeface="DokChampa"/>
+        <a:font script="Sinh" typeface="Iskoola Pota"/>
+        <a:font script="Mong" typeface="Mongolian Baiti"/>
+        <a:font script="Viet" typeface="Arial"/>
+        <a:font script="Uigh" typeface="Microsoft Uighur"/>
+        <a:font script="Geor" typeface="Sylfaen"/>
+        <a:font script="Armn" typeface="Arial"/>
+        <a:font script="Bugi" typeface="Leelawadee UI"/>
+        <a:font script="Bopo" typeface="Microsoft JhengHei"/>
+        <a:font script="Java" typeface="Javanese Text"/>
+        <a:font script="Lisu" typeface="Segoe UI"/>
+        <a:font script="Mymr" typeface="Myanmar Text"/>
+        <a:font script="Nkoo" typeface="Ebrima"/>
+        <a:font script="Olck" typeface="Nirmala UI"/>
+        <a:font script="Osma" typeface="Ebrima"/>
+        <a:font script="Phag" typeface="Phagspa"/>
+        <a:font script="Syrn" typeface="Estrangelo Edessa"/>
+        <a:font script="Syrj" typeface="Estrangelo Edessa"/>
+        <a:font script="Syre" typeface="Estrangelo Edessa"/>
+        <a:font script="Sora" typeface="Nirmala UI"/>
+        <a:font script="Tale" typeface="Microsoft Tai Le"/>
+        <a:font script="Talu" typeface="Microsoft New Tai Lue"/>
+        <a:font script="Tfng" typeface="Ebrima"/>
+      </a:minorFont>
+    </a:fontScheme>
+    <a:fmtScheme name="Office">
+      <a:fillStyleLst>
+        <a:solidFill>
+          <a:schemeClr val="phClr"/>
+        </a:solidFill>
+        <a:gradFill rotWithShape="1">
+          <a:gsLst>
+            <a:gs pos="0">
+              <a:schemeClr val="phClr">
+                <a:lumMod val="110000"/>
+                <a:satMod val="105000"/>
+                <a:tint val="67000"/>
+              </a:schemeClr>
+            </a:gs>
+            <a:gs pos="50000">
+              <a:schemeClr val="phClr">
+                <a:lumMod val="105000"/>
+                <a:satMod val="103000"/>
+                <a:tint val="73000"/>
+              </a:schemeClr>
+            </a:gs>
+            <a:gs pos="100000">
+              <a:schemeClr val="phClr">
+                <a:lumMod val="105000"/>
+                <a:satMod val="109000"/>
+                <a:tint val="81000"/>
+              </a:schemeClr>
+            </a:gs>
+          </a:gsLst>
+          <a:lin ang="5400000" scaled="0"/>
+        </a:gradFill>
+        <a:gradFill rotWithShape="1">
+          <a:gsLst>
+            <a:gs pos="0">
+              <a:schemeClr val="phClr">
+                <a:satMod val="103000"/>
+                <a:lumMod val="102000"/>
+                <a:tint val="94000"/>
+              </a:schemeClr>
+            </a:gs>
+            <a:gs pos="50000">
+              <a:schemeClr val="phClr">
+                <a:satMod val="110000"/>
+                <a:lumMod val="100000"/>
+                <a:shade val="100000"/>
+              </a:schemeClr>
+            </a:gs>
+            <a:gs pos="100000">
+              <a:schemeClr val="phClr">
+                <a:lumMod val="99000"/>
+                <a:satMod val="120000"/>
+                <a:shade val="78000"/>
+              </a:schemeClr>
+            </a:gs>
+          </a:gsLst>
+          <a:lin ang="5400000" scaled="0"/>
+        </a:gradFill>
+      </a:fillStyleLst>
+      <a:lnStyleLst>
+        <a:ln w="12700" cap="flat" cmpd="sng" algn="ctr">
+          <a:solidFill>
+            <a:schemeClr val="phClr"/>
+          </a:solidFill>
+          <a:prstDash val="solid"/>
+          <a:miter lim="800000"/>
+        </a:ln>
+        <a:ln w="19050" cap="flat" cmpd="sng" algn="ctr">
+          <a:solidFill>
+            <a:schemeClr val="phClr"/>
+          </a:solidFill>
+          <a:prstDash val="solid"/>
+          <a:miter lim="800000"/>
+        </a:ln>
+        <a:ln w="25400" cap="flat" cmpd="sng" algn="ctr">
+          <a:solidFill>
+            <a:schemeClr val="phClr"/>
+          </a:solidFill>
+          <a:prstDash val="solid"/>
+          <a:miter lim="800000"/>
+        </a:ln>
+      </a:lnStyleLst>
+      <a:effectStyleLst>
+        <a:effectStyle>
+          <a:effectLst/>
+        </a:effectStyle>
+        <a:effectStyle>
+          <a:effectLst/>
+        </a:effectStyle>
+        <a:effectStyle>
+          <a:effectLst>
+            <a:outerShdw blurRad="57150" dist="19050" dir="5400000" algn="ctr" rotWithShape="0">
+              <a:srgbClr val="000000">
+                <a:alpha val="63000"/>
+              </a:srgbClr>
+            </a:outerShdw>
+          </a:effectLst>
+        </a:effectStyle>
+      </a:effectStyleLst>
+      <a:bgFillStyleLst>
+        <a:solidFill>
+          <a:schemeClr val="phClr"/>
+        </a:solidFill>
+        <a:solidFill>
+          <a:schemeClr val="phClr">
+            <a:tint val="95000"/>
+            <a:satMod val="170000"/>
+          </a:schemeClr>
+        </a:solidFill>
+        <a:gradFill rotWithShape="1">
+          <a:gsLst>
+            <a:gs pos="0">
+              <a:schemeClr val="phClr">
+                <a:tint val="93000"/>
+                <a:satMod val="150000"/>
+                <a:shade val="98000"/>
+                <a:lumMod val="102000"/>
+              </a:schemeClr>
+            </a:gs>
+            <a:gs pos="50000">
+              <a:schemeClr val="phClr">
+                <a:tint val="98000"/>
+                <a:satMod val="130000"/>
+                <a:shade val="90000"/>
+                <a:lumMod val="103000"/>
+              </a:schemeClr>
+            </a:gs>
+            <a:gs pos="100000">
+              <a:schemeClr val="phClr">
+                <a:shade val="63000"/>
+                <a:satMod val="120000"/>
+              </a:schemeClr>
+            </a:gs>
+          </a:gsLst>
+          <a:lin ang="5400000" scaled="0"/>
+        </a:gradFill>
+      </a:bgFillStyleLst>
+    </a:fmtScheme>
+  </a:themeElements>
+  <a:objectDefaults>
+    <a:lnDef>
+      <a:spPr/>
+      <a:bodyPr/>
+      <a:lstStyle/>
+      <a:style>
+        <a:lnRef idx="2">
+          <a:schemeClr val="accent1"/>
+        </a:lnRef>
+        <a:fillRef idx="0">
+          <a:schemeClr val="accent1"/>
+        </a:fillRef>
+        <a:effectRef idx="1">
+          <a:schemeClr val="accent1"/>
+        </a:effectRef>
+        <a:fontRef idx="minor">
+          <a:schemeClr val="tx1"/>
+        </a:fontRef>
+      </a:style>
+    </a:lnDef>
+  </a:objectDefaults>
+  <a:extraClrSchemeLst/>
+  <a:extLst>
+    <a:ext uri="{05A4C25C-085E-4340-85A3-A5531E510DB2}">
+      <thm15:themeFamily xmlns:thm15="http://schemas.microsoft.com/office/thememl/2012/main" name="Office Theme" id="{2E142A2C-CD16-42D6-873A-C26D2A0506FA}" vid="{1BDDFF52-6CD6-40A5-AB3C-68EB2F1E4D0A}"/>
+    </a:ext>
+  </a:extLst>
+</a:theme>
 </file>
--- a/documentation/WarriorFit_Technisch_NL.pptx
+++ b/documentation/WarriorFit_Technisch_NL.pptx
@@ -10250,40 +10250,6 @@
       </p:sp>
       <p:sp>
         <p:nvSpPr>
-          <p:cNvPr id="54" name="TextBox 53"/>
-          <p:cNvSpPr txBox="1"/>
-          <p:nvPr/>
-        </p:nvSpPr>
-        <p:spPr>
-          <a:xfrm>
-            <a:off x="4722733" y="3995000"/>
-            <a:ext cx="2004093" cy="490000"/>
-          </a:xfrm>
-          <a:prstGeom prst="rect">
-            <a:avLst/>
-          </a:prstGeom>
-          <a:noFill/>
-        </p:spPr>
-        <p:txBody>
-          <a:bodyPr wrap="square">
-            <a:spAutoFit/>
-          </a:bodyPr>
-          <a:lstStyle/>
-          <a:p>
-            <a:pPr algn="l"/>
-            <a:r>
-              <a:rPr sz="800" b="0">
-                <a:solidFill>
-                  <a:srgbClr val="334218"/>
-                </a:solidFill>
-              </a:rPr>
-              <a:t>Cross App · Status pagina  ·  Config per environment</a:t>
-            </a:r>
-          </a:p>
-        </p:txBody>
-      </p:sp>
-      <p:sp>
-        <p:nvSpPr>
           <p:cNvPr id="55" name="Rectangle 54"/>
           <p:cNvSpPr/>
           <p:nvPr/>
@@ -10469,40 +10435,6 @@
           <a:p>
             <a:pPr algn="ctr"/>
             <a:endParaRPr/>
-          </a:p>
-        </p:txBody>
-      </p:sp>
-      <p:sp>
-        <p:nvSpPr>
-          <p:cNvPr id="60" name="TextBox 59"/>
-          <p:cNvSpPr txBox="1"/>
-          <p:nvPr/>
-        </p:nvSpPr>
-        <p:spPr>
-          <a:xfrm>
-            <a:off x="6816826" y="4700000"/>
-            <a:ext cx="2004093" cy="490000"/>
-          </a:xfrm>
-          <a:prstGeom prst="rect">
-            <a:avLst/>
-          </a:prstGeom>
-          <a:noFill/>
-        </p:spPr>
-        <p:txBody>
-          <a:bodyPr wrap="square">
-            <a:spAutoFit/>
-          </a:bodyPr>
-          <a:lstStyle/>
-          <a:p>
-            <a:pPr algn="l"/>
-            <a:r>
-              <a:rPr sz="800" b="0">
-                <a:solidFill>
-                  <a:srgbClr val="F5F1E6"/>
-                </a:solidFill>
-              </a:rPr>
-              <a:t>Argon2id  ·  GDPR/AVG consent</a:t>
-            </a:r>
           </a:p>
         </p:txBody>
       </p:sp>
